--- a/slides/2_DCcircuits.pptx
+++ b/slides/2_DCcircuits.pptx
@@ -5,7 +5,7 @@
     <p:sldMasterId id="2147483648" r:id="rId1"/>
   </p:sldMasterIdLst>
   <p:notesMasterIdLst>
-    <p:notesMasterId r:id="rId32"/>
+    <p:notesMasterId r:id="rId33"/>
   </p:notesMasterIdLst>
   <p:sldIdLst>
     <p:sldId id="257" r:id="rId2"/>
@@ -13,31 +13,32 @@
     <p:sldId id="259" r:id="rId4"/>
     <p:sldId id="273" r:id="rId5"/>
     <p:sldId id="266" r:id="rId6"/>
-    <p:sldId id="262" r:id="rId7"/>
-    <p:sldId id="272" r:id="rId8"/>
-    <p:sldId id="263" r:id="rId9"/>
-    <p:sldId id="260" r:id="rId10"/>
-    <p:sldId id="261" r:id="rId11"/>
-    <p:sldId id="268" r:id="rId12"/>
-    <p:sldId id="279" r:id="rId13"/>
-    <p:sldId id="285" r:id="rId14"/>
-    <p:sldId id="278" r:id="rId15"/>
-    <p:sldId id="286" r:id="rId16"/>
-    <p:sldId id="274" r:id="rId17"/>
-    <p:sldId id="280" r:id="rId18"/>
-    <p:sldId id="282" r:id="rId19"/>
-    <p:sldId id="283" r:id="rId20"/>
-    <p:sldId id="284" r:id="rId21"/>
-    <p:sldId id="287" r:id="rId22"/>
-    <p:sldId id="288" r:id="rId23"/>
-    <p:sldId id="289" r:id="rId24"/>
-    <p:sldId id="295" r:id="rId25"/>
-    <p:sldId id="294" r:id="rId26"/>
-    <p:sldId id="293" r:id="rId27"/>
-    <p:sldId id="292" r:id="rId28"/>
-    <p:sldId id="290" r:id="rId29"/>
-    <p:sldId id="291" r:id="rId30"/>
-    <p:sldId id="296" r:id="rId31"/>
+    <p:sldId id="297" r:id="rId7"/>
+    <p:sldId id="262" r:id="rId8"/>
+    <p:sldId id="272" r:id="rId9"/>
+    <p:sldId id="263" r:id="rId10"/>
+    <p:sldId id="260" r:id="rId11"/>
+    <p:sldId id="261" r:id="rId12"/>
+    <p:sldId id="268" r:id="rId13"/>
+    <p:sldId id="279" r:id="rId14"/>
+    <p:sldId id="285" r:id="rId15"/>
+    <p:sldId id="278" r:id="rId16"/>
+    <p:sldId id="286" r:id="rId17"/>
+    <p:sldId id="274" r:id="rId18"/>
+    <p:sldId id="280" r:id="rId19"/>
+    <p:sldId id="282" r:id="rId20"/>
+    <p:sldId id="283" r:id="rId21"/>
+    <p:sldId id="284" r:id="rId22"/>
+    <p:sldId id="287" r:id="rId23"/>
+    <p:sldId id="288" r:id="rId24"/>
+    <p:sldId id="289" r:id="rId25"/>
+    <p:sldId id="295" r:id="rId26"/>
+    <p:sldId id="294" r:id="rId27"/>
+    <p:sldId id="293" r:id="rId28"/>
+    <p:sldId id="292" r:id="rId29"/>
+    <p:sldId id="290" r:id="rId30"/>
+    <p:sldId id="291" r:id="rId31"/>
+    <p:sldId id="296" r:id="rId32"/>
   </p:sldIdLst>
   <p:sldSz cx="12192000" cy="6858000"/>
   <p:notesSz cx="6858000" cy="9144000"/>
@@ -226,7 +227,7 @@
           <a:p>
             <a:fld id="{50F0DBE5-119B-9546-A717-70798062973B}" type="datetimeFigureOut">
               <a:rPr lang="de-DE" smtClean="0"/>
-              <a:t>08.09.25</a:t>
+              <a:t>08.10.25</a:t>
             </a:fld>
             <a:endParaRPr lang="de-DE"/>
           </a:p>
@@ -640,7 +641,7 @@
           <a:p>
             <a:fld id="{CE5B6352-3465-4344-964A-B25153893676}" type="datetime1">
               <a:rPr lang="de-DE" smtClean="0"/>
-              <a:t>08.09.25</a:t>
+              <a:t>08.10.25</a:t>
             </a:fld>
             <a:endParaRPr lang="de-DE"/>
           </a:p>
@@ -838,7 +839,7 @@
           <a:p>
             <a:fld id="{680476C1-F079-0F40-9C5B-039EA12ABDAA}" type="datetime1">
               <a:rPr lang="de-DE" smtClean="0"/>
-              <a:t>08.09.25</a:t>
+              <a:t>08.10.25</a:t>
             </a:fld>
             <a:endParaRPr lang="de-DE"/>
           </a:p>
@@ -1046,7 +1047,7 @@
           <a:p>
             <a:fld id="{95A166F0-C736-5846-BD29-206B3FE0CE89}" type="datetime1">
               <a:rPr lang="de-DE" smtClean="0"/>
-              <a:t>08.09.25</a:t>
+              <a:t>08.10.25</a:t>
             </a:fld>
             <a:endParaRPr lang="de-DE"/>
           </a:p>
@@ -1244,7 +1245,7 @@
           <a:p>
             <a:fld id="{C501BE91-62CD-C14F-A910-7294FC82D4A0}" type="datetime1">
               <a:rPr lang="de-DE" smtClean="0"/>
-              <a:t>08.09.25</a:t>
+              <a:t>08.10.25</a:t>
             </a:fld>
             <a:endParaRPr lang="de-DE"/>
           </a:p>
@@ -1519,7 +1520,7 @@
           <a:p>
             <a:fld id="{BF974C23-8003-8246-BE47-B5ECC9F69FCF}" type="datetime1">
               <a:rPr lang="de-DE" smtClean="0"/>
-              <a:t>08.09.25</a:t>
+              <a:t>08.10.25</a:t>
             </a:fld>
             <a:endParaRPr lang="de-DE"/>
           </a:p>
@@ -1784,7 +1785,7 @@
           <a:p>
             <a:fld id="{9399C134-D3BA-F044-A1BA-5D8F00C16B33}" type="datetime1">
               <a:rPr lang="de-DE" smtClean="0"/>
-              <a:t>08.09.25</a:t>
+              <a:t>08.10.25</a:t>
             </a:fld>
             <a:endParaRPr lang="de-DE"/>
           </a:p>
@@ -2196,7 +2197,7 @@
           <a:p>
             <a:fld id="{CAA0E14A-B13F-B84D-BA0A-4382E133E05F}" type="datetime1">
               <a:rPr lang="de-DE" smtClean="0"/>
-              <a:t>08.09.25</a:t>
+              <a:t>08.10.25</a:t>
             </a:fld>
             <a:endParaRPr lang="de-DE"/>
           </a:p>
@@ -2337,7 +2338,7 @@
           <a:p>
             <a:fld id="{82499081-64A1-E641-A060-B3FE5E7414AE}" type="datetime1">
               <a:rPr lang="de-DE" smtClean="0"/>
-              <a:t>08.09.25</a:t>
+              <a:t>08.10.25</a:t>
             </a:fld>
             <a:endParaRPr lang="de-DE"/>
           </a:p>
@@ -2450,7 +2451,7 @@
           <a:p>
             <a:fld id="{72507737-E8BF-5348-A8D5-F635D39F9B4A}" type="datetime1">
               <a:rPr lang="de-DE" smtClean="0"/>
-              <a:t>08.09.25</a:t>
+              <a:t>08.10.25</a:t>
             </a:fld>
             <a:endParaRPr lang="de-DE"/>
           </a:p>
@@ -2761,7 +2762,7 @@
           <a:p>
             <a:fld id="{E5AF2D44-8DB2-1E42-B969-A879F4E80DE2}" type="datetime1">
               <a:rPr lang="de-DE" smtClean="0"/>
-              <a:t>08.09.25</a:t>
+              <a:t>08.10.25</a:t>
             </a:fld>
             <a:endParaRPr lang="de-DE"/>
           </a:p>
@@ -3049,7 +3050,7 @@
           <a:p>
             <a:fld id="{BDCC8AD7-B1B1-5742-9D45-5FF116011C65}" type="datetime1">
               <a:rPr lang="de-DE" smtClean="0"/>
-              <a:t>08.09.25</a:t>
+              <a:t>08.10.25</a:t>
             </a:fld>
             <a:endParaRPr lang="de-DE"/>
           </a:p>
@@ -3290,7 +3291,7 @@
           <a:p>
             <a:fld id="{108D9C44-3672-2C4D-8D64-277C579E81B1}" type="datetime1">
               <a:rPr lang="de-DE" smtClean="0"/>
-              <a:t>08.09.25</a:t>
+              <a:t>08.10.25</a:t>
             </a:fld>
             <a:endParaRPr lang="de-DE"/>
           </a:p>
@@ -3970,6 +3971,676 @@
           <p:cNvPr id="2" name="Titel 1">
             <a:extLst>
               <a:ext uri="{FF2B5EF4-FFF2-40B4-BE49-F238E27FC236}">
+                <a16:creationId xmlns:a16="http://schemas.microsoft.com/office/drawing/2014/main" id="{2D434D68-460B-0810-0F61-31F0C5D06B18}"/>
+              </a:ext>
+            </a:extLst>
+          </p:cNvPr>
+          <p:cNvSpPr>
+            <a:spLocks noGrp="1"/>
+          </p:cNvSpPr>
+          <p:nvPr>
+            <p:ph type="title"/>
+          </p:nvPr>
+        </p:nvSpPr>
+        <p:spPr/>
+        <p:txBody>
+          <a:bodyPr/>
+          <a:lstStyle/>
+          <a:p>
+            <a:r>
+              <a:rPr lang="de-DE" dirty="0" err="1"/>
+              <a:t>Kirchhoff‘s</a:t>
+            </a:r>
+            <a:r>
+              <a:rPr lang="de-DE" dirty="0"/>
+              <a:t> </a:t>
+            </a:r>
+            <a:r>
+              <a:rPr lang="de-DE" dirty="0" err="1"/>
+              <a:t>Current</a:t>
+            </a:r>
+            <a:r>
+              <a:rPr lang="de-DE" dirty="0"/>
+              <a:t> Law (KCL)</a:t>
+            </a:r>
+          </a:p>
+        </p:txBody>
+      </p:sp>
+      <mc:AlternateContent xmlns:mc="http://schemas.openxmlformats.org/markup-compatibility/2006" xmlns:a14="http://schemas.microsoft.com/office/drawing/2010/main">
+        <mc:Choice Requires="a14">
+          <p:sp>
+            <p:nvSpPr>
+              <p:cNvPr id="3" name="Inhaltsplatzhalter 2">
+                <a:extLst>
+                  <a:ext uri="{FF2B5EF4-FFF2-40B4-BE49-F238E27FC236}">
+                    <a16:creationId xmlns:a16="http://schemas.microsoft.com/office/drawing/2014/main" id="{146CD885-272B-E2E7-DA1D-5107CAF2EDE4}"/>
+                  </a:ext>
+                </a:extLst>
+              </p:cNvPr>
+              <p:cNvSpPr>
+                <a:spLocks noGrp="1"/>
+              </p:cNvSpPr>
+              <p:nvPr>
+                <p:ph idx="1"/>
+              </p:nvPr>
+            </p:nvSpPr>
+            <p:spPr/>
+            <p:txBody>
+              <a:bodyPr/>
+              <a:lstStyle/>
+              <a:p>
+                <a:pPr marL="0" indent="0">
+                  <a:buNone/>
+                </a:pPr>
+                <a:r>
+                  <a:rPr lang="de-DE" dirty="0"/>
+                  <a:t>sum </a:t>
+                </a:r>
+                <a:r>
+                  <a:rPr lang="de-DE" dirty="0" err="1"/>
+                  <a:t>of</a:t>
+                </a:r>
+                <a:r>
+                  <a:rPr lang="de-DE" dirty="0"/>
+                  <a:t> all </a:t>
+                </a:r>
+                <a:r>
+                  <a:rPr lang="de-DE" dirty="0" err="1"/>
+                  <a:t>currents</a:t>
+                </a:r>
+                <a:r>
+                  <a:rPr lang="de-DE" dirty="0"/>
+                  <a:t> </a:t>
+                </a:r>
+                <a:r>
+                  <a:rPr lang="de-DE" dirty="0" err="1"/>
+                  <a:t>entering</a:t>
+                </a:r>
+                <a:r>
+                  <a:rPr lang="de-DE" dirty="0"/>
+                  <a:t> a </a:t>
+                </a:r>
+                <a:r>
+                  <a:rPr lang="de-DE" dirty="0" err="1"/>
+                  <a:t>junction</a:t>
+                </a:r>
+                <a:r>
+                  <a:rPr lang="de-DE" dirty="0"/>
+                  <a:t> (</a:t>
+                </a:r>
+                <a:r>
+                  <a:rPr lang="de-DE" dirty="0" err="1"/>
+                  <a:t>node</a:t>
+                </a:r>
+                <a:r>
+                  <a:rPr lang="de-DE" dirty="0"/>
+                  <a:t>) </a:t>
+                </a:r>
+                <a:r>
+                  <a:rPr lang="de-DE" dirty="0" err="1"/>
+                  <a:t>equals</a:t>
+                </a:r>
+                <a:r>
+                  <a:rPr lang="de-DE" dirty="0"/>
+                  <a:t> </a:t>
+                </a:r>
+                <a:r>
+                  <a:rPr lang="de-DE" dirty="0" err="1"/>
+                  <a:t>sum</a:t>
+                </a:r>
+                <a:r>
+                  <a:rPr lang="de-DE" dirty="0"/>
+                  <a:t> </a:t>
+                </a:r>
+                <a:r>
+                  <a:rPr lang="de-DE" dirty="0" err="1"/>
+                  <a:t>of</a:t>
+                </a:r>
+                <a:r>
+                  <a:rPr lang="de-DE" dirty="0"/>
+                  <a:t> all </a:t>
+                </a:r>
+                <a:r>
+                  <a:rPr lang="de-DE" dirty="0" err="1"/>
+                  <a:t>currents</a:t>
+                </a:r>
+                <a:r>
+                  <a:rPr lang="de-DE" dirty="0"/>
+                  <a:t> </a:t>
+                </a:r>
+                <a:r>
+                  <a:rPr lang="de-DE" dirty="0" err="1"/>
+                  <a:t>leaving</a:t>
+                </a:r>
+                <a:r>
+                  <a:rPr lang="de-DE" dirty="0"/>
+                  <a:t> </a:t>
+                </a:r>
+                <a:r>
+                  <a:rPr lang="de-DE" dirty="0" err="1"/>
+                  <a:t>that</a:t>
+                </a:r>
+                <a:r>
+                  <a:rPr lang="de-DE" dirty="0"/>
+                  <a:t> </a:t>
+                </a:r>
+                <a:r>
+                  <a:rPr lang="de-DE" dirty="0" err="1"/>
+                  <a:t>junction</a:t>
+                </a:r>
+                <a:r>
+                  <a:rPr lang="de-DE" dirty="0"/>
+                  <a:t> (</a:t>
+                </a:r>
+                <a:r>
+                  <a:rPr lang="de-DE" dirty="0" err="1"/>
+                  <a:t>conservation</a:t>
+                </a:r>
+                <a:r>
+                  <a:rPr lang="de-DE" dirty="0"/>
+                  <a:t> </a:t>
+                </a:r>
+                <a:r>
+                  <a:rPr lang="de-DE" dirty="0" err="1"/>
+                  <a:t>of</a:t>
+                </a:r>
+                <a:r>
+                  <a:rPr lang="de-DE" dirty="0"/>
+                  <a:t> </a:t>
+                </a:r>
+                <a:r>
+                  <a:rPr lang="de-DE" dirty="0" err="1"/>
+                  <a:t>charge</a:t>
+                </a:r>
+                <a:r>
+                  <a:rPr lang="de-DE" dirty="0"/>
+                  <a:t>)</a:t>
+                </a:r>
+              </a:p>
+              <a:p>
+                <a:pPr marL="0" indent="0">
+                  <a:buNone/>
+                </a:pPr>
+                <a:endParaRPr lang="de-DE" dirty="0"/>
+              </a:p>
+              <a:p>
+                <a:pPr marL="0" indent="0">
+                  <a:buNone/>
+                </a:pPr>
+                <a:endParaRPr lang="de-DE" dirty="0"/>
+              </a:p>
+              <a:p>
+                <a:pPr marL="0" indent="0">
+                  <a:buNone/>
+                </a:pPr>
+                <a14:m>
+                  <m:oMathPara xmlns:m="http://schemas.openxmlformats.org/officeDocument/2006/math">
+                    <m:oMathParaPr>
+                      <m:jc m:val="left"/>
+                    </m:oMathParaPr>
+                    <m:oMath xmlns:m="http://schemas.openxmlformats.org/officeDocument/2006/math">
+                      <m:nary>
+                        <m:naryPr>
+                          <m:chr m:val="∑"/>
+                          <m:limLoc m:val="undOvr"/>
+                          <m:ctrlPr>
+                            <a:rPr lang="de-DE" i="1">
+                              <a:latin typeface="Cambria Math" panose="02040503050406030204" pitchFamily="18" charset="0"/>
+                            </a:rPr>
+                          </m:ctrlPr>
+                        </m:naryPr>
+                        <m:sub>
+                          <m:r>
+                            <m:rPr>
+                              <m:brk/>
+                            </m:rPr>
+                            <a:rPr lang="de-DE" b="0" i="1" smtClean="0">
+                              <a:latin typeface="Cambria Math" panose="02040503050406030204" pitchFamily="18" charset="0"/>
+                            </a:rPr>
+                            <m:t>𝑘</m:t>
+                          </m:r>
+                          <m:r>
+                            <a:rPr lang="de-DE" i="1">
+                              <a:latin typeface="Cambria Math" panose="02040503050406030204" pitchFamily="18" charset="0"/>
+                            </a:rPr>
+                            <m:t>=1</m:t>
+                          </m:r>
+                        </m:sub>
+                        <m:sup>
+                          <m:r>
+                            <a:rPr lang="de-DE" i="1">
+                              <a:latin typeface="Cambria Math" panose="02040503050406030204" pitchFamily="18" charset="0"/>
+                            </a:rPr>
+                            <m:t>𝑛</m:t>
+                          </m:r>
+                        </m:sup>
+                        <m:e>
+                          <m:sSub>
+                            <m:sSubPr>
+                              <m:ctrlPr>
+                                <a:rPr lang="de-DE" i="1">
+                                  <a:latin typeface="Cambria Math" panose="02040503050406030204" pitchFamily="18" charset="0"/>
+                                </a:rPr>
+                              </m:ctrlPr>
+                            </m:sSubPr>
+                            <m:e>
+                              <m:r>
+                                <a:rPr lang="de-DE" i="1">
+                                  <a:latin typeface="Cambria Math" panose="02040503050406030204" pitchFamily="18" charset="0"/>
+                                </a:rPr>
+                                <m:t>𝐼</m:t>
+                              </m:r>
+                            </m:e>
+                            <m:sub>
+                              <m:r>
+                                <a:rPr lang="de-DE" b="0" i="1" smtClean="0">
+                                  <a:latin typeface="Cambria Math" panose="02040503050406030204" pitchFamily="18" charset="0"/>
+                                </a:rPr>
+                                <m:t>𝑘</m:t>
+                              </m:r>
+                            </m:sub>
+                          </m:sSub>
+                        </m:e>
+                      </m:nary>
+                      <m:r>
+                        <a:rPr lang="de-DE" i="1">
+                          <a:latin typeface="Cambria Math" panose="02040503050406030204" pitchFamily="18" charset="0"/>
+                        </a:rPr>
+                        <m:t>=0</m:t>
+                      </m:r>
+                    </m:oMath>
+                  </m:oMathPara>
+                </a14:m>
+                <a:endParaRPr lang="de-DE" dirty="0"/>
+              </a:p>
+              <a:p>
+                <a:pPr marL="0" indent="0">
+                  <a:buNone/>
+                </a:pPr>
+                <a:endParaRPr lang="de-DE" dirty="0"/>
+              </a:p>
+              <a:p>
+                <a:pPr marL="0" indent="0">
+                  <a:buNone/>
+                </a:pPr>
+                <a:endParaRPr lang="de-DE" dirty="0"/>
+              </a:p>
+            </p:txBody>
+          </p:sp>
+        </mc:Choice>
+        <mc:Fallback xmlns="">
+          <p:sp>
+            <p:nvSpPr>
+              <p:cNvPr id="3" name="Inhaltsplatzhalter 2">
+                <a:extLst>
+                  <a:ext uri="{FF2B5EF4-FFF2-40B4-BE49-F238E27FC236}">
+                    <a16:creationId xmlns:a16="http://schemas.microsoft.com/office/drawing/2014/main" id="{146CD885-272B-E2E7-DA1D-5107CAF2EDE4}"/>
+                  </a:ext>
+                </a:extLst>
+              </p:cNvPr>
+              <p:cNvSpPr>
+                <a:spLocks noGrp="1" noRot="1" noChangeAspect="1" noMove="1" noResize="1" noEditPoints="1" noAdjustHandles="1" noChangeArrowheads="1" noChangeShapeType="1" noTextEdit="1"/>
+              </p:cNvSpPr>
+              <p:nvPr>
+                <p:ph idx="1"/>
+              </p:nvPr>
+            </p:nvSpPr>
+            <p:spPr>
+              <a:blipFill>
+                <a:blip r:embed="rId2"/>
+                <a:stretch>
+                  <a:fillRect l="-11821" t="-2326" b="-15988"/>
+                </a:stretch>
+              </a:blipFill>
+            </p:spPr>
+            <p:txBody>
+              <a:bodyPr/>
+              <a:lstStyle/>
+              <a:p>
+                <a:r>
+                  <a:rPr lang="de-DE">
+                    <a:noFill/>
+                  </a:rPr>
+                  <a:t> </a:t>
+                </a:r>
+              </a:p>
+            </p:txBody>
+          </p:sp>
+        </mc:Fallback>
+      </mc:AlternateContent>
+      <p:sp>
+        <p:nvSpPr>
+          <p:cNvPr id="4" name="Foliennummernplatzhalter 3">
+            <a:extLst>
+              <a:ext uri="{FF2B5EF4-FFF2-40B4-BE49-F238E27FC236}">
+                <a16:creationId xmlns:a16="http://schemas.microsoft.com/office/drawing/2014/main" id="{B0F181A0-9A1C-22EC-DFBF-DCCB5135AFC2}"/>
+              </a:ext>
+            </a:extLst>
+          </p:cNvPr>
+          <p:cNvSpPr>
+            <a:spLocks noGrp="1"/>
+          </p:cNvSpPr>
+          <p:nvPr>
+            <p:ph type="sldNum" sz="quarter" idx="12"/>
+          </p:nvPr>
+        </p:nvSpPr>
+        <p:spPr/>
+        <p:txBody>
+          <a:bodyPr/>
+          <a:lstStyle/>
+          <a:p>
+            <a:fld id="{BA3EAA6B-85FB-CD46-8BDC-C1BC3364C8C0}" type="slidenum">
+              <a:rPr lang="de-DE" smtClean="0"/>
+              <a:t>10</a:t>
+            </a:fld>
+            <a:endParaRPr lang="de-DE"/>
+          </a:p>
+        </p:txBody>
+      </p:sp>
+      <p:pic>
+        <p:nvPicPr>
+          <p:cNvPr id="5" name="Inhaltsplatzhalter 4">
+            <a:extLst>
+              <a:ext uri="{FF2B5EF4-FFF2-40B4-BE49-F238E27FC236}">
+                <a16:creationId xmlns:a16="http://schemas.microsoft.com/office/drawing/2014/main" id="{64B5AD93-B8BE-EE84-E78F-68D7EE5DA67C}"/>
+              </a:ext>
+            </a:extLst>
+          </p:cNvPr>
+          <p:cNvPicPr>
+            <a:picLocks noChangeAspect="1"/>
+          </p:cNvPicPr>
+          <p:nvPr/>
+        </p:nvPicPr>
+        <p:blipFill>
+          <a:blip r:embed="rId3"/>
+          <a:stretch>
+            <a:fillRect/>
+          </a:stretch>
+        </p:blipFill>
+        <p:spPr>
+          <a:xfrm>
+            <a:off x="5496817" y="3103181"/>
+            <a:ext cx="3113783" cy="2592932"/>
+          </a:xfrm>
+          <a:prstGeom prst="rect">
+            <a:avLst/>
+          </a:prstGeom>
+        </p:spPr>
+      </p:pic>
+      <mc:AlternateContent xmlns:mc="http://schemas.openxmlformats.org/markup-compatibility/2006" xmlns:a14="http://schemas.microsoft.com/office/drawing/2010/main">
+        <mc:Choice Requires="a14">
+          <p:sp>
+            <p:nvSpPr>
+              <p:cNvPr id="7" name="Textfeld 6">
+                <a:extLst>
+                  <a:ext uri="{FF2B5EF4-FFF2-40B4-BE49-F238E27FC236}">
+                    <a16:creationId xmlns:a16="http://schemas.microsoft.com/office/drawing/2014/main" id="{3CDA6B18-DA66-F780-B3E6-FA094A163153}"/>
+                  </a:ext>
+                </a:extLst>
+              </p:cNvPr>
+              <p:cNvSpPr txBox="1"/>
+              <p:nvPr/>
+            </p:nvSpPr>
+            <p:spPr>
+              <a:xfrm>
+                <a:off x="5620360" y="5945737"/>
+                <a:ext cx="2866696" cy="461665"/>
+              </a:xfrm>
+              <a:prstGeom prst="rect">
+                <a:avLst/>
+              </a:prstGeom>
+              <a:noFill/>
+            </p:spPr>
+            <p:txBody>
+              <a:bodyPr wrap="square">
+                <a:spAutoFit/>
+              </a:bodyPr>
+              <a:lstStyle/>
+              <a:p>
+                <a:pPr/>
+                <a14:m>
+                  <m:oMathPara xmlns:m="http://schemas.openxmlformats.org/officeDocument/2006/math">
+                    <m:oMathParaPr>
+                      <m:jc m:val="left"/>
+                    </m:oMathParaPr>
+                    <m:oMath xmlns:m="http://schemas.openxmlformats.org/officeDocument/2006/math">
+                      <m:sSub>
+                        <m:sSubPr>
+                          <m:ctrlPr>
+                            <a:rPr lang="de-DE" sz="2400" i="1" smtClean="0">
+                              <a:latin typeface="Cambria Math" panose="02040503050406030204" pitchFamily="18" charset="0"/>
+                            </a:rPr>
+                          </m:ctrlPr>
+                        </m:sSubPr>
+                        <m:e>
+                          <m:r>
+                            <a:rPr lang="de-DE" sz="2400" b="0" i="1" smtClean="0">
+                              <a:latin typeface="Cambria Math" panose="02040503050406030204" pitchFamily="18" charset="0"/>
+                            </a:rPr>
+                            <m:t>𝐼</m:t>
+                          </m:r>
+                        </m:e>
+                        <m:sub>
+                          <m:r>
+                            <a:rPr lang="de-DE" sz="2400" b="0" i="1" smtClean="0">
+                              <a:latin typeface="Cambria Math" panose="02040503050406030204" pitchFamily="18" charset="0"/>
+                            </a:rPr>
+                            <m:t>1</m:t>
+                          </m:r>
+                        </m:sub>
+                      </m:sSub>
+                      <m:r>
+                        <a:rPr lang="de-DE" sz="2400" b="0" i="1" smtClean="0">
+                          <a:latin typeface="Cambria Math" panose="02040503050406030204" pitchFamily="18" charset="0"/>
+                        </a:rPr>
+                        <m:t>+</m:t>
+                      </m:r>
+                      <m:sSub>
+                        <m:sSubPr>
+                          <m:ctrlPr>
+                            <a:rPr lang="de-DE" sz="2400" i="1">
+                              <a:latin typeface="Cambria Math" panose="02040503050406030204" pitchFamily="18" charset="0"/>
+                            </a:rPr>
+                          </m:ctrlPr>
+                        </m:sSubPr>
+                        <m:e>
+                          <m:r>
+                            <a:rPr lang="de-DE" sz="2400" i="1">
+                              <a:latin typeface="Cambria Math" panose="02040503050406030204" pitchFamily="18" charset="0"/>
+                            </a:rPr>
+                            <m:t>𝐼</m:t>
+                          </m:r>
+                        </m:e>
+                        <m:sub>
+                          <m:r>
+                            <a:rPr lang="de-DE" sz="2400" b="0" i="1" smtClean="0">
+                              <a:latin typeface="Cambria Math" panose="02040503050406030204" pitchFamily="18" charset="0"/>
+                            </a:rPr>
+                            <m:t>2</m:t>
+                          </m:r>
+                        </m:sub>
+                      </m:sSub>
+                      <m:r>
+                        <a:rPr lang="de-DE" sz="2400" b="0" i="1" smtClean="0">
+                          <a:latin typeface="Cambria Math" panose="02040503050406030204" pitchFamily="18" charset="0"/>
+                        </a:rPr>
+                        <m:t>+</m:t>
+                      </m:r>
+                      <m:sSub>
+                        <m:sSubPr>
+                          <m:ctrlPr>
+                            <a:rPr lang="de-DE" sz="2400" i="1">
+                              <a:latin typeface="Cambria Math" panose="02040503050406030204" pitchFamily="18" charset="0"/>
+                            </a:rPr>
+                          </m:ctrlPr>
+                        </m:sSubPr>
+                        <m:e>
+                          <m:r>
+                            <a:rPr lang="de-DE" sz="2400" i="1">
+                              <a:latin typeface="Cambria Math" panose="02040503050406030204" pitchFamily="18" charset="0"/>
+                            </a:rPr>
+                            <m:t>𝐼</m:t>
+                          </m:r>
+                        </m:e>
+                        <m:sub>
+                          <m:r>
+                            <a:rPr lang="de-DE" sz="2400" b="0" i="1" smtClean="0">
+                              <a:latin typeface="Cambria Math" panose="02040503050406030204" pitchFamily="18" charset="0"/>
+                            </a:rPr>
+                            <m:t>3</m:t>
+                          </m:r>
+                        </m:sub>
+                      </m:sSub>
+                      <m:r>
+                        <a:rPr lang="de-DE" sz="2400" i="1">
+                          <a:latin typeface="Cambria Math" panose="02040503050406030204" pitchFamily="18" charset="0"/>
+                        </a:rPr>
+                        <m:t>=</m:t>
+                      </m:r>
+                      <m:sSub>
+                        <m:sSubPr>
+                          <m:ctrlPr>
+                            <a:rPr lang="de-DE" sz="2400" i="1">
+                              <a:latin typeface="Cambria Math" panose="02040503050406030204" pitchFamily="18" charset="0"/>
+                            </a:rPr>
+                          </m:ctrlPr>
+                        </m:sSubPr>
+                        <m:e>
+                          <m:r>
+                            <a:rPr lang="de-DE" sz="2400" i="1">
+                              <a:latin typeface="Cambria Math" panose="02040503050406030204" pitchFamily="18" charset="0"/>
+                            </a:rPr>
+                            <m:t>𝐼</m:t>
+                          </m:r>
+                        </m:e>
+                        <m:sub>
+                          <m:r>
+                            <a:rPr lang="de-DE" sz="2400" b="0" i="1" smtClean="0">
+                              <a:latin typeface="Cambria Math" panose="02040503050406030204" pitchFamily="18" charset="0"/>
+                            </a:rPr>
+                            <m:t>4</m:t>
+                          </m:r>
+                        </m:sub>
+                      </m:sSub>
+                      <m:r>
+                        <a:rPr lang="de-DE" sz="2400" b="0" i="1" smtClean="0">
+                          <a:latin typeface="Cambria Math" panose="02040503050406030204" pitchFamily="18" charset="0"/>
+                        </a:rPr>
+                        <m:t>+</m:t>
+                      </m:r>
+                      <m:sSub>
+                        <m:sSubPr>
+                          <m:ctrlPr>
+                            <a:rPr lang="de-DE" sz="2400" i="1">
+                              <a:latin typeface="Cambria Math" panose="02040503050406030204" pitchFamily="18" charset="0"/>
+                            </a:rPr>
+                          </m:ctrlPr>
+                        </m:sSubPr>
+                        <m:e>
+                          <m:r>
+                            <a:rPr lang="de-DE" sz="2400" i="1">
+                              <a:latin typeface="Cambria Math" panose="02040503050406030204" pitchFamily="18" charset="0"/>
+                            </a:rPr>
+                            <m:t>𝐼</m:t>
+                          </m:r>
+                        </m:e>
+                        <m:sub>
+                          <m:r>
+                            <a:rPr lang="de-DE" sz="2400" b="0" i="1" smtClean="0">
+                              <a:latin typeface="Cambria Math" panose="02040503050406030204" pitchFamily="18" charset="0"/>
+                            </a:rPr>
+                            <m:t>5</m:t>
+                          </m:r>
+                        </m:sub>
+                      </m:sSub>
+                    </m:oMath>
+                  </m:oMathPara>
+                </a14:m>
+                <a:endParaRPr lang="de-DE" sz="2400" dirty="0"/>
+              </a:p>
+            </p:txBody>
+          </p:sp>
+        </mc:Choice>
+        <mc:Fallback xmlns="">
+          <p:sp>
+            <p:nvSpPr>
+              <p:cNvPr id="7" name="Textfeld 6">
+                <a:extLst>
+                  <a:ext uri="{FF2B5EF4-FFF2-40B4-BE49-F238E27FC236}">
+                    <a16:creationId xmlns:a16="http://schemas.microsoft.com/office/drawing/2014/main" id="{3CDA6B18-DA66-F780-B3E6-FA094A163153}"/>
+                  </a:ext>
+                </a:extLst>
+              </p:cNvPr>
+              <p:cNvSpPr txBox="1">
+                <a:spLocks noRot="1" noChangeAspect="1" noMove="1" noResize="1" noEditPoints="1" noAdjustHandles="1" noChangeArrowheads="1" noChangeShapeType="1" noTextEdit="1"/>
+              </p:cNvSpPr>
+              <p:nvPr/>
+            </p:nvSpPr>
+            <p:spPr>
+              <a:xfrm>
+                <a:off x="5620360" y="5945737"/>
+                <a:ext cx="2866696" cy="461665"/>
+              </a:xfrm>
+              <a:prstGeom prst="rect">
+                <a:avLst/>
+              </a:prstGeom>
+              <a:blipFill>
+                <a:blip r:embed="rId4"/>
+                <a:stretch>
+                  <a:fillRect l="-441"/>
+                </a:stretch>
+              </a:blipFill>
+            </p:spPr>
+            <p:txBody>
+              <a:bodyPr/>
+              <a:lstStyle/>
+              <a:p>
+                <a:r>
+                  <a:rPr lang="de-DE">
+                    <a:noFill/>
+                  </a:rPr>
+                  <a:t> </a:t>
+                </a:r>
+              </a:p>
+            </p:txBody>
+          </p:sp>
+        </mc:Fallback>
+      </mc:AlternateContent>
+    </p:spTree>
+    <p:extLst>
+      <p:ext uri="{BB962C8B-B14F-4D97-AF65-F5344CB8AC3E}">
+        <p14:creationId xmlns:p14="http://schemas.microsoft.com/office/powerpoint/2010/main" val="2969478246"/>
+      </p:ext>
+    </p:extLst>
+  </p:cSld>
+  <p:clrMapOvr>
+    <a:masterClrMapping/>
+  </p:clrMapOvr>
+</p:sld>
+</file>
+
+<file path=ppt/slides/slide11.xml><?xml version="1.0" encoding="utf-8"?>
+<p:sld xmlns:a="http://schemas.openxmlformats.org/drawingml/2006/main" xmlns:r="http://schemas.openxmlformats.org/officeDocument/2006/relationships" xmlns:p="http://schemas.openxmlformats.org/presentationml/2006/main">
+  <p:cSld>
+    <p:spTree>
+      <p:nvGrpSpPr>
+        <p:cNvPr id="1" name=""/>
+        <p:cNvGrpSpPr/>
+        <p:nvPr/>
+      </p:nvGrpSpPr>
+      <p:grpSpPr>
+        <a:xfrm>
+          <a:off x="0" y="0"/>
+          <a:ext cx="0" cy="0"/>
+          <a:chOff x="0" y="0"/>
+          <a:chExt cx="0" cy="0"/>
+        </a:xfrm>
+      </p:grpSpPr>
+      <p:sp>
+        <p:nvSpPr>
+          <p:cNvPr id="2" name="Titel 1">
+            <a:extLst>
+              <a:ext uri="{FF2B5EF4-FFF2-40B4-BE49-F238E27FC236}">
                 <a16:creationId xmlns:a16="http://schemas.microsoft.com/office/drawing/2014/main" id="{6C8902DB-D2FE-B34C-E3ED-3BB281CA335B}"/>
               </a:ext>
             </a:extLst>
@@ -4300,7 +4971,7 @@
           <a:p>
             <a:fld id="{BA3EAA6B-85FB-CD46-8BDC-C1BC3364C8C0}" type="slidenum">
               <a:rPr lang="de-DE" smtClean="0"/>
-              <a:t>10</a:t>
+              <a:t>11</a:t>
             </a:fld>
             <a:endParaRPr lang="de-DE"/>
           </a:p>
@@ -4569,7 +5240,7 @@
 </p:sld>
 </file>
 
-<file path=ppt/slides/slide11.xml><?xml version="1.0" encoding="utf-8"?>
+<file path=ppt/slides/slide12.xml><?xml version="1.0" encoding="utf-8"?>
 <p:sld xmlns:a="http://schemas.openxmlformats.org/drawingml/2006/main" xmlns:r="http://schemas.openxmlformats.org/officeDocument/2006/relationships" xmlns:p="http://schemas.openxmlformats.org/presentationml/2006/main">
   <p:cSld>
     <p:spTree>
@@ -5049,7 +5720,7 @@
           <a:p>
             <a:fld id="{BA3EAA6B-85FB-CD46-8BDC-C1BC3364C8C0}" type="slidenum">
               <a:rPr lang="de-DE" smtClean="0"/>
-              <a:t>11</a:t>
+              <a:t>12</a:t>
             </a:fld>
             <a:endParaRPr lang="de-DE"/>
           </a:p>
@@ -5289,8 +5960,8 @@
           </p:sp>
         </mc:Fallback>
       </mc:AlternateContent>
-      <mc:AlternateContent xmlns:mc="http://schemas.openxmlformats.org/markup-compatibility/2006">
-        <mc:Choice xmlns:a14="http://schemas.microsoft.com/office/drawing/2010/main" Requires="a14">
+      <mc:AlternateContent xmlns:mc="http://schemas.openxmlformats.org/markup-compatibility/2006" xmlns:a14="http://schemas.microsoft.com/office/drawing/2010/main">
+        <mc:Choice Requires="a14">
           <p:sp>
             <p:nvSpPr>
               <p:cNvPr id="17" name="Textfeld 16">
@@ -5588,7 +6259,7 @@
             </p:txBody>
           </p:sp>
         </mc:Choice>
-        <mc:Fallback>
+        <mc:Fallback xmlns="">
           <p:sp>
             <p:nvSpPr>
               <p:cNvPr id="17" name="Textfeld 16">
@@ -5633,6 +6304,221 @@
           </p:sp>
         </mc:Fallback>
       </mc:AlternateContent>
+      <mc:AlternateContent xmlns:mc="http://schemas.openxmlformats.org/markup-compatibility/2006" xmlns:a14="http://schemas.microsoft.com/office/drawing/2010/main">
+        <mc:Choice Requires="a14">
+          <p:sp>
+            <p:nvSpPr>
+              <p:cNvPr id="3" name="Textfeld 2">
+                <a:extLst>
+                  <a:ext uri="{FF2B5EF4-FFF2-40B4-BE49-F238E27FC236}">
+                    <a16:creationId xmlns:a16="http://schemas.microsoft.com/office/drawing/2014/main" id="{FD93DC4D-B5BA-1327-C617-95E8FE736568}"/>
+                  </a:ext>
+                </a:extLst>
+              </p:cNvPr>
+              <p:cNvSpPr txBox="1"/>
+              <p:nvPr/>
+            </p:nvSpPr>
+            <p:spPr>
+              <a:xfrm>
+                <a:off x="6640421" y="5301088"/>
+                <a:ext cx="5023495" cy="1107996"/>
+              </a:xfrm>
+              <a:prstGeom prst="rect">
+                <a:avLst/>
+              </a:prstGeom>
+              <a:noFill/>
+              <a:ln>
+                <a:solidFill>
+                  <a:schemeClr val="tx1"/>
+                </a:solidFill>
+              </a:ln>
+            </p:spPr>
+            <p:txBody>
+              <a:bodyPr wrap="square" rtlCol="0">
+                <a:spAutoFit/>
+              </a:bodyPr>
+              <a:lstStyle/>
+              <a:p>
+                <a:r>
+                  <a:rPr lang="de-DE" sz="2200" dirty="0"/>
+                  <a:t>e</a:t>
+                </a:r>
+                <a:r>
+                  <a:rPr lang="de-DE" sz="2200" dirty="0" err="1"/>
+                  <a:t>quivalent</a:t>
+                </a:r>
+                <a:r>
+                  <a:rPr lang="de-DE" sz="2200" dirty="0"/>
+                  <a:t> </a:t>
+                </a:r>
+                <a:r>
+                  <a:rPr lang="de-DE" sz="2200" dirty="0" err="1"/>
+                  <a:t>resistance</a:t>
+                </a:r>
+                <a:r>
+                  <a:rPr lang="de-DE" sz="2200" dirty="0"/>
+                  <a:t>:</a:t>
+                </a:r>
+              </a:p>
+              <a:p>
+                <a:r>
+                  <a:rPr lang="de-DE" sz="2200" dirty="0" err="1"/>
+                  <a:t>exhibits</a:t>
+                </a:r>
+                <a:r>
+                  <a:rPr lang="de-DE" sz="2200" dirty="0"/>
+                  <a:t> same </a:t>
+                </a:r>
+                <a14:m>
+                  <m:oMath xmlns:m="http://schemas.openxmlformats.org/officeDocument/2006/math">
+                    <m:r>
+                      <a:rPr lang="de-DE" sz="2200" b="0" i="1" smtClean="0">
+                        <a:latin typeface="Cambria Math" panose="02040503050406030204" pitchFamily="18" charset="0"/>
+                      </a:rPr>
+                      <m:t>𝑖</m:t>
+                    </m:r>
+                    <m:r>
+                      <a:rPr lang="de-DE" sz="2200" b="0" i="1" smtClean="0">
+                        <a:latin typeface="Cambria Math" panose="02040503050406030204" pitchFamily="18" charset="0"/>
+                      </a:rPr>
+                      <m:t>−</m:t>
+                    </m:r>
+                    <m:r>
+                      <a:rPr lang="de-DE" sz="2200" b="0" i="1" smtClean="0">
+                        <a:latin typeface="Cambria Math" panose="02040503050406030204" pitchFamily="18" charset="0"/>
+                      </a:rPr>
+                      <m:t>𝑣</m:t>
+                    </m:r>
+                  </m:oMath>
+                </a14:m>
+                <a:r>
+                  <a:rPr lang="de-DE" sz="2200" dirty="0"/>
+                  <a:t> </a:t>
+                </a:r>
+                <a:r>
+                  <a:rPr lang="de-DE" sz="2200" dirty="0" err="1"/>
+                  <a:t>characteristics</a:t>
+                </a:r>
+                <a:r>
+                  <a:rPr lang="de-DE" sz="2200" dirty="0"/>
+                  <a:t> </a:t>
+                </a:r>
+                <a:r>
+                  <a:rPr lang="de-DE" sz="2200" dirty="0" err="1"/>
+                  <a:t>as</a:t>
+                </a:r>
+                <a:r>
+                  <a:rPr lang="de-DE" sz="2200" dirty="0"/>
+                  <a:t> original network at </a:t>
+                </a:r>
+                <a:r>
+                  <a:rPr lang="de-DE" sz="2200" dirty="0" err="1"/>
+                  <a:t>considered</a:t>
+                </a:r>
+                <a:r>
+                  <a:rPr lang="de-DE" sz="2200" dirty="0"/>
+                  <a:t>­ </a:t>
+                </a:r>
+                <a:r>
+                  <a:rPr lang="de-DE" sz="2200" dirty="0" err="1"/>
+                  <a:t>terminals</a:t>
+                </a:r>
+                <a:endParaRPr lang="de-DE" sz="2200" dirty="0"/>
+              </a:p>
+            </p:txBody>
+          </p:sp>
+        </mc:Choice>
+        <mc:Fallback xmlns="">
+          <p:sp>
+            <p:nvSpPr>
+              <p:cNvPr id="3" name="Textfeld 2">
+                <a:extLst>
+                  <a:ext uri="{FF2B5EF4-FFF2-40B4-BE49-F238E27FC236}">
+                    <a16:creationId xmlns:a16="http://schemas.microsoft.com/office/drawing/2014/main" id="{FD93DC4D-B5BA-1327-C617-95E8FE736568}"/>
+                  </a:ext>
+                </a:extLst>
+              </p:cNvPr>
+              <p:cNvSpPr txBox="1">
+                <a:spLocks noRot="1" noChangeAspect="1" noMove="1" noResize="1" noEditPoints="1" noAdjustHandles="1" noChangeArrowheads="1" noChangeShapeType="1" noTextEdit="1"/>
+              </p:cNvSpPr>
+              <p:nvPr/>
+            </p:nvSpPr>
+            <p:spPr>
+              <a:xfrm>
+                <a:off x="6640421" y="5301088"/>
+                <a:ext cx="5023495" cy="1107996"/>
+              </a:xfrm>
+              <a:prstGeom prst="rect">
+                <a:avLst/>
+              </a:prstGeom>
+              <a:blipFill>
+                <a:blip r:embed="rId9"/>
+                <a:stretch>
+                  <a:fillRect l="-1511" t="-3409" r="-1511" b="-10227"/>
+                </a:stretch>
+              </a:blipFill>
+              <a:ln>
+                <a:solidFill>
+                  <a:schemeClr val="tx1"/>
+                </a:solidFill>
+              </a:ln>
+            </p:spPr>
+            <p:txBody>
+              <a:bodyPr/>
+              <a:lstStyle/>
+              <a:p>
+                <a:r>
+                  <a:rPr lang="de-DE">
+                    <a:noFill/>
+                  </a:rPr>
+                  <a:t> </a:t>
+                </a:r>
+              </a:p>
+            </p:txBody>
+          </p:sp>
+        </mc:Fallback>
+      </mc:AlternateContent>
+      <p:cxnSp>
+        <p:nvCxnSpPr>
+          <p:cNvPr id="12" name="Gerade Verbindung mit Pfeil 11">
+            <a:extLst>
+              <a:ext uri="{FF2B5EF4-FFF2-40B4-BE49-F238E27FC236}">
+                <a16:creationId xmlns:a16="http://schemas.microsoft.com/office/drawing/2014/main" id="{E4474B0D-199F-EAD4-FED3-CDA754BC792E}"/>
+              </a:ext>
+            </a:extLst>
+          </p:cNvPr>
+          <p:cNvCxnSpPr>
+            <a:cxnSpLocks/>
+          </p:cNvCxnSpPr>
+          <p:nvPr/>
+        </p:nvCxnSpPr>
+        <p:spPr>
+          <a:xfrm flipH="1" flipV="1">
+            <a:off x="6863637" y="4620033"/>
+            <a:ext cx="207014" cy="681055"/>
+          </a:xfrm>
+          <a:prstGeom prst="straightConnector1">
+            <a:avLst/>
+          </a:prstGeom>
+          <a:ln>
+            <a:tailEnd type="triangle"/>
+          </a:ln>
+        </p:spPr>
+        <p:style>
+          <a:lnRef idx="2">
+            <a:schemeClr val="accent1"/>
+          </a:lnRef>
+          <a:fillRef idx="0">
+            <a:schemeClr val="accent1"/>
+          </a:fillRef>
+          <a:effectRef idx="1">
+            <a:schemeClr val="accent1"/>
+          </a:effectRef>
+          <a:fontRef idx="minor">
+            <a:schemeClr val="tx1"/>
+          </a:fontRef>
+        </p:style>
+      </p:cxnSp>
     </p:spTree>
     <p:extLst>
       <p:ext uri="{BB962C8B-B14F-4D97-AF65-F5344CB8AC3E}">
@@ -5646,7 +6532,7 @@
 </p:sld>
 </file>
 
-<file path=ppt/slides/slide12.xml><?xml version="1.0" encoding="utf-8"?>
+<file path=ppt/slides/slide13.xml><?xml version="1.0" encoding="utf-8"?>
 <p:sld xmlns:a="http://schemas.openxmlformats.org/drawingml/2006/main" xmlns:r="http://schemas.openxmlformats.org/officeDocument/2006/relationships" xmlns:p="http://schemas.openxmlformats.org/presentationml/2006/main">
   <p:cSld>
     <p:spTree>
@@ -6210,7 +7096,7 @@
           <a:p>
             <a:fld id="{BA3EAA6B-85FB-CD46-8BDC-C1BC3364C8C0}" type="slidenum">
               <a:rPr lang="de-DE" smtClean="0"/>
-              <a:t>12</a:t>
+              <a:t>13</a:t>
             </a:fld>
             <a:endParaRPr lang="de-DE"/>
           </a:p>
@@ -6625,14 +7511,14 @@
           </p:sp>
         </mc:Fallback>
       </mc:AlternateContent>
-      <mc:AlternateContent xmlns:mc="http://schemas.openxmlformats.org/markup-compatibility/2006">
-        <mc:Choice xmlns:a14="http://schemas.microsoft.com/office/drawing/2010/main" Requires="a14">
+      <mc:AlternateContent xmlns:mc="http://schemas.openxmlformats.org/markup-compatibility/2006" xmlns:a14="http://schemas.microsoft.com/office/drawing/2010/main">
+        <mc:Choice Requires="a14">
           <p:sp>
             <p:nvSpPr>
-              <p:cNvPr id="7" name="Textfeld 6">
+              <p:cNvPr id="6" name="Textfeld 5">
                 <a:extLst>
                   <a:ext uri="{FF2B5EF4-FFF2-40B4-BE49-F238E27FC236}">
-                    <a16:creationId xmlns:a16="http://schemas.microsoft.com/office/drawing/2014/main" id="{6A6B3945-25AB-918E-F411-0E3385BA8976}"/>
+                    <a16:creationId xmlns:a16="http://schemas.microsoft.com/office/drawing/2014/main" id="{2D1F493D-CD9A-9EB0-206A-A9730BB3F719}"/>
                   </a:ext>
                 </a:extLst>
               </p:cNvPr>
@@ -6641,8 +7527,8 @@
             </p:nvSpPr>
             <p:spPr>
               <a:xfrm>
-                <a:off x="520262" y="5829937"/>
-                <a:ext cx="11138338" cy="615681"/>
+                <a:off x="838201" y="5465002"/>
+                <a:ext cx="10515599" cy="1310359"/>
               </a:xfrm>
               <a:prstGeom prst="rect">
                 <a:avLst/>
@@ -6656,43 +7542,68 @@
               <a:lstStyle/>
               <a:p>
                 <a:r>
-                  <a:rPr lang="de-DE" sz="2600" dirty="0"/>
-                  <a:t>for </a:t>
-                </a:r>
-                <a:r>
-                  <a:rPr lang="de-DE" sz="2600" dirty="0" err="1"/>
-                  <a:t>two</a:t>
-                </a:r>
-                <a:r>
-                  <a:rPr lang="de-DE" sz="2600" dirty="0"/>
+                  <a:rPr lang="de-DE" sz="2800" dirty="0"/>
+                  <a:t>current </a:t>
+                </a:r>
+                <a:r>
+                  <a:rPr lang="de-DE" sz="2800" dirty="0" err="1"/>
+                  <a:t>divider</a:t>
+                </a:r>
+                <a:r>
+                  <a:rPr lang="de-DE" sz="2800" dirty="0"/>
                   <a:t> </a:t>
                 </a:r>
                 <a:r>
-                  <a:rPr lang="de-DE" sz="2600" dirty="0" err="1"/>
-                  <a:t>resistors</a:t>
-                </a:r>
-                <a:r>
-                  <a:rPr lang="de-DE" sz="2600" dirty="0"/>
+                  <a:rPr lang="de-DE" sz="2800" dirty="0" err="1"/>
+                  <a:t>rule</a:t>
+                </a:r>
+                <a:r>
+                  <a:rPr lang="de-DE" sz="2800" dirty="0"/>
                   <a:t>:	</a:t>
                 </a:r>
                 <a14:m>
                   <m:oMath xmlns:m="http://schemas.openxmlformats.org/officeDocument/2006/math">
+                    <m:sSub>
+                      <m:sSubPr>
+                        <m:ctrlPr>
+                          <a:rPr lang="de-DE" sz="2800" i="1" smtClean="0">
+                            <a:latin typeface="Cambria Math" panose="02040503050406030204" pitchFamily="18" charset="0"/>
+                          </a:rPr>
+                        </m:ctrlPr>
+                      </m:sSubPr>
+                      <m:e>
+                        <m:r>
+                          <a:rPr lang="de-DE" sz="2800" b="0" i="1" smtClean="0">
+                            <a:latin typeface="Cambria Math" panose="02040503050406030204" pitchFamily="18" charset="0"/>
+                          </a:rPr>
+                          <m:t>𝐼</m:t>
+                        </m:r>
+                      </m:e>
+                      <m:sub>
+                        <m:r>
+                          <a:rPr lang="de-DE" sz="2800" b="0" i="1" smtClean="0">
+                            <a:latin typeface="Cambria Math" panose="02040503050406030204" pitchFamily="18" charset="0"/>
+                          </a:rPr>
+                          <m:t>𝑘</m:t>
+                        </m:r>
+                      </m:sub>
+                    </m:sSub>
                     <m:r>
-                      <a:rPr lang="de-DE" sz="2600" b="0" i="1" smtClean="0">
-                        <a:latin typeface="Cambria Math" panose="02040503050406030204" pitchFamily="18" charset="0"/>
-                      </a:rPr>
-                      <m:t>𝑅</m:t>
-                    </m:r>
-                    <m:r>
-                      <a:rPr lang="de-DE" sz="2600" i="1">
+                      <a:rPr lang="de-DE" sz="2800" b="0" i="1" smtClean="0">
                         <a:latin typeface="Cambria Math" panose="02040503050406030204" pitchFamily="18" charset="0"/>
                       </a:rPr>
                       <m:t>=</m:t>
                     </m:r>
+                    <m:r>
+                      <a:rPr lang="de-DE" sz="2800" b="0" i="1" smtClean="0">
+                        <a:latin typeface="Cambria Math" panose="02040503050406030204" pitchFamily="18" charset="0"/>
+                      </a:rPr>
+                      <m:t>𝐼</m:t>
+                    </m:r>
                     <m:f>
                       <m:fPr>
                         <m:ctrlPr>
-                          <a:rPr lang="de-DE" sz="2600" i="1">
+                          <a:rPr lang="de-DE" sz="2800" b="0" i="1" smtClean="0">
                             <a:latin typeface="Cambria Math" panose="02040503050406030204" pitchFamily="18" charset="0"/>
                           </a:rPr>
                         </m:ctrlPr>
@@ -6701,14 +7612,154 @@
                         <m:sSub>
                           <m:sSubPr>
                             <m:ctrlPr>
-                              <a:rPr lang="de-DE" sz="2600" i="1">
+                              <a:rPr lang="de-DE" sz="2800" b="0" i="1" smtClean="0">
                                 <a:latin typeface="Cambria Math" panose="02040503050406030204" pitchFamily="18" charset="0"/>
                               </a:rPr>
                             </m:ctrlPr>
                           </m:sSubPr>
                           <m:e>
                             <m:r>
-                              <a:rPr lang="de-DE" sz="2600" b="0" i="1" smtClean="0">
+                              <a:rPr lang="de-DE" sz="2800" b="0" i="1" smtClean="0">
+                                <a:latin typeface="Cambria Math" panose="02040503050406030204" pitchFamily="18" charset="0"/>
+                              </a:rPr>
+                              <m:t>𝐺</m:t>
+                            </m:r>
+                          </m:e>
+                          <m:sub>
+                            <m:r>
+                              <a:rPr lang="de-DE" sz="2800" b="0" i="1" smtClean="0">
+                                <a:latin typeface="Cambria Math" panose="02040503050406030204" pitchFamily="18" charset="0"/>
+                              </a:rPr>
+                              <m:t>𝑘</m:t>
+                            </m:r>
+                          </m:sub>
+                        </m:sSub>
+                      </m:num>
+                      <m:den>
+                        <m:r>
+                          <a:rPr lang="de-DE" sz="2800" b="0" i="1" smtClean="0">
+                            <a:latin typeface="Cambria Math" panose="02040503050406030204" pitchFamily="18" charset="0"/>
+                          </a:rPr>
+                          <m:t>𝐺</m:t>
+                        </m:r>
+                      </m:den>
+                    </m:f>
+                  </m:oMath>
+                </a14:m>
+                <a:endParaRPr lang="de-DE" sz="2800" dirty="0"/>
+              </a:p>
+              <a:p>
+                <a:r>
+                  <a:rPr lang="de-DE" sz="2800" dirty="0"/>
+                  <a:t>for </a:t>
+                </a:r>
+                <a:r>
+                  <a:rPr lang="de-DE" sz="2800" dirty="0" err="1"/>
+                  <a:t>two</a:t>
+                </a:r>
+                <a:r>
+                  <a:rPr lang="de-DE" sz="2800" dirty="0"/>
+                  <a:t> </a:t>
+                </a:r>
+                <a:r>
+                  <a:rPr lang="de-DE" sz="2800" dirty="0" err="1"/>
+                  <a:t>resistors</a:t>
+                </a:r>
+                <a:r>
+                  <a:rPr lang="de-DE" sz="2800" dirty="0"/>
+                  <a:t>:		</a:t>
+                </a:r>
+                <a14:m>
+                  <m:oMath xmlns:m="http://schemas.openxmlformats.org/officeDocument/2006/math">
+                    <m:f>
+                      <m:fPr>
+                        <m:ctrlPr>
+                          <a:rPr lang="de-DE" sz="2800" i="1">
+                            <a:latin typeface="Cambria Math" panose="02040503050406030204" pitchFamily="18" charset="0"/>
+                          </a:rPr>
+                        </m:ctrlPr>
+                      </m:fPr>
+                      <m:num>
+                        <m:sSub>
+                          <m:sSubPr>
+                            <m:ctrlPr>
+                              <a:rPr lang="de-DE" sz="2800" i="1">
+                                <a:latin typeface="Cambria Math" panose="02040503050406030204" pitchFamily="18" charset="0"/>
+                              </a:rPr>
+                            </m:ctrlPr>
+                          </m:sSubPr>
+                          <m:e>
+                            <m:r>
+                              <a:rPr lang="de-DE" sz="2800" b="0" i="1" smtClean="0">
+                                <a:latin typeface="Cambria Math" panose="02040503050406030204" pitchFamily="18" charset="0"/>
+                              </a:rPr>
+                              <m:t>𝐼</m:t>
+                            </m:r>
+                          </m:e>
+                          <m:sub>
+                            <m:r>
+                              <a:rPr lang="de-DE" sz="2800" i="1">
+                                <a:latin typeface="Cambria Math" panose="02040503050406030204" pitchFamily="18" charset="0"/>
+                              </a:rPr>
+                              <m:t>1</m:t>
+                            </m:r>
+                          </m:sub>
+                        </m:sSub>
+                      </m:num>
+                      <m:den>
+                        <m:sSub>
+                          <m:sSubPr>
+                            <m:ctrlPr>
+                              <a:rPr lang="de-DE" sz="2800" i="1">
+                                <a:latin typeface="Cambria Math" panose="02040503050406030204" pitchFamily="18" charset="0"/>
+                              </a:rPr>
+                            </m:ctrlPr>
+                          </m:sSubPr>
+                          <m:e>
+                            <m:r>
+                              <a:rPr lang="de-DE" sz="2800" b="0" i="1" smtClean="0">
+                                <a:latin typeface="Cambria Math" panose="02040503050406030204" pitchFamily="18" charset="0"/>
+                              </a:rPr>
+                              <m:t>𝐼</m:t>
+                            </m:r>
+                          </m:e>
+                          <m:sub>
+                            <m:r>
+                              <a:rPr lang="de-DE" sz="2800" i="1">
+                                <a:latin typeface="Cambria Math" panose="02040503050406030204" pitchFamily="18" charset="0"/>
+                              </a:rPr>
+                              <m:t>2</m:t>
+                            </m:r>
+                          </m:sub>
+                        </m:sSub>
+                      </m:den>
+                    </m:f>
+                    <m:r>
+                      <a:rPr lang="de-DE" sz="2800" i="1">
+                        <a:latin typeface="Cambria Math" panose="02040503050406030204" pitchFamily="18" charset="0"/>
+                      </a:rPr>
+                      <m:t>=</m:t>
+                    </m:r>
+                    <m:f>
+                      <m:fPr>
+                        <m:ctrlPr>
+                          <a:rPr lang="de-DE" sz="2800" i="1">
+                            <a:latin typeface="Cambria Math" panose="02040503050406030204" pitchFamily="18" charset="0"/>
+                          </a:rPr>
+                        </m:ctrlPr>
+                      </m:fPr>
+                      <m:num>
+                        <m:sSub>
+                          <m:sSubPr>
+                            <m:ctrlPr>
+                              <a:rPr lang="de-DE" sz="2800" i="1">
+                                <a:latin typeface="Cambria Math" panose="02040503050406030204" pitchFamily="18" charset="0"/>
+                              </a:rPr>
+                            </m:ctrlPr>
+                          </m:sSubPr>
+                          <m:e>
+                            <m:r>
+                              <a:rPr lang="de-DE" sz="2800" i="1">
                                 <a:latin typeface="Cambria Math" panose="02040503050406030204" pitchFamily="18" charset="0"/>
                               </a:rPr>
                               <m:t>𝑅</m:t>
@@ -6716,32 +7767,7 @@
                           </m:e>
                           <m:sub>
                             <m:r>
-                              <a:rPr lang="de-DE" sz="2600" i="1">
-                                <a:latin typeface="Cambria Math" panose="02040503050406030204" pitchFamily="18" charset="0"/>
-                              </a:rPr>
-                              <m:t>1</m:t>
-                            </m:r>
-                          </m:sub>
-                        </m:sSub>
-                        <m:sSub>
-                          <m:sSubPr>
-                            <m:ctrlPr>
-                              <a:rPr lang="de-DE" sz="2600" i="1">
-                                <a:latin typeface="Cambria Math" panose="02040503050406030204" pitchFamily="18" charset="0"/>
-                              </a:rPr>
-                            </m:ctrlPr>
-                          </m:sSubPr>
-                          <m:e>
-                            <m:r>
-                              <a:rPr lang="de-DE" sz="2600" b="0" i="1" smtClean="0">
-                                <a:latin typeface="Cambria Math" panose="02040503050406030204" pitchFamily="18" charset="0"/>
-                              </a:rPr>
-                              <m:t>𝑅</m:t>
-                            </m:r>
-                          </m:e>
-                          <m:sub>
-                            <m:r>
-                              <a:rPr lang="de-DE" sz="2600" i="1">
+                              <a:rPr lang="de-DE" sz="2800" b="0" i="1" smtClean="0">
                                 <a:latin typeface="Cambria Math" panose="02040503050406030204" pitchFamily="18" charset="0"/>
                               </a:rPr>
                               <m:t>2</m:t>
@@ -6753,14 +7779,14 @@
                         <m:sSub>
                           <m:sSubPr>
                             <m:ctrlPr>
-                              <a:rPr lang="de-DE" sz="2600" i="1" smtClean="0">
+                              <a:rPr lang="de-DE" sz="2800" i="1">
                                 <a:latin typeface="Cambria Math" panose="02040503050406030204" pitchFamily="18" charset="0"/>
                               </a:rPr>
                             </m:ctrlPr>
                           </m:sSubPr>
                           <m:e>
                             <m:r>
-                              <a:rPr lang="de-DE" sz="2600" b="0" i="1" smtClean="0">
+                              <a:rPr lang="de-DE" sz="2800" i="1">
                                 <a:latin typeface="Cambria Math" panose="02040503050406030204" pitchFamily="18" charset="0"/>
                               </a:rPr>
                               <m:t>𝑅</m:t>
@@ -6768,56 +7794,43 @@
                           </m:e>
                           <m:sub>
                             <m:r>
-                              <a:rPr lang="de-DE" sz="2600" i="1">
+                              <a:rPr lang="de-DE" sz="2800" b="0" i="1" smtClean="0">
                                 <a:latin typeface="Cambria Math" panose="02040503050406030204" pitchFamily="18" charset="0"/>
                               </a:rPr>
                               <m:t>1</m:t>
                             </m:r>
                           </m:sub>
                         </m:sSub>
-                        <m:r>
-                          <a:rPr lang="de-DE" sz="2600" i="1">
-                            <a:latin typeface="Cambria Math" panose="02040503050406030204" pitchFamily="18" charset="0"/>
-                          </a:rPr>
-                          <m:t>+</m:t>
-                        </m:r>
-                        <m:sSub>
-                          <m:sSubPr>
-                            <m:ctrlPr>
-                              <a:rPr lang="de-DE" sz="2600" i="1">
-                                <a:latin typeface="Cambria Math" panose="02040503050406030204" pitchFamily="18" charset="0"/>
-                              </a:rPr>
-                            </m:ctrlPr>
-                          </m:sSubPr>
-                          <m:e>
-                            <m:r>
-                              <a:rPr lang="de-DE" sz="2600" b="0" i="1" smtClean="0">
-                                <a:latin typeface="Cambria Math" panose="02040503050406030204" pitchFamily="18" charset="0"/>
-                              </a:rPr>
-                              <m:t>𝑅</m:t>
-                            </m:r>
-                          </m:e>
-                          <m:sub>
-                            <m:r>
-                              <a:rPr lang="de-DE" sz="2600" i="1">
-                                <a:latin typeface="Cambria Math" panose="02040503050406030204" pitchFamily="18" charset="0"/>
-                              </a:rPr>
-                              <m:t>2</m:t>
-                            </m:r>
-                          </m:sub>
-                        </m:sSub>
                       </m:den>
                     </m:f>
                     <m:r>
-                      <a:rPr lang="de-DE" sz="2600" b="0" i="1" smtClean="0">
+                      <a:rPr lang="de-DE" sz="2800" i="1">
                         <a:latin typeface="Cambria Math" panose="02040503050406030204" pitchFamily="18" charset="0"/>
                       </a:rPr>
-                      <m:t>;     </m:t>
+                      <m:t>;</m:t>
+                    </m:r>
+                    <m:r>
+                      <a:rPr lang="de-DE" sz="2800" b="0" i="1" smtClean="0">
+                        <a:latin typeface="Cambria Math" panose="02040503050406030204" pitchFamily="18" charset="0"/>
+                      </a:rPr>
+                      <m:t>     </m:t>
+                    </m:r>
+                    <m:r>
+                      <a:rPr lang="de-DE" sz="2800" i="1">
+                        <a:latin typeface="Cambria Math" panose="02040503050406030204" pitchFamily="18" charset="0"/>
+                      </a:rPr>
+                      <m:t>𝑅</m:t>
+                    </m:r>
+                    <m:r>
+                      <a:rPr lang="de-DE" sz="2800" i="1">
+                        <a:latin typeface="Cambria Math" panose="02040503050406030204" pitchFamily="18" charset="0"/>
+                      </a:rPr>
+                      <m:t>=</m:t>
                     </m:r>
                     <m:f>
                       <m:fPr>
                         <m:ctrlPr>
-                          <a:rPr lang="de-DE" sz="2600" i="1" smtClean="0">
+                          <a:rPr lang="de-DE" sz="2800" i="1">
                             <a:latin typeface="Cambria Math" panose="02040503050406030204" pitchFamily="18" charset="0"/>
                           </a:rPr>
                         </m:ctrlPr>
@@ -6826,83 +7839,14 @@
                         <m:sSub>
                           <m:sSubPr>
                             <m:ctrlPr>
-                              <a:rPr lang="de-DE" sz="2600" i="1" smtClean="0">
+                              <a:rPr lang="de-DE" sz="2800" i="1">
                                 <a:latin typeface="Cambria Math" panose="02040503050406030204" pitchFamily="18" charset="0"/>
                               </a:rPr>
                             </m:ctrlPr>
                           </m:sSubPr>
                           <m:e>
                             <m:r>
-                              <a:rPr lang="de-DE" sz="2600" b="0" i="1" smtClean="0">
-                                <a:latin typeface="Cambria Math" panose="02040503050406030204" pitchFamily="18" charset="0"/>
-                              </a:rPr>
-                              <m:t>𝐼</m:t>
-                            </m:r>
-                          </m:e>
-                          <m:sub>
-                            <m:r>
-                              <a:rPr lang="de-DE" sz="2600" b="0" i="1" smtClean="0">
-                                <a:latin typeface="Cambria Math" panose="02040503050406030204" pitchFamily="18" charset="0"/>
-                              </a:rPr>
-                              <m:t>1</m:t>
-                            </m:r>
-                          </m:sub>
-                        </m:sSub>
-                      </m:num>
-                      <m:den>
-                        <m:sSub>
-                          <m:sSubPr>
-                            <m:ctrlPr>
-                              <a:rPr lang="de-DE" sz="2600" i="1" smtClean="0">
-                                <a:latin typeface="Cambria Math" panose="02040503050406030204" pitchFamily="18" charset="0"/>
-                              </a:rPr>
-                            </m:ctrlPr>
-                          </m:sSubPr>
-                          <m:e>
-                            <m:r>
-                              <a:rPr lang="de-DE" sz="2600" b="0" i="1" smtClean="0">
-                                <a:latin typeface="Cambria Math" panose="02040503050406030204" pitchFamily="18" charset="0"/>
-                              </a:rPr>
-                              <m:t>𝐼</m:t>
-                            </m:r>
-                          </m:e>
-                          <m:sub>
-                            <m:r>
-                              <a:rPr lang="de-DE" sz="2600" b="0" i="1" smtClean="0">
-                                <a:latin typeface="Cambria Math" panose="02040503050406030204" pitchFamily="18" charset="0"/>
-                              </a:rPr>
-                              <m:t>2</m:t>
-                            </m:r>
-                          </m:sub>
-                        </m:sSub>
-                      </m:den>
-                    </m:f>
-                    <m:r>
-                      <a:rPr lang="de-DE" sz="2600" b="0" i="1" smtClean="0">
-                        <a:latin typeface="Cambria Math" panose="02040503050406030204" pitchFamily="18" charset="0"/>
-                      </a:rPr>
-                      <m:t>=</m:t>
-                    </m:r>
-                    <m:f>
-                      <m:fPr>
-                        <m:ctrlPr>
-                          <a:rPr lang="de-DE" sz="2600" b="0" i="1" smtClean="0">
-                            <a:latin typeface="Cambria Math" panose="02040503050406030204" pitchFamily="18" charset="0"/>
-                          </a:rPr>
-                        </m:ctrlPr>
-                      </m:fPr>
-                      <m:num>
-                        <m:sSub>
-                          <m:sSubPr>
-                            <m:ctrlPr>
-                              <a:rPr lang="de-DE" sz="2600" b="0" i="1" smtClean="0">
-                                <a:latin typeface="Cambria Math" panose="02040503050406030204" pitchFamily="18" charset="0"/>
-                              </a:rPr>
-                            </m:ctrlPr>
-                          </m:sSubPr>
-                          <m:e>
-                            <m:r>
-                              <a:rPr lang="de-DE" sz="2600" b="0" i="1" smtClean="0">
+                              <a:rPr lang="de-DE" sz="2800" i="1">
                                 <a:latin typeface="Cambria Math" panose="02040503050406030204" pitchFamily="18" charset="0"/>
                               </a:rPr>
                               <m:t>𝑅</m:t>
@@ -6910,7 +7854,32 @@
                           </m:e>
                           <m:sub>
                             <m:r>
-                              <a:rPr lang="de-DE" sz="2600" b="0" i="1" smtClean="0">
+                              <a:rPr lang="de-DE" sz="2800" i="1">
+                                <a:latin typeface="Cambria Math" panose="02040503050406030204" pitchFamily="18" charset="0"/>
+                              </a:rPr>
+                              <m:t>1</m:t>
+                            </m:r>
+                          </m:sub>
+                        </m:sSub>
+                        <m:sSub>
+                          <m:sSubPr>
+                            <m:ctrlPr>
+                              <a:rPr lang="de-DE" sz="2800" i="1">
+                                <a:latin typeface="Cambria Math" panose="02040503050406030204" pitchFamily="18" charset="0"/>
+                              </a:rPr>
+                            </m:ctrlPr>
+                          </m:sSubPr>
+                          <m:e>
+                            <m:r>
+                              <a:rPr lang="de-DE" sz="2800" i="1">
+                                <a:latin typeface="Cambria Math" panose="02040503050406030204" pitchFamily="18" charset="0"/>
+                              </a:rPr>
+                              <m:t>𝑅</m:t>
+                            </m:r>
+                          </m:e>
+                          <m:sub>
+                            <m:r>
+                              <a:rPr lang="de-DE" sz="2800" i="1">
                                 <a:latin typeface="Cambria Math" panose="02040503050406030204" pitchFamily="18" charset="0"/>
                               </a:rPr>
                               <m:t>2</m:t>
@@ -6922,14 +7891,14 @@
                         <m:sSub>
                           <m:sSubPr>
                             <m:ctrlPr>
-                              <a:rPr lang="de-DE" sz="2600" b="0" i="1" smtClean="0">
+                              <a:rPr lang="de-DE" sz="2800" i="1">
                                 <a:latin typeface="Cambria Math" panose="02040503050406030204" pitchFamily="18" charset="0"/>
                               </a:rPr>
                             </m:ctrlPr>
                           </m:sSubPr>
                           <m:e>
                             <m:r>
-                              <a:rPr lang="de-DE" sz="2600" b="0" i="1" smtClean="0">
+                              <a:rPr lang="de-DE" sz="2800" i="1">
                                 <a:latin typeface="Cambria Math" panose="02040503050406030204" pitchFamily="18" charset="0"/>
                               </a:rPr>
                               <m:t>𝑅</m:t>
@@ -6937,25 +7906,48 @@
                           </m:e>
                           <m:sub>
                             <m:r>
-                              <a:rPr lang="de-DE" sz="2600" b="0" i="1" smtClean="0">
+                              <a:rPr lang="de-DE" sz="2800" i="1">
                                 <a:latin typeface="Cambria Math" panose="02040503050406030204" pitchFamily="18" charset="0"/>
                               </a:rPr>
                               <m:t>1</m:t>
                             </m:r>
                           </m:sub>
                         </m:sSub>
+                        <m:r>
+                          <a:rPr lang="de-DE" sz="2800" i="1">
+                            <a:latin typeface="Cambria Math" panose="02040503050406030204" pitchFamily="18" charset="0"/>
+                          </a:rPr>
+                          <m:t>+</m:t>
+                        </m:r>
+                        <m:sSub>
+                          <m:sSubPr>
+                            <m:ctrlPr>
+                              <a:rPr lang="de-DE" sz="2800" i="1">
+                                <a:latin typeface="Cambria Math" panose="02040503050406030204" pitchFamily="18" charset="0"/>
+                              </a:rPr>
+                            </m:ctrlPr>
+                          </m:sSubPr>
+                          <m:e>
+                            <m:r>
+                              <a:rPr lang="de-DE" sz="2800" i="1">
+                                <a:latin typeface="Cambria Math" panose="02040503050406030204" pitchFamily="18" charset="0"/>
+                              </a:rPr>
+                              <m:t>𝑅</m:t>
+                            </m:r>
+                          </m:e>
+                          <m:sub>
+                            <m:r>
+                              <a:rPr lang="de-DE" sz="2800" i="1">
+                                <a:latin typeface="Cambria Math" panose="02040503050406030204" pitchFamily="18" charset="0"/>
+                              </a:rPr>
+                              <m:t>2</m:t>
+                            </m:r>
+                          </m:sub>
+                        </m:sSub>
                       </m:den>
                     </m:f>
-                  </m:oMath>
-                </a14:m>
-                <a:r>
-                  <a:rPr lang="de-DE" sz="2600" dirty="0"/>
-                  <a:t> </a:t>
-                </a:r>
-                <a14:m>
-                  <m:oMath xmlns:m="http://schemas.openxmlformats.org/officeDocument/2006/math">
                     <m:r>
-                      <a:rPr lang="de-DE" sz="2600" i="1">
+                      <a:rPr lang="de-DE" sz="2800" i="1">
                         <a:latin typeface="Cambria Math" panose="02040503050406030204" pitchFamily="18" charset="0"/>
                       </a:rPr>
                       <m:t>;    </m:t>
@@ -6963,14 +7955,14 @@
                     <m:sSub>
                       <m:sSubPr>
                         <m:ctrlPr>
-                          <a:rPr lang="de-DE" sz="2600" i="1">
+                          <a:rPr lang="de-DE" sz="2800" i="1">
                             <a:latin typeface="Cambria Math" panose="02040503050406030204" pitchFamily="18" charset="0"/>
                           </a:rPr>
                         </m:ctrlPr>
                       </m:sSubPr>
                       <m:e>
                         <m:r>
-                          <a:rPr lang="de-DE" sz="2600" b="0" i="1" smtClean="0">
+                          <a:rPr lang="de-DE" sz="2800" i="1">
                             <a:latin typeface="Cambria Math" panose="02040503050406030204" pitchFamily="18" charset="0"/>
                           </a:rPr>
                           <m:t>𝐼</m:t>
@@ -6978,7 +7970,7 @@
                       </m:e>
                       <m:sub>
                         <m:r>
-                          <a:rPr lang="de-DE" sz="2600" i="1">
+                          <a:rPr lang="de-DE" sz="2800" i="1">
                             <a:latin typeface="Cambria Math" panose="02040503050406030204" pitchFamily="18" charset="0"/>
                           </a:rPr>
                           <m:t>1</m:t>
@@ -6986,13 +7978,13 @@
                       </m:sub>
                     </m:sSub>
                     <m:r>
-                      <a:rPr lang="de-DE" sz="2600" i="1">
+                      <a:rPr lang="de-DE" sz="2800" i="1">
                         <a:latin typeface="Cambria Math" panose="02040503050406030204" pitchFamily="18" charset="0"/>
                       </a:rPr>
                       <m:t>=</m:t>
                     </m:r>
                     <m:r>
-                      <a:rPr lang="de-DE" sz="2600" b="0" i="1" smtClean="0">
+                      <a:rPr lang="de-DE" sz="2800" i="1">
                         <a:latin typeface="Cambria Math" panose="02040503050406030204" pitchFamily="18" charset="0"/>
                       </a:rPr>
                       <m:t>𝐼</m:t>
@@ -7000,7 +7992,7 @@
                     <m:f>
                       <m:fPr>
                         <m:ctrlPr>
-                          <a:rPr lang="de-DE" sz="2600" i="1">
+                          <a:rPr lang="de-DE" sz="2800" i="1">
                             <a:latin typeface="Cambria Math" panose="02040503050406030204" pitchFamily="18" charset="0"/>
                           </a:rPr>
                         </m:ctrlPr>
@@ -7009,14 +8001,14 @@
                         <m:sSub>
                           <m:sSubPr>
                             <m:ctrlPr>
-                              <a:rPr lang="de-DE" sz="2600" i="1">
+                              <a:rPr lang="de-DE" sz="2800" i="1">
                                 <a:latin typeface="Cambria Math" panose="02040503050406030204" pitchFamily="18" charset="0"/>
                               </a:rPr>
                             </m:ctrlPr>
                           </m:sSubPr>
                           <m:e>
                             <m:r>
-                              <a:rPr lang="de-DE" sz="2600" b="0" i="1" smtClean="0">
+                              <a:rPr lang="de-DE" sz="2800" i="1">
                                 <a:latin typeface="Cambria Math" panose="02040503050406030204" pitchFamily="18" charset="0"/>
                               </a:rPr>
                               <m:t>𝑅</m:t>
@@ -7024,7 +8016,7 @@
                           </m:e>
                           <m:sub>
                             <m:r>
-                              <a:rPr lang="de-DE" sz="2600" i="1">
+                              <a:rPr lang="de-DE" sz="2800" i="1">
                                 <a:latin typeface="Cambria Math" panose="02040503050406030204" pitchFamily="18" charset="0"/>
                               </a:rPr>
                               <m:t>2</m:t>
@@ -7036,14 +8028,14 @@
                         <m:sSub>
                           <m:sSubPr>
                             <m:ctrlPr>
-                              <a:rPr lang="de-DE" sz="2600" i="1">
+                              <a:rPr lang="de-DE" sz="2800" i="1">
                                 <a:latin typeface="Cambria Math" panose="02040503050406030204" pitchFamily="18" charset="0"/>
                               </a:rPr>
                             </m:ctrlPr>
                           </m:sSubPr>
                           <m:e>
                             <m:r>
-                              <a:rPr lang="de-DE" sz="2600" b="0" i="1" smtClean="0">
+                              <a:rPr lang="de-DE" sz="2800" i="1">
                                 <a:latin typeface="Cambria Math" panose="02040503050406030204" pitchFamily="18" charset="0"/>
                               </a:rPr>
                               <m:t>𝑅</m:t>
@@ -7051,7 +8043,7 @@
                           </m:e>
                           <m:sub>
                             <m:r>
-                              <a:rPr lang="de-DE" sz="2600" i="1">
+                              <a:rPr lang="de-DE" sz="2800" i="1">
                                 <a:latin typeface="Cambria Math" panose="02040503050406030204" pitchFamily="18" charset="0"/>
                               </a:rPr>
                               <m:t>1</m:t>
@@ -7059,7 +8051,7 @@
                           </m:sub>
                         </m:sSub>
                         <m:r>
-                          <a:rPr lang="de-DE" sz="2600" i="1">
+                          <a:rPr lang="de-DE" sz="2800" i="1">
                             <a:latin typeface="Cambria Math" panose="02040503050406030204" pitchFamily="18" charset="0"/>
                           </a:rPr>
                           <m:t>+</m:t>
@@ -7067,14 +8059,14 @@
                         <m:sSub>
                           <m:sSubPr>
                             <m:ctrlPr>
-                              <a:rPr lang="de-DE" sz="2600" i="1">
+                              <a:rPr lang="de-DE" sz="2800" i="1">
                                 <a:latin typeface="Cambria Math" panose="02040503050406030204" pitchFamily="18" charset="0"/>
                               </a:rPr>
                             </m:ctrlPr>
                           </m:sSubPr>
                           <m:e>
                             <m:r>
-                              <a:rPr lang="de-DE" sz="2600" b="0" i="1" smtClean="0">
+                              <a:rPr lang="de-DE" sz="2800" i="1">
                                 <a:latin typeface="Cambria Math" panose="02040503050406030204" pitchFamily="18" charset="0"/>
                               </a:rPr>
                               <m:t>𝑅</m:t>
@@ -7082,7 +8074,7 @@
                           </m:e>
                           <m:sub>
                             <m:r>
-                              <a:rPr lang="de-DE" sz="2600" i="1">
+                              <a:rPr lang="de-DE" sz="2800" i="1">
                                 <a:latin typeface="Cambria Math" panose="02040503050406030204" pitchFamily="18" charset="0"/>
                               </a:rPr>
                               <m:t>2</m:t>
@@ -7093,21 +8085,18 @@
                     </m:f>
                   </m:oMath>
                 </a14:m>
-                <a:r>
-                  <a:rPr lang="de-DE" sz="2600" dirty="0"/>
-                  <a:t>   (current divider rule)</a:t>
-                </a:r>
+                <a:endParaRPr lang="de-DE" sz="2800" dirty="0"/>
               </a:p>
             </p:txBody>
           </p:sp>
         </mc:Choice>
-        <mc:Fallback>
+        <mc:Fallback xmlns="">
           <p:sp>
             <p:nvSpPr>
-              <p:cNvPr id="7" name="Textfeld 6">
+              <p:cNvPr id="6" name="Textfeld 5">
                 <a:extLst>
                   <a:ext uri="{FF2B5EF4-FFF2-40B4-BE49-F238E27FC236}">
-                    <a16:creationId xmlns:a16="http://schemas.microsoft.com/office/drawing/2014/main" id="{6A6B3945-25AB-918E-F411-0E3385BA8976}"/>
+                    <a16:creationId xmlns:a16="http://schemas.microsoft.com/office/drawing/2014/main" id="{2D1F493D-CD9A-9EB0-206A-A9730BB3F719}"/>
                   </a:ext>
                 </a:extLst>
               </p:cNvPr>
@@ -7118,8 +8107,8 @@
             </p:nvSpPr>
             <p:spPr>
               <a:xfrm>
-                <a:off x="520262" y="5829937"/>
-                <a:ext cx="11138338" cy="615681"/>
+                <a:off x="838201" y="5465002"/>
+                <a:ext cx="10515599" cy="1310359"/>
               </a:xfrm>
               <a:prstGeom prst="rect">
                 <a:avLst/>
@@ -7127,7 +8116,7 @@
               <a:blipFill>
                 <a:blip r:embed="rId7"/>
                 <a:stretch>
-                  <a:fillRect l="-1706" t="-2000" b="-10000"/>
+                  <a:fillRect l="-2171" t="-962" b="-2885"/>
                 </a:stretch>
               </a:blipFill>
             </p:spPr>
@@ -7146,6 +8135,267 @@
           </p:sp>
         </mc:Fallback>
       </mc:AlternateContent>
+      <p:sp>
+        <p:nvSpPr>
+          <p:cNvPr id="9" name="Abgerundetes Rechteck 8">
+            <a:extLst>
+              <a:ext uri="{FF2B5EF4-FFF2-40B4-BE49-F238E27FC236}">
+                <a16:creationId xmlns:a16="http://schemas.microsoft.com/office/drawing/2014/main" id="{58C5F350-A4EB-9DD2-E4BD-343D0AF9141B}"/>
+              </a:ext>
+            </a:extLst>
+          </p:cNvPr>
+          <p:cNvSpPr/>
+          <p:nvPr/>
+        </p:nvSpPr>
+        <p:spPr>
+          <a:xfrm>
+            <a:off x="8952614" y="3384786"/>
+            <a:ext cx="946298" cy="256990"/>
+          </a:xfrm>
+          <a:prstGeom prst="roundRect">
+            <a:avLst/>
+          </a:prstGeom>
+          <a:noFill/>
+          <a:ln>
+            <a:solidFill>
+              <a:schemeClr val="bg2">
+                <a:lumMod val="75000"/>
+              </a:schemeClr>
+            </a:solidFill>
+          </a:ln>
+        </p:spPr>
+        <p:style>
+          <a:lnRef idx="2">
+            <a:schemeClr val="accent1">
+              <a:shade val="15000"/>
+            </a:schemeClr>
+          </a:lnRef>
+          <a:fillRef idx="1">
+            <a:schemeClr val="accent1"/>
+          </a:fillRef>
+          <a:effectRef idx="0">
+            <a:schemeClr val="accent1"/>
+          </a:effectRef>
+          <a:fontRef idx="minor">
+            <a:schemeClr val="lt1"/>
+          </a:fontRef>
+        </p:style>
+        <p:txBody>
+          <a:bodyPr rtlCol="0" anchor="ctr"/>
+          <a:lstStyle/>
+          <a:p>
+            <a:pPr algn="ctr"/>
+            <a:endParaRPr lang="de-DE"/>
+          </a:p>
+        </p:txBody>
+      </p:sp>
+      <p:sp>
+        <p:nvSpPr>
+          <p:cNvPr id="10" name="Abgerundetes Rechteck 9">
+            <a:extLst>
+              <a:ext uri="{FF2B5EF4-FFF2-40B4-BE49-F238E27FC236}">
+                <a16:creationId xmlns:a16="http://schemas.microsoft.com/office/drawing/2014/main" id="{F32C00B5-E1BD-38BB-9C5B-C51935CB5D96}"/>
+              </a:ext>
+            </a:extLst>
+          </p:cNvPr>
+          <p:cNvSpPr/>
+          <p:nvPr/>
+        </p:nvSpPr>
+        <p:spPr>
+          <a:xfrm>
+            <a:off x="8952614" y="2077082"/>
+            <a:ext cx="946298" cy="256990"/>
+          </a:xfrm>
+          <a:prstGeom prst="roundRect">
+            <a:avLst/>
+          </a:prstGeom>
+          <a:noFill/>
+          <a:ln>
+            <a:solidFill>
+              <a:schemeClr val="bg2">
+                <a:lumMod val="75000"/>
+              </a:schemeClr>
+            </a:solidFill>
+          </a:ln>
+        </p:spPr>
+        <p:style>
+          <a:lnRef idx="2">
+            <a:schemeClr val="accent1">
+              <a:shade val="15000"/>
+            </a:schemeClr>
+          </a:lnRef>
+          <a:fillRef idx="1">
+            <a:schemeClr val="accent1"/>
+          </a:fillRef>
+          <a:effectRef idx="0">
+            <a:schemeClr val="accent1"/>
+          </a:effectRef>
+          <a:fontRef idx="minor">
+            <a:schemeClr val="lt1"/>
+          </a:fontRef>
+        </p:style>
+        <p:txBody>
+          <a:bodyPr rtlCol="0" anchor="ctr"/>
+          <a:lstStyle/>
+          <a:p>
+            <a:pPr algn="ctr"/>
+            <a:endParaRPr lang="de-DE"/>
+          </a:p>
+        </p:txBody>
+      </p:sp>
+      <p:sp>
+        <p:nvSpPr>
+          <p:cNvPr id="11" name="Textfeld 10">
+            <a:extLst>
+              <a:ext uri="{FF2B5EF4-FFF2-40B4-BE49-F238E27FC236}">
+                <a16:creationId xmlns:a16="http://schemas.microsoft.com/office/drawing/2014/main" id="{8AAEE755-9CFF-520F-A927-75022A4C2555}"/>
+              </a:ext>
+            </a:extLst>
+          </p:cNvPr>
+          <p:cNvSpPr txBox="1"/>
+          <p:nvPr/>
+        </p:nvSpPr>
+        <p:spPr>
+          <a:xfrm>
+            <a:off x="8123297" y="935871"/>
+            <a:ext cx="3551229" cy="369332"/>
+          </a:xfrm>
+          <a:prstGeom prst="rect">
+            <a:avLst/>
+          </a:prstGeom>
+          <a:noFill/>
+        </p:spPr>
+        <p:txBody>
+          <a:bodyPr wrap="none" rtlCol="0">
+            <a:spAutoFit/>
+          </a:bodyPr>
+          <a:lstStyle/>
+          <a:p>
+            <a:r>
+              <a:rPr lang="de-DE" dirty="0" err="1"/>
+              <a:t>connected</a:t>
+            </a:r>
+            <a:r>
+              <a:rPr lang="de-DE" dirty="0"/>
+              <a:t> </a:t>
+            </a:r>
+            <a:r>
+              <a:rPr lang="de-DE" dirty="0" err="1"/>
+              <a:t>to</a:t>
+            </a:r>
+            <a:r>
+              <a:rPr lang="de-DE" dirty="0"/>
+              <a:t> </a:t>
+            </a:r>
+            <a:r>
+              <a:rPr lang="de-DE" dirty="0" err="1"/>
+              <a:t>the</a:t>
+            </a:r>
+            <a:r>
+              <a:rPr lang="de-DE" dirty="0"/>
+              <a:t> same </a:t>
+            </a:r>
+            <a:r>
+              <a:rPr lang="de-DE" dirty="0" err="1"/>
+              <a:t>two</a:t>
+            </a:r>
+            <a:r>
+              <a:rPr lang="de-DE" dirty="0"/>
+              <a:t> </a:t>
+            </a:r>
+            <a:r>
+              <a:rPr lang="de-DE" dirty="0" err="1"/>
+              <a:t>nodes</a:t>
+            </a:r>
+            <a:endParaRPr lang="de-DE" dirty="0"/>
+          </a:p>
+        </p:txBody>
+      </p:sp>
+      <p:cxnSp>
+        <p:nvCxnSpPr>
+          <p:cNvPr id="13" name="Gerade Verbindung mit Pfeil 12">
+            <a:extLst>
+              <a:ext uri="{FF2B5EF4-FFF2-40B4-BE49-F238E27FC236}">
+                <a16:creationId xmlns:a16="http://schemas.microsoft.com/office/drawing/2014/main" id="{9324C331-6425-6E47-AA98-F4A365590854}"/>
+              </a:ext>
+            </a:extLst>
+          </p:cNvPr>
+          <p:cNvCxnSpPr>
+            <a:cxnSpLocks/>
+            <a:stCxn id="11" idx="2"/>
+            <a:endCxn id="10" idx="0"/>
+          </p:cNvCxnSpPr>
+          <p:nvPr/>
+        </p:nvCxnSpPr>
+        <p:spPr>
+          <a:xfrm flipH="1">
+            <a:off x="9425763" y="1305203"/>
+            <a:ext cx="473149" cy="771879"/>
+          </a:xfrm>
+          <a:prstGeom prst="straightConnector1">
+            <a:avLst/>
+          </a:prstGeom>
+          <a:ln>
+            <a:tailEnd type="triangle"/>
+          </a:ln>
+        </p:spPr>
+        <p:style>
+          <a:lnRef idx="2">
+            <a:schemeClr val="accent1"/>
+          </a:lnRef>
+          <a:fillRef idx="0">
+            <a:schemeClr val="accent1"/>
+          </a:fillRef>
+          <a:effectRef idx="1">
+            <a:schemeClr val="accent1"/>
+          </a:effectRef>
+          <a:fontRef idx="minor">
+            <a:schemeClr val="tx1"/>
+          </a:fontRef>
+        </p:style>
+      </p:cxnSp>
+      <p:cxnSp>
+        <p:nvCxnSpPr>
+          <p:cNvPr id="17" name="Gerade Verbindung mit Pfeil 16">
+            <a:extLst>
+              <a:ext uri="{FF2B5EF4-FFF2-40B4-BE49-F238E27FC236}">
+                <a16:creationId xmlns:a16="http://schemas.microsoft.com/office/drawing/2014/main" id="{D9C3D1C6-E961-BC2C-29F5-AF2EF51C1084}"/>
+              </a:ext>
+            </a:extLst>
+          </p:cNvPr>
+          <p:cNvCxnSpPr>
+            <a:stCxn id="11" idx="2"/>
+            <a:endCxn id="9" idx="0"/>
+          </p:cNvCxnSpPr>
+          <p:nvPr/>
+        </p:nvCxnSpPr>
+        <p:spPr>
+          <a:xfrm flipH="1">
+            <a:off x="9425763" y="1305203"/>
+            <a:ext cx="473149" cy="2079583"/>
+          </a:xfrm>
+          <a:prstGeom prst="straightConnector1">
+            <a:avLst/>
+          </a:prstGeom>
+          <a:ln>
+            <a:tailEnd type="triangle"/>
+          </a:ln>
+        </p:spPr>
+        <p:style>
+          <a:lnRef idx="2">
+            <a:schemeClr val="accent1"/>
+          </a:lnRef>
+          <a:fillRef idx="0">
+            <a:schemeClr val="accent1"/>
+          </a:fillRef>
+          <a:effectRef idx="1">
+            <a:schemeClr val="accent1"/>
+          </a:effectRef>
+          <a:fontRef idx="minor">
+            <a:schemeClr val="tx1"/>
+          </a:fontRef>
+        </p:style>
+      </p:cxnSp>
     </p:spTree>
     <p:extLst>
       <p:ext uri="{BB962C8B-B14F-4D97-AF65-F5344CB8AC3E}">
@@ -7159,7 +8409,7 @@
 </p:sld>
 </file>
 
-<file path=ppt/slides/slide13.xml><?xml version="1.0" encoding="utf-8"?>
+<file path=ppt/slides/slide14.xml><?xml version="1.0" encoding="utf-8"?>
 <p:sld xmlns:a="http://schemas.openxmlformats.org/drawingml/2006/main" xmlns:r="http://schemas.openxmlformats.org/officeDocument/2006/relationships" xmlns:p="http://schemas.openxmlformats.org/presentationml/2006/main">
   <p:cSld>
     <p:spTree>
@@ -7331,7 +8581,7 @@
           <a:p>
             <a:fld id="{BA3EAA6B-85FB-CD46-8BDC-C1BC3364C8C0}" type="slidenum">
               <a:rPr lang="de-DE" smtClean="0"/>
-              <a:t>13</a:t>
+              <a:t>14</a:t>
             </a:fld>
             <a:endParaRPr lang="de-DE"/>
           </a:p>
@@ -7554,7 +8804,7 @@
 </p:sld>
 </file>
 
-<file path=ppt/slides/slide14.xml><?xml version="1.0" encoding="utf-8"?>
+<file path=ppt/slides/slide15.xml><?xml version="1.0" encoding="utf-8"?>
 <p:sld xmlns:a="http://schemas.openxmlformats.org/drawingml/2006/main" xmlns:r="http://schemas.openxmlformats.org/officeDocument/2006/relationships" xmlns:p="http://schemas.openxmlformats.org/presentationml/2006/main">
   <p:cSld>
     <p:spTree>
@@ -7627,7 +8877,7 @@
           <a:p>
             <a:fld id="{BA3EAA6B-85FB-CD46-8BDC-C1BC3364C8C0}" type="slidenum">
               <a:rPr lang="de-DE" smtClean="0"/>
-              <a:t>14</a:t>
+              <a:t>15</a:t>
             </a:fld>
             <a:endParaRPr lang="de-DE"/>
           </a:p>
@@ -7805,7 +9055,7 @@
 </p:sld>
 </file>
 
-<file path=ppt/slides/slide15.xml><?xml version="1.0" encoding="utf-8"?>
+<file path=ppt/slides/slide16.xml><?xml version="1.0" encoding="utf-8"?>
 <p:sld xmlns:a="http://schemas.openxmlformats.org/drawingml/2006/main" xmlns:r="http://schemas.openxmlformats.org/officeDocument/2006/relationships" xmlns:p="http://schemas.openxmlformats.org/presentationml/2006/main">
   <p:cSld>
     <p:spTree>
@@ -7972,7 +9222,7 @@
           <a:p>
             <a:fld id="{BA3EAA6B-85FB-CD46-8BDC-C1BC3364C8C0}" type="slidenum">
               <a:rPr lang="de-DE" smtClean="0"/>
-              <a:t>15</a:t>
+              <a:t>16</a:t>
             </a:fld>
             <a:endParaRPr lang="de-DE"/>
           </a:p>
@@ -8051,7 +9301,7 @@
 </p:sld>
 </file>
 
-<file path=ppt/slides/slide16.xml><?xml version="1.0" encoding="utf-8"?>
+<file path=ppt/slides/slide17.xml><?xml version="1.0" encoding="utf-8"?>
 <p:sld xmlns:a="http://schemas.openxmlformats.org/drawingml/2006/main" xmlns:r="http://schemas.openxmlformats.org/officeDocument/2006/relationships" xmlns:p="http://schemas.openxmlformats.org/presentationml/2006/main">
   <p:cSld>
     <p:spTree>
@@ -8514,7 +9764,7 @@
           <a:p>
             <a:fld id="{BA3EAA6B-85FB-CD46-8BDC-C1BC3364C8C0}" type="slidenum">
               <a:rPr lang="de-DE" smtClean="0"/>
-              <a:t>16</a:t>
+              <a:t>17</a:t>
             </a:fld>
             <a:endParaRPr lang="de-DE" dirty="0"/>
           </a:p>
@@ -9125,7 +10375,7 @@
 </p:sld>
 </file>
 
-<file path=ppt/slides/slide17.xml><?xml version="1.0" encoding="utf-8"?>
+<file path=ppt/slides/slide18.xml><?xml version="1.0" encoding="utf-8"?>
 <p:sld xmlns:a="http://schemas.openxmlformats.org/drawingml/2006/main" xmlns:r="http://schemas.openxmlformats.org/officeDocument/2006/relationships" xmlns:p="http://schemas.openxmlformats.org/presentationml/2006/main">
   <p:cSld>
     <p:spTree>
@@ -9395,7 +10645,7 @@
           <a:p>
             <a:fld id="{BA3EAA6B-85FB-CD46-8BDC-C1BC3364C8C0}" type="slidenum">
               <a:rPr lang="de-DE" smtClean="0"/>
-              <a:t>17</a:t>
+              <a:t>18</a:t>
             </a:fld>
             <a:endParaRPr lang="de-DE"/>
           </a:p>
@@ -10054,7 +11304,7 @@
 </p:sld>
 </file>
 
-<file path=ppt/slides/slide18.xml><?xml version="1.0" encoding="utf-8"?>
+<file path=ppt/slides/slide19.xml><?xml version="1.0" encoding="utf-8"?>
 <p:sld xmlns:a="http://schemas.openxmlformats.org/drawingml/2006/main" xmlns:r="http://schemas.openxmlformats.org/officeDocument/2006/relationships" xmlns:p="http://schemas.openxmlformats.org/presentationml/2006/main">
   <p:cSld>
     <p:spTree>
@@ -10265,6 +11515,63 @@
             </a:r>
             <a:endParaRPr lang="de-DE" dirty="0"/>
           </a:p>
+          <a:p>
+            <a:pPr marL="0" indent="0" algn="ctr">
+              <a:buNone/>
+            </a:pPr>
+            <a:r>
+              <a:rPr lang="de-DE" dirty="0"/>
+              <a:t>(</a:t>
+            </a:r>
+            <a:r>
+              <a:rPr lang="de-DE" dirty="0" err="1"/>
+              <a:t>simplification</a:t>
+            </a:r>
+            <a:r>
+              <a:rPr lang="de-DE" dirty="0"/>
+              <a:t> </a:t>
+            </a:r>
+            <a:r>
+              <a:rPr lang="de-DE" dirty="0" err="1"/>
+              <a:t>by</a:t>
+            </a:r>
+            <a:r>
+              <a:rPr lang="de-DE" dirty="0"/>
+              <a:t> </a:t>
+            </a:r>
+            <a:r>
+              <a:rPr lang="de-DE" dirty="0" err="1"/>
+              <a:t>using</a:t>
+            </a:r>
+            <a:r>
+              <a:rPr lang="de-DE" dirty="0"/>
+              <a:t> </a:t>
+            </a:r>
+            <a:r>
+              <a:rPr lang="de-DE" dirty="0" err="1"/>
+              <a:t>three</a:t>
+            </a:r>
+            <a:r>
+              <a:rPr lang="de-DE" dirty="0"/>
+              <a:t>-terminal </a:t>
+            </a:r>
+            <a:r>
+              <a:rPr lang="de-DE" dirty="0" err="1"/>
+              <a:t>equivalent</a:t>
+            </a:r>
+            <a:r>
+              <a:rPr lang="de-DE" dirty="0"/>
+              <a:t> </a:t>
+            </a:r>
+            <a:r>
+              <a:rPr lang="de-DE" dirty="0" err="1"/>
+              <a:t>networks</a:t>
+            </a:r>
+            <a:r>
+              <a:rPr lang="de-DE" dirty="0"/>
+              <a:t>)</a:t>
+            </a:r>
+          </a:p>
         </p:txBody>
       </p:sp>
       <p:sp>
@@ -10290,7 +11597,7 @@
           <a:p>
             <a:fld id="{BA3EAA6B-85FB-CD46-8BDC-C1BC3364C8C0}" type="slidenum">
               <a:rPr lang="de-DE" smtClean="0"/>
-              <a:t>18</a:t>
+              <a:t>19</a:t>
             </a:fld>
             <a:endParaRPr lang="de-DE"/>
           </a:p>
@@ -10339,7 +11646,232 @@
 </p:sld>
 </file>
 
-<file path=ppt/slides/slide19.xml><?xml version="1.0" encoding="utf-8"?>
+<file path=ppt/slides/slide2.xml><?xml version="1.0" encoding="utf-8"?>
+<p:sld xmlns:a="http://schemas.openxmlformats.org/drawingml/2006/main" xmlns:r="http://schemas.openxmlformats.org/officeDocument/2006/relationships" xmlns:p="http://schemas.openxmlformats.org/presentationml/2006/main">
+  <p:cSld>
+    <p:spTree>
+      <p:nvGrpSpPr>
+        <p:cNvPr id="1" name=""/>
+        <p:cNvGrpSpPr/>
+        <p:nvPr/>
+      </p:nvGrpSpPr>
+      <p:grpSpPr>
+        <a:xfrm>
+          <a:off x="0" y="0"/>
+          <a:ext cx="0" cy="0"/>
+          <a:chOff x="0" y="0"/>
+          <a:chExt cx="0" cy="0"/>
+        </a:xfrm>
+      </p:grpSpPr>
+      <p:sp>
+        <p:nvSpPr>
+          <p:cNvPr id="2" name="Titel 1">
+            <a:extLst>
+              <a:ext uri="{FF2B5EF4-FFF2-40B4-BE49-F238E27FC236}">
+                <a16:creationId xmlns:a16="http://schemas.microsoft.com/office/drawing/2014/main" id="{CF59877E-8B63-4736-A589-18D96CCD1808}"/>
+              </a:ext>
+            </a:extLst>
+          </p:cNvPr>
+          <p:cNvSpPr>
+            <a:spLocks noGrp="1"/>
+          </p:cNvSpPr>
+          <p:nvPr>
+            <p:ph type="title"/>
+          </p:nvPr>
+        </p:nvSpPr>
+        <p:spPr/>
+        <p:txBody>
+          <a:bodyPr/>
+          <a:lstStyle/>
+          <a:p>
+            <a:r>
+              <a:rPr lang="de-DE"/>
+              <a:t>Overview</a:t>
+            </a:r>
+            <a:endParaRPr lang="de-DE" dirty="0"/>
+          </a:p>
+        </p:txBody>
+      </p:sp>
+      <p:sp>
+        <p:nvSpPr>
+          <p:cNvPr id="3" name="Inhaltsplatzhalter 2">
+            <a:extLst>
+              <a:ext uri="{FF2B5EF4-FFF2-40B4-BE49-F238E27FC236}">
+                <a16:creationId xmlns:a16="http://schemas.microsoft.com/office/drawing/2014/main" id="{350A3E6E-DB3F-1143-1ADE-C8BBC012D11D}"/>
+              </a:ext>
+            </a:extLst>
+          </p:cNvPr>
+          <p:cNvSpPr>
+            <a:spLocks noGrp="1"/>
+          </p:cNvSpPr>
+          <p:nvPr>
+            <p:ph idx="1"/>
+          </p:nvPr>
+        </p:nvSpPr>
+        <p:spPr/>
+        <p:txBody>
+          <a:bodyPr/>
+          <a:lstStyle/>
+          <a:p>
+            <a:pPr marL="514350" indent="-514350">
+              <a:buFont typeface="+mj-lt"/>
+              <a:buAutoNum type="arabicPeriod"/>
+            </a:pPr>
+            <a:r>
+              <a:rPr lang="de-DE" dirty="0" err="1"/>
+              <a:t>Physical</a:t>
+            </a:r>
+            <a:r>
+              <a:rPr lang="de-DE" dirty="0"/>
+              <a:t> </a:t>
+            </a:r>
+            <a:r>
+              <a:rPr lang="de-DE" dirty="0" err="1"/>
+              <a:t>Principles</a:t>
+            </a:r>
+            <a:r>
+              <a:rPr lang="de-DE" dirty="0"/>
+              <a:t> and Basic </a:t>
+            </a:r>
+            <a:r>
+              <a:rPr lang="de-DE" dirty="0" err="1"/>
+              <a:t>Concepts</a:t>
+            </a:r>
+            <a:endParaRPr lang="de-DE" dirty="0"/>
+          </a:p>
+          <a:p>
+            <a:pPr marL="514350" indent="-514350">
+              <a:buFont typeface="+mj-lt"/>
+              <a:buAutoNum type="arabicPeriod"/>
+            </a:pPr>
+            <a:endParaRPr lang="de-DE" b="1" dirty="0"/>
+          </a:p>
+          <a:p>
+            <a:pPr marL="514350" indent="-514350">
+              <a:buFont typeface="+mj-lt"/>
+              <a:buAutoNum type="arabicPeriod"/>
+            </a:pPr>
+            <a:r>
+              <a:rPr lang="de-DE" b="1" dirty="0" err="1"/>
+              <a:t>Direct</a:t>
+            </a:r>
+            <a:r>
+              <a:rPr lang="de-DE" b="1" dirty="0"/>
+              <a:t> </a:t>
+            </a:r>
+            <a:r>
+              <a:rPr lang="de-DE" b="1" dirty="0" err="1"/>
+              <a:t>Current</a:t>
+            </a:r>
+            <a:r>
+              <a:rPr lang="de-DE" b="1" dirty="0"/>
+              <a:t> </a:t>
+            </a:r>
+            <a:r>
+              <a:rPr lang="de-DE" b="1" dirty="0" err="1"/>
+              <a:t>Circuits</a:t>
+            </a:r>
+            <a:endParaRPr lang="de-DE" b="1" dirty="0"/>
+          </a:p>
+          <a:p>
+            <a:pPr marL="514350" indent="-514350">
+              <a:buFont typeface="+mj-lt"/>
+              <a:buAutoNum type="arabicPeriod"/>
+            </a:pPr>
+            <a:endParaRPr lang="de-DE" dirty="0"/>
+          </a:p>
+          <a:p>
+            <a:pPr marL="514350" indent="-514350">
+              <a:buFont typeface="+mj-lt"/>
+              <a:buAutoNum type="arabicPeriod"/>
+            </a:pPr>
+            <a:r>
+              <a:rPr lang="de-DE" dirty="0"/>
+              <a:t>Electric and </a:t>
+            </a:r>
+            <a:r>
+              <a:rPr lang="de-DE" dirty="0" err="1"/>
+              <a:t>Magnetic</a:t>
+            </a:r>
+            <a:r>
+              <a:rPr lang="de-DE" dirty="0"/>
+              <a:t> Fields</a:t>
+            </a:r>
+          </a:p>
+          <a:p>
+            <a:pPr marL="514350" indent="-514350">
+              <a:buFont typeface="+mj-lt"/>
+              <a:buAutoNum type="arabicPeriod"/>
+            </a:pPr>
+            <a:endParaRPr lang="de-DE" dirty="0"/>
+          </a:p>
+          <a:p>
+            <a:pPr marL="514350" indent="-514350">
+              <a:buFont typeface="+mj-lt"/>
+              <a:buAutoNum type="arabicPeriod"/>
+            </a:pPr>
+            <a:r>
+              <a:rPr lang="de-DE" dirty="0" err="1"/>
+              <a:t>Alternating</a:t>
+            </a:r>
+            <a:r>
+              <a:rPr lang="de-DE" dirty="0"/>
+              <a:t> </a:t>
+            </a:r>
+            <a:r>
+              <a:rPr lang="de-DE" dirty="0" err="1"/>
+              <a:t>Current</a:t>
+            </a:r>
+            <a:r>
+              <a:rPr lang="de-DE" dirty="0"/>
+              <a:t> Technology</a:t>
+            </a:r>
+          </a:p>
+        </p:txBody>
+      </p:sp>
+      <p:sp>
+        <p:nvSpPr>
+          <p:cNvPr id="4" name="Foliennummernplatzhalter 3">
+            <a:extLst>
+              <a:ext uri="{FF2B5EF4-FFF2-40B4-BE49-F238E27FC236}">
+                <a16:creationId xmlns:a16="http://schemas.microsoft.com/office/drawing/2014/main" id="{A748FD64-4E75-C8DE-40EE-ED62EA0196D4}"/>
+              </a:ext>
+            </a:extLst>
+          </p:cNvPr>
+          <p:cNvSpPr>
+            <a:spLocks noGrp="1"/>
+          </p:cNvSpPr>
+          <p:nvPr>
+            <p:ph type="sldNum" sz="quarter" idx="12"/>
+          </p:nvPr>
+        </p:nvSpPr>
+        <p:spPr/>
+        <p:txBody>
+          <a:bodyPr/>
+          <a:lstStyle/>
+          <a:p>
+            <a:fld id="{487C53EB-36EE-1F44-B26B-550DFA5AE236}" type="slidenum">
+              <a:rPr lang="de-DE" smtClean="0"/>
+              <a:t>2</a:t>
+            </a:fld>
+            <a:endParaRPr lang="de-DE"/>
+          </a:p>
+        </p:txBody>
+      </p:sp>
+    </p:spTree>
+    <p:extLst>
+      <p:ext uri="{BB962C8B-B14F-4D97-AF65-F5344CB8AC3E}">
+        <p14:creationId xmlns:p14="http://schemas.microsoft.com/office/powerpoint/2010/main" val="1141228694"/>
+      </p:ext>
+    </p:extLst>
+  </p:cSld>
+  <p:clrMapOvr>
+    <a:masterClrMapping/>
+  </p:clrMapOvr>
+</p:sld>
+</file>
+
+<file path=ppt/slides/slide20.xml><?xml version="1.0" encoding="utf-8"?>
 <p:sld xmlns:a="http://schemas.openxmlformats.org/drawingml/2006/main" xmlns:r="http://schemas.openxmlformats.org/officeDocument/2006/relationships" xmlns:p="http://schemas.openxmlformats.org/presentationml/2006/main">
   <p:cSld>
     <p:spTree>
@@ -11815,7 +13347,7 @@
           <a:p>
             <a:fld id="{BA3EAA6B-85FB-CD46-8BDC-C1BC3364C8C0}" type="slidenum">
               <a:rPr lang="de-DE" smtClean="0"/>
-              <a:t>19</a:t>
+              <a:t>20</a:t>
             </a:fld>
             <a:endParaRPr lang="de-DE" dirty="0"/>
           </a:p>
@@ -12378,232 +13910,7 @@
 </p:sld>
 </file>
 
-<file path=ppt/slides/slide2.xml><?xml version="1.0" encoding="utf-8"?>
-<p:sld xmlns:a="http://schemas.openxmlformats.org/drawingml/2006/main" xmlns:r="http://schemas.openxmlformats.org/officeDocument/2006/relationships" xmlns:p="http://schemas.openxmlformats.org/presentationml/2006/main">
-  <p:cSld>
-    <p:spTree>
-      <p:nvGrpSpPr>
-        <p:cNvPr id="1" name=""/>
-        <p:cNvGrpSpPr/>
-        <p:nvPr/>
-      </p:nvGrpSpPr>
-      <p:grpSpPr>
-        <a:xfrm>
-          <a:off x="0" y="0"/>
-          <a:ext cx="0" cy="0"/>
-          <a:chOff x="0" y="0"/>
-          <a:chExt cx="0" cy="0"/>
-        </a:xfrm>
-      </p:grpSpPr>
-      <p:sp>
-        <p:nvSpPr>
-          <p:cNvPr id="2" name="Titel 1">
-            <a:extLst>
-              <a:ext uri="{FF2B5EF4-FFF2-40B4-BE49-F238E27FC236}">
-                <a16:creationId xmlns:a16="http://schemas.microsoft.com/office/drawing/2014/main" id="{CF59877E-8B63-4736-A589-18D96CCD1808}"/>
-              </a:ext>
-            </a:extLst>
-          </p:cNvPr>
-          <p:cNvSpPr>
-            <a:spLocks noGrp="1"/>
-          </p:cNvSpPr>
-          <p:nvPr>
-            <p:ph type="title"/>
-          </p:nvPr>
-        </p:nvSpPr>
-        <p:spPr/>
-        <p:txBody>
-          <a:bodyPr/>
-          <a:lstStyle/>
-          <a:p>
-            <a:r>
-              <a:rPr lang="de-DE"/>
-              <a:t>Overview</a:t>
-            </a:r>
-            <a:endParaRPr lang="de-DE" dirty="0"/>
-          </a:p>
-        </p:txBody>
-      </p:sp>
-      <p:sp>
-        <p:nvSpPr>
-          <p:cNvPr id="3" name="Inhaltsplatzhalter 2">
-            <a:extLst>
-              <a:ext uri="{FF2B5EF4-FFF2-40B4-BE49-F238E27FC236}">
-                <a16:creationId xmlns:a16="http://schemas.microsoft.com/office/drawing/2014/main" id="{350A3E6E-DB3F-1143-1ADE-C8BBC012D11D}"/>
-              </a:ext>
-            </a:extLst>
-          </p:cNvPr>
-          <p:cNvSpPr>
-            <a:spLocks noGrp="1"/>
-          </p:cNvSpPr>
-          <p:nvPr>
-            <p:ph idx="1"/>
-          </p:nvPr>
-        </p:nvSpPr>
-        <p:spPr/>
-        <p:txBody>
-          <a:bodyPr/>
-          <a:lstStyle/>
-          <a:p>
-            <a:pPr marL="514350" indent="-514350">
-              <a:buFont typeface="+mj-lt"/>
-              <a:buAutoNum type="arabicPeriod"/>
-            </a:pPr>
-            <a:r>
-              <a:rPr lang="de-DE" dirty="0" err="1"/>
-              <a:t>Physical</a:t>
-            </a:r>
-            <a:r>
-              <a:rPr lang="de-DE" dirty="0"/>
-              <a:t> </a:t>
-            </a:r>
-            <a:r>
-              <a:rPr lang="de-DE" dirty="0" err="1"/>
-              <a:t>Principles</a:t>
-            </a:r>
-            <a:r>
-              <a:rPr lang="de-DE" dirty="0"/>
-              <a:t> and Basic </a:t>
-            </a:r>
-            <a:r>
-              <a:rPr lang="de-DE" dirty="0" err="1"/>
-              <a:t>Concepts</a:t>
-            </a:r>
-            <a:endParaRPr lang="de-DE" dirty="0"/>
-          </a:p>
-          <a:p>
-            <a:pPr marL="514350" indent="-514350">
-              <a:buFont typeface="+mj-lt"/>
-              <a:buAutoNum type="arabicPeriod"/>
-            </a:pPr>
-            <a:endParaRPr lang="de-DE" b="1" dirty="0"/>
-          </a:p>
-          <a:p>
-            <a:pPr marL="514350" indent="-514350">
-              <a:buFont typeface="+mj-lt"/>
-              <a:buAutoNum type="arabicPeriod"/>
-            </a:pPr>
-            <a:r>
-              <a:rPr lang="de-DE" b="1" dirty="0" err="1"/>
-              <a:t>Direct</a:t>
-            </a:r>
-            <a:r>
-              <a:rPr lang="de-DE" b="1" dirty="0"/>
-              <a:t> </a:t>
-            </a:r>
-            <a:r>
-              <a:rPr lang="de-DE" b="1" dirty="0" err="1"/>
-              <a:t>Current</a:t>
-            </a:r>
-            <a:r>
-              <a:rPr lang="de-DE" b="1" dirty="0"/>
-              <a:t> </a:t>
-            </a:r>
-            <a:r>
-              <a:rPr lang="de-DE" b="1" dirty="0" err="1"/>
-              <a:t>Circuits</a:t>
-            </a:r>
-            <a:endParaRPr lang="de-DE" b="1" dirty="0"/>
-          </a:p>
-          <a:p>
-            <a:pPr marL="514350" indent="-514350">
-              <a:buFont typeface="+mj-lt"/>
-              <a:buAutoNum type="arabicPeriod"/>
-            </a:pPr>
-            <a:endParaRPr lang="de-DE" dirty="0"/>
-          </a:p>
-          <a:p>
-            <a:pPr marL="514350" indent="-514350">
-              <a:buFont typeface="+mj-lt"/>
-              <a:buAutoNum type="arabicPeriod"/>
-            </a:pPr>
-            <a:r>
-              <a:rPr lang="de-DE" dirty="0"/>
-              <a:t>Electric and </a:t>
-            </a:r>
-            <a:r>
-              <a:rPr lang="de-DE" dirty="0" err="1"/>
-              <a:t>Magnetic</a:t>
-            </a:r>
-            <a:r>
-              <a:rPr lang="de-DE" dirty="0"/>
-              <a:t> Fields</a:t>
-            </a:r>
-          </a:p>
-          <a:p>
-            <a:pPr marL="514350" indent="-514350">
-              <a:buFont typeface="+mj-lt"/>
-              <a:buAutoNum type="arabicPeriod"/>
-            </a:pPr>
-            <a:endParaRPr lang="de-DE" dirty="0"/>
-          </a:p>
-          <a:p>
-            <a:pPr marL="514350" indent="-514350">
-              <a:buFont typeface="+mj-lt"/>
-              <a:buAutoNum type="arabicPeriod"/>
-            </a:pPr>
-            <a:r>
-              <a:rPr lang="de-DE" dirty="0" err="1"/>
-              <a:t>Alternating</a:t>
-            </a:r>
-            <a:r>
-              <a:rPr lang="de-DE" dirty="0"/>
-              <a:t> </a:t>
-            </a:r>
-            <a:r>
-              <a:rPr lang="de-DE" dirty="0" err="1"/>
-              <a:t>Current</a:t>
-            </a:r>
-            <a:r>
-              <a:rPr lang="de-DE" dirty="0"/>
-              <a:t> Technology</a:t>
-            </a:r>
-          </a:p>
-        </p:txBody>
-      </p:sp>
-      <p:sp>
-        <p:nvSpPr>
-          <p:cNvPr id="4" name="Foliennummernplatzhalter 3">
-            <a:extLst>
-              <a:ext uri="{FF2B5EF4-FFF2-40B4-BE49-F238E27FC236}">
-                <a16:creationId xmlns:a16="http://schemas.microsoft.com/office/drawing/2014/main" id="{A748FD64-4E75-C8DE-40EE-ED62EA0196D4}"/>
-              </a:ext>
-            </a:extLst>
-          </p:cNvPr>
-          <p:cNvSpPr>
-            <a:spLocks noGrp="1"/>
-          </p:cNvSpPr>
-          <p:nvPr>
-            <p:ph type="sldNum" sz="quarter" idx="12"/>
-          </p:nvPr>
-        </p:nvSpPr>
-        <p:spPr/>
-        <p:txBody>
-          <a:bodyPr/>
-          <a:lstStyle/>
-          <a:p>
-            <a:fld id="{487C53EB-36EE-1F44-B26B-550DFA5AE236}" type="slidenum">
-              <a:rPr lang="de-DE" smtClean="0"/>
-              <a:t>2</a:t>
-            </a:fld>
-            <a:endParaRPr lang="de-DE"/>
-          </a:p>
-        </p:txBody>
-      </p:sp>
-    </p:spTree>
-    <p:extLst>
-      <p:ext uri="{BB962C8B-B14F-4D97-AF65-F5344CB8AC3E}">
-        <p14:creationId xmlns:p14="http://schemas.microsoft.com/office/powerpoint/2010/main" val="1141228694"/>
-      </p:ext>
-    </p:extLst>
-  </p:cSld>
-  <p:clrMapOvr>
-    <a:masterClrMapping/>
-  </p:clrMapOvr>
-</p:sld>
-</file>
-
-<file path=ppt/slides/slide20.xml><?xml version="1.0" encoding="utf-8"?>
+<file path=ppt/slides/slide21.xml><?xml version="1.0" encoding="utf-8"?>
 <p:sld xmlns:a="http://schemas.openxmlformats.org/drawingml/2006/main" xmlns:r="http://schemas.openxmlformats.org/officeDocument/2006/relationships" xmlns:p="http://schemas.openxmlformats.org/presentationml/2006/main">
   <p:cSld>
     <p:spTree>
@@ -12643,7 +13950,7 @@
           <a:p>
             <a:fld id="{BA3EAA6B-85FB-CD46-8BDC-C1BC3364C8C0}" type="slidenum">
               <a:rPr lang="de-DE" smtClean="0"/>
-              <a:t>20</a:t>
+              <a:t>21</a:t>
             </a:fld>
             <a:endParaRPr lang="de-DE"/>
           </a:p>
@@ -12813,7 +14120,7 @@
 </p:sld>
 </file>
 
-<file path=ppt/slides/slide21.xml><?xml version="1.0" encoding="utf-8"?>
+<file path=ppt/slides/slide22.xml><?xml version="1.0" encoding="utf-8"?>
 <p:sld xmlns:a="http://schemas.openxmlformats.org/drawingml/2006/main" xmlns:r="http://schemas.openxmlformats.org/officeDocument/2006/relationships" xmlns:p="http://schemas.openxmlformats.org/presentationml/2006/main">
   <p:cSld>
     <p:spTree>
@@ -13087,7 +14394,7 @@
           <a:p>
             <a:fld id="{BA3EAA6B-85FB-CD46-8BDC-C1BC3364C8C0}" type="slidenum">
               <a:rPr lang="de-DE" smtClean="0"/>
-              <a:t>21</a:t>
+              <a:t>22</a:t>
             </a:fld>
             <a:endParaRPr lang="de-DE"/>
           </a:p>
@@ -13106,7 +14413,7 @@
 </p:sld>
 </file>
 
-<file path=ppt/slides/slide22.xml><?xml version="1.0" encoding="utf-8"?>
+<file path=ppt/slides/slide23.xml><?xml version="1.0" encoding="utf-8"?>
 <p:sld xmlns:a="http://schemas.openxmlformats.org/drawingml/2006/main" xmlns:r="http://schemas.openxmlformats.org/officeDocument/2006/relationships" xmlns:p="http://schemas.openxmlformats.org/presentationml/2006/main">
   <p:cSld>
     <p:spTree>
@@ -13213,7 +14520,7 @@
           <a:p>
             <a:fld id="{BA3EAA6B-85FB-CD46-8BDC-C1BC3364C8C0}" type="slidenum">
               <a:rPr lang="de-DE" smtClean="0"/>
-              <a:t>22</a:t>
+              <a:t>23</a:t>
             </a:fld>
             <a:endParaRPr lang="de-DE"/>
           </a:p>
@@ -14853,7 +16160,7 @@
 </p:sld>
 </file>
 
-<file path=ppt/slides/slide23.xml><?xml version="1.0" encoding="utf-8"?>
+<file path=ppt/slides/slide24.xml><?xml version="1.0" encoding="utf-8"?>
 <p:sld xmlns:a="http://schemas.openxmlformats.org/drawingml/2006/main" xmlns:r="http://schemas.openxmlformats.org/officeDocument/2006/relationships" xmlns:p="http://schemas.openxmlformats.org/presentationml/2006/main">
   <p:cSld>
     <p:spTree>
@@ -15660,7 +16967,7 @@
           <a:p>
             <a:fld id="{BA3EAA6B-85FB-CD46-8BDC-C1BC3364C8C0}" type="slidenum">
               <a:rPr lang="de-DE" smtClean="0"/>
-              <a:t>23</a:t>
+              <a:t>24</a:t>
             </a:fld>
             <a:endParaRPr lang="de-DE"/>
           </a:p>
@@ -15679,7 +16986,7 @@
 </p:sld>
 </file>
 
-<file path=ppt/slides/slide24.xml><?xml version="1.0" encoding="utf-8"?>
+<file path=ppt/slides/slide25.xml><?xml version="1.0" encoding="utf-8"?>
 <p:sld xmlns:a="http://schemas.openxmlformats.org/drawingml/2006/main" xmlns:r="http://schemas.openxmlformats.org/officeDocument/2006/relationships" xmlns:p="http://schemas.openxmlformats.org/presentationml/2006/main">
   <p:cSld>
     <p:spTree>
@@ -15897,7 +17204,7 @@
           <a:p>
             <a:fld id="{BA3EAA6B-85FB-CD46-8BDC-C1BC3364C8C0}" type="slidenum">
               <a:rPr lang="de-DE" smtClean="0"/>
-              <a:t>24</a:t>
+              <a:t>25</a:t>
             </a:fld>
             <a:endParaRPr lang="de-DE"/>
           </a:p>
@@ -16622,7 +17929,7 @@
 </p:sld>
 </file>
 
-<file path=ppt/slides/slide25.xml><?xml version="1.0" encoding="utf-8"?>
+<file path=ppt/slides/slide26.xml><?xml version="1.0" encoding="utf-8"?>
 <p:sld xmlns:a="http://schemas.openxmlformats.org/drawingml/2006/main" xmlns:r="http://schemas.openxmlformats.org/officeDocument/2006/relationships" xmlns:p="http://schemas.openxmlformats.org/presentationml/2006/main">
   <p:cSld>
     <p:spTree>
@@ -16717,7 +18024,7 @@
           <a:p>
             <a:fld id="{BA3EAA6B-85FB-CD46-8BDC-C1BC3364C8C0}" type="slidenum">
               <a:rPr lang="de-DE" smtClean="0"/>
-              <a:t>25</a:t>
+              <a:t>26</a:t>
             </a:fld>
             <a:endParaRPr lang="de-DE"/>
           </a:p>
@@ -17965,7 +19272,7 @@
 </p:sld>
 </file>
 
-<file path=ppt/slides/slide26.xml><?xml version="1.0" encoding="utf-8"?>
+<file path=ppt/slides/slide27.xml><?xml version="1.0" encoding="utf-8"?>
 <p:sld xmlns:a="http://schemas.openxmlformats.org/drawingml/2006/main" xmlns:r="http://schemas.openxmlformats.org/officeDocument/2006/relationships" xmlns:p="http://schemas.openxmlformats.org/presentationml/2006/main">
   <p:cSld>
     <p:spTree>
@@ -18050,7 +19357,7 @@
           <a:p>
             <a:fld id="{BA3EAA6B-85FB-CD46-8BDC-C1BC3364C8C0}" type="slidenum">
               <a:rPr lang="de-DE" smtClean="0"/>
-              <a:t>26</a:t>
+              <a:t>27</a:t>
             </a:fld>
             <a:endParaRPr lang="de-DE"/>
           </a:p>
@@ -19618,7 +20925,7 @@
 </p:sld>
 </file>
 
-<file path=ppt/slides/slide27.xml><?xml version="1.0" encoding="utf-8"?>
+<file path=ppt/slides/slide28.xml><?xml version="1.0" encoding="utf-8"?>
 <p:sld xmlns:a="http://schemas.openxmlformats.org/drawingml/2006/main" xmlns:r="http://schemas.openxmlformats.org/officeDocument/2006/relationships" xmlns:p="http://schemas.openxmlformats.org/presentationml/2006/main">
   <p:cSld>
     <p:spTree>
@@ -20068,7 +21375,7 @@
           <a:p>
             <a:fld id="{BA3EAA6B-85FB-CD46-8BDC-C1BC3364C8C0}" type="slidenum">
               <a:rPr lang="de-DE" smtClean="0"/>
-              <a:t>27</a:t>
+              <a:t>28</a:t>
             </a:fld>
             <a:endParaRPr lang="de-DE"/>
           </a:p>
@@ -20219,7 +21526,7 @@
 </p:sld>
 </file>
 
-<file path=ppt/slides/slide28.xml><?xml version="1.0" encoding="utf-8"?>
+<file path=ppt/slides/slide29.xml><?xml version="1.0" encoding="utf-8"?>
 <p:sld xmlns:a="http://schemas.openxmlformats.org/drawingml/2006/main" xmlns:r="http://schemas.openxmlformats.org/officeDocument/2006/relationships" xmlns:p="http://schemas.openxmlformats.org/presentationml/2006/main">
   <p:cSld>
     <p:spTree>
@@ -21682,7 +22989,7 @@
           <a:p>
             <a:fld id="{BA3EAA6B-85FB-CD46-8BDC-C1BC3364C8C0}" type="slidenum">
               <a:rPr lang="de-DE" smtClean="0"/>
-              <a:t>28</a:t>
+              <a:t>29</a:t>
             </a:fld>
             <a:endParaRPr lang="de-DE"/>
           </a:p>
@@ -22193,7 +23500,263 @@
 </p:sld>
 </file>
 
-<file path=ppt/slides/slide29.xml><?xml version="1.0" encoding="utf-8"?>
+<file path=ppt/slides/slide3.xml><?xml version="1.0" encoding="utf-8"?>
+<p:sld xmlns:a="http://schemas.openxmlformats.org/drawingml/2006/main" xmlns:r="http://schemas.openxmlformats.org/officeDocument/2006/relationships" xmlns:p="http://schemas.openxmlformats.org/presentationml/2006/main">
+  <p:cSld>
+    <p:spTree>
+      <p:nvGrpSpPr>
+        <p:cNvPr id="1" name=""/>
+        <p:cNvGrpSpPr/>
+        <p:nvPr/>
+      </p:nvGrpSpPr>
+      <p:grpSpPr>
+        <a:xfrm>
+          <a:off x="0" y="0"/>
+          <a:ext cx="0" cy="0"/>
+          <a:chOff x="0" y="0"/>
+          <a:chExt cx="0" cy="0"/>
+        </a:xfrm>
+      </p:grpSpPr>
+      <p:sp>
+        <p:nvSpPr>
+          <p:cNvPr id="2" name="Titel 1">
+            <a:extLst>
+              <a:ext uri="{FF2B5EF4-FFF2-40B4-BE49-F238E27FC236}">
+                <a16:creationId xmlns:a16="http://schemas.microsoft.com/office/drawing/2014/main" id="{DB74D2FB-12C7-57AA-FADD-8E8C969423A8}"/>
+              </a:ext>
+            </a:extLst>
+          </p:cNvPr>
+          <p:cNvSpPr>
+            <a:spLocks noGrp="1"/>
+          </p:cNvSpPr>
+          <p:nvPr>
+            <p:ph type="title"/>
+          </p:nvPr>
+        </p:nvSpPr>
+        <p:spPr/>
+        <p:txBody>
+          <a:bodyPr/>
+          <a:lstStyle/>
+          <a:p>
+            <a:r>
+              <a:rPr lang="de-DE" dirty="0" err="1"/>
+              <a:t>Direct</a:t>
+            </a:r>
+            <a:r>
+              <a:rPr lang="de-DE" dirty="0"/>
+              <a:t> </a:t>
+            </a:r>
+            <a:r>
+              <a:rPr lang="de-DE" dirty="0" err="1"/>
+              <a:t>Current</a:t>
+            </a:r>
+            <a:r>
+              <a:rPr lang="de-DE" dirty="0"/>
+              <a:t> </a:t>
+            </a:r>
+            <a:r>
+              <a:rPr lang="de-DE" dirty="0" err="1"/>
+              <a:t>Circuits</a:t>
+            </a:r>
+            <a:endParaRPr lang="de-DE" dirty="0"/>
+          </a:p>
+        </p:txBody>
+      </p:sp>
+      <p:sp>
+        <p:nvSpPr>
+          <p:cNvPr id="3" name="Inhaltsplatzhalter 2">
+            <a:extLst>
+              <a:ext uri="{FF2B5EF4-FFF2-40B4-BE49-F238E27FC236}">
+                <a16:creationId xmlns:a16="http://schemas.microsoft.com/office/drawing/2014/main" id="{96CB17E7-EF89-1307-64B3-BBA6BC800C6E}"/>
+              </a:ext>
+            </a:extLst>
+          </p:cNvPr>
+          <p:cNvSpPr>
+            <a:spLocks noGrp="1"/>
+          </p:cNvSpPr>
+          <p:nvPr>
+            <p:ph idx="1"/>
+          </p:nvPr>
+        </p:nvSpPr>
+        <p:spPr/>
+        <p:txBody>
+          <a:bodyPr>
+            <a:normAutofit lnSpcReduction="10000"/>
+          </a:bodyPr>
+          <a:lstStyle/>
+          <a:p>
+            <a:r>
+              <a:rPr lang="de-DE" dirty="0"/>
+              <a:t>Reference </a:t>
+            </a:r>
+            <a:r>
+              <a:rPr lang="de-DE" dirty="0" err="1"/>
+              <a:t>Directions</a:t>
+            </a:r>
+            <a:endParaRPr lang="de-DE" dirty="0"/>
+          </a:p>
+          <a:p>
+            <a:r>
+              <a:rPr lang="de-DE" dirty="0" err="1"/>
+              <a:t>Kirchhoff‘s</a:t>
+            </a:r>
+            <a:r>
+              <a:rPr lang="de-DE" dirty="0"/>
+              <a:t> </a:t>
+            </a:r>
+            <a:r>
+              <a:rPr lang="de-DE" dirty="0" err="1"/>
+              <a:t>Current</a:t>
+            </a:r>
+            <a:r>
+              <a:rPr lang="de-DE" dirty="0"/>
+              <a:t> Law</a:t>
+            </a:r>
+          </a:p>
+          <a:p>
+            <a:r>
+              <a:rPr lang="de-DE" dirty="0" err="1"/>
+              <a:t>Kirchhoff‘s</a:t>
+            </a:r>
+            <a:r>
+              <a:rPr lang="de-DE" dirty="0"/>
+              <a:t> </a:t>
+            </a:r>
+            <a:r>
+              <a:rPr lang="de-DE" dirty="0" err="1"/>
+              <a:t>Voltage</a:t>
+            </a:r>
+            <a:r>
+              <a:rPr lang="de-DE" dirty="0"/>
+              <a:t> Law</a:t>
+            </a:r>
+          </a:p>
+          <a:p>
+            <a:r>
+              <a:rPr lang="de-DE" dirty="0"/>
+              <a:t>Series Circuit</a:t>
+            </a:r>
+          </a:p>
+          <a:p>
+            <a:r>
+              <a:rPr lang="de-DE" dirty="0"/>
+              <a:t>Parallel Circuit</a:t>
+            </a:r>
+          </a:p>
+          <a:p>
+            <a:r>
+              <a:rPr lang="de-DE" dirty="0" err="1"/>
+              <a:t>Practical</a:t>
+            </a:r>
+            <a:r>
+              <a:rPr lang="de-DE" dirty="0"/>
+              <a:t> </a:t>
+            </a:r>
+            <a:r>
+              <a:rPr lang="de-DE" dirty="0" err="1"/>
+              <a:t>Voltage</a:t>
+            </a:r>
+            <a:r>
+              <a:rPr lang="de-DE" dirty="0"/>
+              <a:t> &amp; </a:t>
+            </a:r>
+            <a:r>
+              <a:rPr lang="de-DE" dirty="0" err="1"/>
+              <a:t>Current</a:t>
+            </a:r>
+            <a:r>
+              <a:rPr lang="de-DE" dirty="0"/>
+              <a:t> Sources</a:t>
+            </a:r>
+          </a:p>
+          <a:p>
+            <a:r>
+              <a:rPr lang="de-DE" dirty="0"/>
+              <a:t>Network Analysis</a:t>
+            </a:r>
+          </a:p>
+          <a:p>
+            <a:r>
+              <a:rPr lang="de-DE" dirty="0"/>
+              <a:t>Efficiency &amp; Power/</a:t>
+            </a:r>
+            <a:r>
+              <a:rPr lang="de-DE" dirty="0" err="1"/>
+              <a:t>Impedance</a:t>
+            </a:r>
+            <a:r>
+              <a:rPr lang="de-DE" dirty="0"/>
+              <a:t> </a:t>
+            </a:r>
+            <a:r>
+              <a:rPr lang="de-DE" dirty="0" err="1"/>
+              <a:t>Matching</a:t>
+            </a:r>
+            <a:endParaRPr lang="de-DE" dirty="0"/>
+          </a:p>
+          <a:p>
+            <a:r>
+              <a:rPr lang="de-DE" dirty="0" err="1"/>
+              <a:t>Voltage</a:t>
+            </a:r>
+            <a:r>
+              <a:rPr lang="de-DE" dirty="0"/>
+              <a:t> &amp; </a:t>
+            </a:r>
+            <a:r>
+              <a:rPr lang="de-DE" dirty="0" err="1"/>
+              <a:t>Current</a:t>
+            </a:r>
+            <a:r>
+              <a:rPr lang="de-DE" dirty="0"/>
+              <a:t> Measurement</a:t>
+            </a:r>
+          </a:p>
+        </p:txBody>
+      </p:sp>
+      <p:sp>
+        <p:nvSpPr>
+          <p:cNvPr id="4" name="Foliennummernplatzhalter 3">
+            <a:extLst>
+              <a:ext uri="{FF2B5EF4-FFF2-40B4-BE49-F238E27FC236}">
+                <a16:creationId xmlns:a16="http://schemas.microsoft.com/office/drawing/2014/main" id="{7F88B751-5AB7-71F9-9B7D-4A3F44B12F73}"/>
+              </a:ext>
+            </a:extLst>
+          </p:cNvPr>
+          <p:cNvSpPr>
+            <a:spLocks noGrp="1"/>
+          </p:cNvSpPr>
+          <p:nvPr>
+            <p:ph type="sldNum" sz="quarter" idx="12"/>
+          </p:nvPr>
+        </p:nvSpPr>
+        <p:spPr/>
+        <p:txBody>
+          <a:bodyPr/>
+          <a:lstStyle/>
+          <a:p>
+            <a:fld id="{BA3EAA6B-85FB-CD46-8BDC-C1BC3364C8C0}" type="slidenum">
+              <a:rPr lang="de-DE" smtClean="0"/>
+              <a:t>3</a:t>
+            </a:fld>
+            <a:endParaRPr lang="de-DE"/>
+          </a:p>
+        </p:txBody>
+      </p:sp>
+    </p:spTree>
+    <p:extLst>
+      <p:ext uri="{BB962C8B-B14F-4D97-AF65-F5344CB8AC3E}">
+        <p14:creationId xmlns:p14="http://schemas.microsoft.com/office/powerpoint/2010/main" val="4147866485"/>
+      </p:ext>
+    </p:extLst>
+  </p:cSld>
+  <p:clrMapOvr>
+    <a:masterClrMapping/>
+  </p:clrMapOvr>
+</p:sld>
+</file>
+
+<file path=ppt/slides/slide30.xml><?xml version="1.0" encoding="utf-8"?>
 <p:sld xmlns:a="http://schemas.openxmlformats.org/drawingml/2006/main" xmlns:r="http://schemas.openxmlformats.org/officeDocument/2006/relationships" xmlns:p="http://schemas.openxmlformats.org/presentationml/2006/main">
   <p:cSld>
     <p:spTree>
@@ -22273,7 +23836,7 @@
           <a:p>
             <a:fld id="{BA3EAA6B-85FB-CD46-8BDC-C1BC3364C8C0}" type="slidenum">
               <a:rPr lang="de-DE" smtClean="0"/>
-              <a:t>29</a:t>
+              <a:t>30</a:t>
             </a:fld>
             <a:endParaRPr lang="de-DE"/>
           </a:p>
@@ -22806,263 +24369,7 @@
 </p:sld>
 </file>
 
-<file path=ppt/slides/slide3.xml><?xml version="1.0" encoding="utf-8"?>
-<p:sld xmlns:a="http://schemas.openxmlformats.org/drawingml/2006/main" xmlns:r="http://schemas.openxmlformats.org/officeDocument/2006/relationships" xmlns:p="http://schemas.openxmlformats.org/presentationml/2006/main">
-  <p:cSld>
-    <p:spTree>
-      <p:nvGrpSpPr>
-        <p:cNvPr id="1" name=""/>
-        <p:cNvGrpSpPr/>
-        <p:nvPr/>
-      </p:nvGrpSpPr>
-      <p:grpSpPr>
-        <a:xfrm>
-          <a:off x="0" y="0"/>
-          <a:ext cx="0" cy="0"/>
-          <a:chOff x="0" y="0"/>
-          <a:chExt cx="0" cy="0"/>
-        </a:xfrm>
-      </p:grpSpPr>
-      <p:sp>
-        <p:nvSpPr>
-          <p:cNvPr id="2" name="Titel 1">
-            <a:extLst>
-              <a:ext uri="{FF2B5EF4-FFF2-40B4-BE49-F238E27FC236}">
-                <a16:creationId xmlns:a16="http://schemas.microsoft.com/office/drawing/2014/main" id="{DB74D2FB-12C7-57AA-FADD-8E8C969423A8}"/>
-              </a:ext>
-            </a:extLst>
-          </p:cNvPr>
-          <p:cNvSpPr>
-            <a:spLocks noGrp="1"/>
-          </p:cNvSpPr>
-          <p:nvPr>
-            <p:ph type="title"/>
-          </p:nvPr>
-        </p:nvSpPr>
-        <p:spPr/>
-        <p:txBody>
-          <a:bodyPr/>
-          <a:lstStyle/>
-          <a:p>
-            <a:r>
-              <a:rPr lang="de-DE" dirty="0" err="1"/>
-              <a:t>Direct</a:t>
-            </a:r>
-            <a:r>
-              <a:rPr lang="de-DE" dirty="0"/>
-              <a:t> </a:t>
-            </a:r>
-            <a:r>
-              <a:rPr lang="de-DE" dirty="0" err="1"/>
-              <a:t>Current</a:t>
-            </a:r>
-            <a:r>
-              <a:rPr lang="de-DE" dirty="0"/>
-              <a:t> </a:t>
-            </a:r>
-            <a:r>
-              <a:rPr lang="de-DE" dirty="0" err="1"/>
-              <a:t>Circuits</a:t>
-            </a:r>
-            <a:endParaRPr lang="de-DE" dirty="0"/>
-          </a:p>
-        </p:txBody>
-      </p:sp>
-      <p:sp>
-        <p:nvSpPr>
-          <p:cNvPr id="3" name="Inhaltsplatzhalter 2">
-            <a:extLst>
-              <a:ext uri="{FF2B5EF4-FFF2-40B4-BE49-F238E27FC236}">
-                <a16:creationId xmlns:a16="http://schemas.microsoft.com/office/drawing/2014/main" id="{96CB17E7-EF89-1307-64B3-BBA6BC800C6E}"/>
-              </a:ext>
-            </a:extLst>
-          </p:cNvPr>
-          <p:cNvSpPr>
-            <a:spLocks noGrp="1"/>
-          </p:cNvSpPr>
-          <p:nvPr>
-            <p:ph idx="1"/>
-          </p:nvPr>
-        </p:nvSpPr>
-        <p:spPr/>
-        <p:txBody>
-          <a:bodyPr>
-            <a:normAutofit lnSpcReduction="10000"/>
-          </a:bodyPr>
-          <a:lstStyle/>
-          <a:p>
-            <a:r>
-              <a:rPr lang="de-DE" dirty="0"/>
-              <a:t>Reference </a:t>
-            </a:r>
-            <a:r>
-              <a:rPr lang="de-DE" dirty="0" err="1"/>
-              <a:t>Directions</a:t>
-            </a:r>
-            <a:endParaRPr lang="de-DE" dirty="0"/>
-          </a:p>
-          <a:p>
-            <a:r>
-              <a:rPr lang="de-DE" dirty="0" err="1"/>
-              <a:t>Kirchhoff‘s</a:t>
-            </a:r>
-            <a:r>
-              <a:rPr lang="de-DE" dirty="0"/>
-              <a:t> </a:t>
-            </a:r>
-            <a:r>
-              <a:rPr lang="de-DE" dirty="0" err="1"/>
-              <a:t>Current</a:t>
-            </a:r>
-            <a:r>
-              <a:rPr lang="de-DE" dirty="0"/>
-              <a:t> Law</a:t>
-            </a:r>
-          </a:p>
-          <a:p>
-            <a:r>
-              <a:rPr lang="de-DE" dirty="0" err="1"/>
-              <a:t>Kirchhoff‘s</a:t>
-            </a:r>
-            <a:r>
-              <a:rPr lang="de-DE" dirty="0"/>
-              <a:t> </a:t>
-            </a:r>
-            <a:r>
-              <a:rPr lang="de-DE" dirty="0" err="1"/>
-              <a:t>Voltage</a:t>
-            </a:r>
-            <a:r>
-              <a:rPr lang="de-DE" dirty="0"/>
-              <a:t> Law</a:t>
-            </a:r>
-          </a:p>
-          <a:p>
-            <a:r>
-              <a:rPr lang="de-DE" dirty="0"/>
-              <a:t>Series Circuit</a:t>
-            </a:r>
-          </a:p>
-          <a:p>
-            <a:r>
-              <a:rPr lang="de-DE" dirty="0"/>
-              <a:t>Parallel Circuit</a:t>
-            </a:r>
-          </a:p>
-          <a:p>
-            <a:r>
-              <a:rPr lang="de-DE" dirty="0" err="1"/>
-              <a:t>Practical</a:t>
-            </a:r>
-            <a:r>
-              <a:rPr lang="de-DE" dirty="0"/>
-              <a:t> </a:t>
-            </a:r>
-            <a:r>
-              <a:rPr lang="de-DE" dirty="0" err="1"/>
-              <a:t>Voltage</a:t>
-            </a:r>
-            <a:r>
-              <a:rPr lang="de-DE" dirty="0"/>
-              <a:t> &amp; </a:t>
-            </a:r>
-            <a:r>
-              <a:rPr lang="de-DE" dirty="0" err="1"/>
-              <a:t>Current</a:t>
-            </a:r>
-            <a:r>
-              <a:rPr lang="de-DE" dirty="0"/>
-              <a:t> Sources</a:t>
-            </a:r>
-          </a:p>
-          <a:p>
-            <a:r>
-              <a:rPr lang="de-DE" dirty="0"/>
-              <a:t>Network Analysis</a:t>
-            </a:r>
-          </a:p>
-          <a:p>
-            <a:r>
-              <a:rPr lang="de-DE" dirty="0"/>
-              <a:t>Efficiency &amp; Power/</a:t>
-            </a:r>
-            <a:r>
-              <a:rPr lang="de-DE" dirty="0" err="1"/>
-              <a:t>Impedance</a:t>
-            </a:r>
-            <a:r>
-              <a:rPr lang="de-DE" dirty="0"/>
-              <a:t> </a:t>
-            </a:r>
-            <a:r>
-              <a:rPr lang="de-DE" dirty="0" err="1"/>
-              <a:t>Matching</a:t>
-            </a:r>
-            <a:endParaRPr lang="de-DE" dirty="0"/>
-          </a:p>
-          <a:p>
-            <a:r>
-              <a:rPr lang="de-DE" dirty="0" err="1"/>
-              <a:t>Voltage</a:t>
-            </a:r>
-            <a:r>
-              <a:rPr lang="de-DE" dirty="0"/>
-              <a:t> &amp; </a:t>
-            </a:r>
-            <a:r>
-              <a:rPr lang="de-DE" dirty="0" err="1"/>
-              <a:t>Current</a:t>
-            </a:r>
-            <a:r>
-              <a:rPr lang="de-DE" dirty="0"/>
-              <a:t> Measurement</a:t>
-            </a:r>
-          </a:p>
-        </p:txBody>
-      </p:sp>
-      <p:sp>
-        <p:nvSpPr>
-          <p:cNvPr id="4" name="Foliennummernplatzhalter 3">
-            <a:extLst>
-              <a:ext uri="{FF2B5EF4-FFF2-40B4-BE49-F238E27FC236}">
-                <a16:creationId xmlns:a16="http://schemas.microsoft.com/office/drawing/2014/main" id="{7F88B751-5AB7-71F9-9B7D-4A3F44B12F73}"/>
-              </a:ext>
-            </a:extLst>
-          </p:cNvPr>
-          <p:cNvSpPr>
-            <a:spLocks noGrp="1"/>
-          </p:cNvSpPr>
-          <p:nvPr>
-            <p:ph type="sldNum" sz="quarter" idx="12"/>
-          </p:nvPr>
-        </p:nvSpPr>
-        <p:spPr/>
-        <p:txBody>
-          <a:bodyPr/>
-          <a:lstStyle/>
-          <a:p>
-            <a:fld id="{BA3EAA6B-85FB-CD46-8BDC-C1BC3364C8C0}" type="slidenum">
-              <a:rPr lang="de-DE" smtClean="0"/>
-              <a:t>3</a:t>
-            </a:fld>
-            <a:endParaRPr lang="de-DE"/>
-          </a:p>
-        </p:txBody>
-      </p:sp>
-    </p:spTree>
-    <p:extLst>
-      <p:ext uri="{BB962C8B-B14F-4D97-AF65-F5344CB8AC3E}">
-        <p14:creationId xmlns:p14="http://schemas.microsoft.com/office/powerpoint/2010/main" val="4147866485"/>
-      </p:ext>
-    </p:extLst>
-  </p:cSld>
-  <p:clrMapOvr>
-    <a:masterClrMapping/>
-  </p:clrMapOvr>
-</p:sld>
-</file>
-
-<file path=ppt/slides/slide30.xml><?xml version="1.0" encoding="utf-8"?>
+<file path=ppt/slides/slide31.xml><?xml version="1.0" encoding="utf-8"?>
 <p:sld xmlns:a="http://schemas.openxmlformats.org/drawingml/2006/main" xmlns:r="http://schemas.openxmlformats.org/officeDocument/2006/relationships" xmlns:p="http://schemas.openxmlformats.org/presentationml/2006/main">
   <p:cSld>
     <p:spTree>
@@ -23230,7 +24537,7 @@
           <a:p>
             <a:fld id="{BA3EAA6B-85FB-CD46-8BDC-C1BC3364C8C0}" type="slidenum">
               <a:rPr lang="de-DE" smtClean="0"/>
-              <a:t>30</a:t>
+              <a:t>31</a:t>
             </a:fld>
             <a:endParaRPr lang="de-DE"/>
           </a:p>
@@ -24667,6 +25974,49 @@
           </a:extLst>
         </p:spPr>
       </p:pic>
+      <p:sp>
+        <p:nvSpPr>
+          <p:cNvPr id="4" name="Textfeld 3">
+            <a:extLst>
+              <a:ext uri="{FF2B5EF4-FFF2-40B4-BE49-F238E27FC236}">
+                <a16:creationId xmlns:a16="http://schemas.microsoft.com/office/drawing/2014/main" id="{0039136B-2EB3-C68E-E074-70C9DCF2AB55}"/>
+              </a:ext>
+            </a:extLst>
+          </p:cNvPr>
+          <p:cNvSpPr txBox="1"/>
+          <p:nvPr/>
+        </p:nvSpPr>
+        <p:spPr>
+          <a:xfrm>
+            <a:off x="9924103" y="2334759"/>
+            <a:ext cx="1173719" cy="323165"/>
+          </a:xfrm>
+          <a:prstGeom prst="rect">
+            <a:avLst/>
+          </a:prstGeom>
+          <a:noFill/>
+        </p:spPr>
+        <p:txBody>
+          <a:bodyPr wrap="none" rtlCol="0">
+            <a:spAutoFit/>
+          </a:bodyPr>
+          <a:lstStyle/>
+          <a:p>
+            <a:r>
+              <a:rPr lang="de-DE" sz="1500" dirty="0"/>
+              <a:t>(but a </a:t>
+            </a:r>
+            <a:r>
+              <a:rPr lang="de-DE" sz="1500" dirty="0" err="1"/>
+              <a:t>node</a:t>
+            </a:r>
+            <a:r>
+              <a:rPr lang="de-DE" sz="1500" dirty="0"/>
+              <a:t>)</a:t>
+            </a:r>
+          </a:p>
+        </p:txBody>
+      </p:sp>
     </p:spTree>
     <p:extLst>
       <p:ext uri="{BB962C8B-B14F-4D97-AF65-F5344CB8AC3E}">
@@ -24681,6 +26031,272 @@
 </file>
 
 <file path=ppt/slides/slide6.xml><?xml version="1.0" encoding="utf-8"?>
+<p:sld xmlns:a="http://schemas.openxmlformats.org/drawingml/2006/main" xmlns:r="http://schemas.openxmlformats.org/officeDocument/2006/relationships" xmlns:p="http://schemas.openxmlformats.org/presentationml/2006/main">
+  <p:cSld>
+    <p:spTree>
+      <p:nvGrpSpPr>
+        <p:cNvPr id="1" name=""/>
+        <p:cNvGrpSpPr/>
+        <p:nvPr/>
+      </p:nvGrpSpPr>
+      <p:grpSpPr>
+        <a:xfrm>
+          <a:off x="0" y="0"/>
+          <a:ext cx="0" cy="0"/>
+          <a:chOff x="0" y="0"/>
+          <a:chExt cx="0" cy="0"/>
+        </a:xfrm>
+      </p:grpSpPr>
+      <p:sp>
+        <p:nvSpPr>
+          <p:cNvPr id="2" name="Titel 1">
+            <a:extLst>
+              <a:ext uri="{FF2B5EF4-FFF2-40B4-BE49-F238E27FC236}">
+                <a16:creationId xmlns:a16="http://schemas.microsoft.com/office/drawing/2014/main" id="{9C3B99D1-EBCC-29D2-E226-85D490D0964C}"/>
+              </a:ext>
+            </a:extLst>
+          </p:cNvPr>
+          <p:cNvSpPr>
+            <a:spLocks noGrp="1"/>
+          </p:cNvSpPr>
+          <p:nvPr>
+            <p:ph type="title"/>
+          </p:nvPr>
+        </p:nvSpPr>
+        <p:spPr/>
+        <p:txBody>
+          <a:bodyPr/>
+          <a:lstStyle/>
+          <a:p>
+            <a:r>
+              <a:rPr lang="de-DE" dirty="0"/>
+              <a:t>Short and Open </a:t>
+            </a:r>
+            <a:r>
+              <a:rPr lang="de-DE" dirty="0" err="1"/>
+              <a:t>Circuits</a:t>
+            </a:r>
+            <a:endParaRPr lang="de-DE" dirty="0"/>
+          </a:p>
+        </p:txBody>
+      </p:sp>
+      <p:sp>
+        <p:nvSpPr>
+          <p:cNvPr id="3" name="Inhaltsplatzhalter 2">
+            <a:extLst>
+              <a:ext uri="{FF2B5EF4-FFF2-40B4-BE49-F238E27FC236}">
+                <a16:creationId xmlns:a16="http://schemas.microsoft.com/office/drawing/2014/main" id="{664857C2-79A0-30AD-64DA-72319A7D172C}"/>
+              </a:ext>
+            </a:extLst>
+          </p:cNvPr>
+          <p:cNvSpPr>
+            <a:spLocks noGrp="1"/>
+          </p:cNvSpPr>
+          <p:nvPr>
+            <p:ph idx="1"/>
+          </p:nvPr>
+        </p:nvSpPr>
+        <p:spPr/>
+        <p:txBody>
+          <a:bodyPr/>
+          <a:lstStyle/>
+          <a:p>
+            <a:pPr marL="0" indent="0">
+              <a:buNone/>
+            </a:pPr>
+            <a:endParaRPr lang="de-DE" dirty="0"/>
+          </a:p>
+          <a:p>
+            <a:pPr marL="0" indent="0">
+              <a:buNone/>
+            </a:pPr>
+            <a:endParaRPr lang="de-DE" dirty="0"/>
+          </a:p>
+          <a:p>
+            <a:pPr marL="0" indent="0">
+              <a:buNone/>
+            </a:pPr>
+            <a:r>
+              <a:rPr lang="de-DE" dirty="0" err="1"/>
+              <a:t>short</a:t>
+            </a:r>
+            <a:r>
+              <a:rPr lang="de-DE" dirty="0"/>
+              <a:t> </a:t>
+            </a:r>
+            <a:r>
+              <a:rPr lang="de-DE" dirty="0" err="1"/>
+              <a:t>circuit</a:t>
+            </a:r>
+            <a:r>
+              <a:rPr lang="de-DE" dirty="0"/>
+              <a:t>: </a:t>
+            </a:r>
+            <a:r>
+              <a:rPr lang="de-DE" dirty="0" err="1"/>
+              <a:t>circuit</a:t>
+            </a:r>
+            <a:r>
+              <a:rPr lang="de-DE" dirty="0"/>
+              <a:t> </a:t>
+            </a:r>
+            <a:r>
+              <a:rPr lang="de-DE" dirty="0" err="1"/>
+              <a:t>element</a:t>
+            </a:r>
+            <a:r>
+              <a:rPr lang="de-DE" dirty="0"/>
+              <a:t> </a:t>
+            </a:r>
+            <a:r>
+              <a:rPr lang="de-DE" dirty="0" err="1"/>
+              <a:t>with</a:t>
+            </a:r>
+            <a:r>
+              <a:rPr lang="de-DE" dirty="0"/>
+              <a:t> </a:t>
+            </a:r>
+            <a:r>
+              <a:rPr lang="de-DE" dirty="0" err="1"/>
+              <a:t>resistance</a:t>
+            </a:r>
+            <a:r>
+              <a:rPr lang="de-DE" dirty="0"/>
+              <a:t> </a:t>
+            </a:r>
+            <a:r>
+              <a:rPr lang="de-DE" dirty="0" err="1"/>
+              <a:t>approaching</a:t>
+            </a:r>
+            <a:r>
+              <a:rPr lang="de-DE" dirty="0"/>
+              <a:t> </a:t>
+            </a:r>
+            <a:r>
+              <a:rPr lang="de-DE" dirty="0" err="1"/>
+              <a:t>zero</a:t>
+            </a:r>
+            <a:endParaRPr lang="de-DE" dirty="0"/>
+          </a:p>
+          <a:p>
+            <a:pPr marL="0" indent="0">
+              <a:buNone/>
+            </a:pPr>
+            <a:endParaRPr lang="de-DE" dirty="0"/>
+          </a:p>
+          <a:p>
+            <a:pPr marL="0" indent="0">
+              <a:buNone/>
+            </a:pPr>
+            <a:endParaRPr lang="de-DE" dirty="0"/>
+          </a:p>
+          <a:p>
+            <a:pPr marL="0" indent="0">
+              <a:buNone/>
+            </a:pPr>
+            <a:r>
+              <a:rPr lang="de-DE" dirty="0"/>
+              <a:t>open </a:t>
+            </a:r>
+            <a:r>
+              <a:rPr lang="de-DE" dirty="0" err="1"/>
+              <a:t>circuit</a:t>
+            </a:r>
+            <a:r>
+              <a:rPr lang="de-DE" dirty="0"/>
+              <a:t>: </a:t>
+            </a:r>
+            <a:r>
+              <a:rPr lang="de-DE" dirty="0" err="1"/>
+              <a:t>circuit</a:t>
+            </a:r>
+            <a:r>
+              <a:rPr lang="de-DE" dirty="0"/>
+              <a:t> </a:t>
+            </a:r>
+            <a:r>
+              <a:rPr lang="de-DE" dirty="0" err="1"/>
+              <a:t>element</a:t>
+            </a:r>
+            <a:r>
+              <a:rPr lang="de-DE" dirty="0"/>
+              <a:t> </a:t>
+            </a:r>
+            <a:r>
+              <a:rPr lang="de-DE" dirty="0" err="1"/>
+              <a:t>with</a:t>
+            </a:r>
+            <a:r>
+              <a:rPr lang="de-DE" dirty="0"/>
+              <a:t> </a:t>
+            </a:r>
+            <a:r>
+              <a:rPr lang="de-DE" dirty="0" err="1"/>
+              <a:t>resistance</a:t>
+            </a:r>
+            <a:r>
+              <a:rPr lang="de-DE" dirty="0"/>
+              <a:t> </a:t>
+            </a:r>
+            <a:r>
+              <a:rPr lang="de-DE" dirty="0" err="1"/>
+              <a:t>approaching</a:t>
+            </a:r>
+            <a:r>
+              <a:rPr lang="de-DE" dirty="0"/>
+              <a:t> </a:t>
+            </a:r>
+            <a:r>
+              <a:rPr lang="de-DE" dirty="0" err="1"/>
+              <a:t>infinity</a:t>
+            </a:r>
+            <a:endParaRPr lang="de-DE" dirty="0"/>
+          </a:p>
+        </p:txBody>
+      </p:sp>
+      <p:sp>
+        <p:nvSpPr>
+          <p:cNvPr id="4" name="Foliennummernplatzhalter 3">
+            <a:extLst>
+              <a:ext uri="{FF2B5EF4-FFF2-40B4-BE49-F238E27FC236}">
+                <a16:creationId xmlns:a16="http://schemas.microsoft.com/office/drawing/2014/main" id="{264536E2-0E92-9989-8D99-717D2FA96BE6}"/>
+              </a:ext>
+            </a:extLst>
+          </p:cNvPr>
+          <p:cNvSpPr>
+            <a:spLocks noGrp="1"/>
+          </p:cNvSpPr>
+          <p:nvPr>
+            <p:ph type="sldNum" sz="quarter" idx="12"/>
+          </p:nvPr>
+        </p:nvSpPr>
+        <p:spPr/>
+        <p:txBody>
+          <a:bodyPr/>
+          <a:lstStyle/>
+          <a:p>
+            <a:fld id="{BA3EAA6B-85FB-CD46-8BDC-C1BC3364C8C0}" type="slidenum">
+              <a:rPr lang="de-DE" smtClean="0"/>
+              <a:t>6</a:t>
+            </a:fld>
+            <a:endParaRPr lang="de-DE"/>
+          </a:p>
+        </p:txBody>
+      </p:sp>
+    </p:spTree>
+    <p:extLst>
+      <p:ext uri="{BB962C8B-B14F-4D97-AF65-F5344CB8AC3E}">
+        <p14:creationId xmlns:p14="http://schemas.microsoft.com/office/powerpoint/2010/main" val="1354796334"/>
+      </p:ext>
+    </p:extLst>
+  </p:cSld>
+  <p:clrMapOvr>
+    <a:masterClrMapping/>
+  </p:clrMapOvr>
+</p:sld>
+</file>
+
+<file path=ppt/slides/slide7.xml><?xml version="1.0" encoding="utf-8"?>
 <p:sld xmlns:a="http://schemas.openxmlformats.org/drawingml/2006/main" xmlns:r="http://schemas.openxmlformats.org/officeDocument/2006/relationships" xmlns:p="http://schemas.openxmlformats.org/presentationml/2006/main">
   <p:cSld>
     <p:spTree>
@@ -24753,7 +26369,7 @@
           <a:p>
             <a:fld id="{BA3EAA6B-85FB-CD46-8BDC-C1BC3364C8C0}" type="slidenum">
               <a:rPr lang="de-DE" smtClean="0"/>
-              <a:t>6</a:t>
+              <a:t>7</a:t>
             </a:fld>
             <a:endParaRPr lang="de-DE" dirty="0"/>
           </a:p>
@@ -25283,7 +26899,7 @@
 </p:sld>
 </file>
 
-<file path=ppt/slides/slide7.xml><?xml version="1.0" encoding="utf-8"?>
+<file path=ppt/slides/slide8.xml><?xml version="1.0" encoding="utf-8"?>
 <p:sld xmlns:a="http://schemas.openxmlformats.org/drawingml/2006/main" xmlns:r="http://schemas.openxmlformats.org/officeDocument/2006/relationships" xmlns:p="http://schemas.openxmlformats.org/presentationml/2006/main">
   <p:cSld>
     <p:spTree>
@@ -25323,7 +26939,7 @@
           <a:p>
             <a:fld id="{BA3EAA6B-85FB-CD46-8BDC-C1BC3364C8C0}" type="slidenum">
               <a:rPr lang="de-DE" smtClean="0"/>
-              <a:t>7</a:t>
+              <a:t>8</a:t>
             </a:fld>
             <a:endParaRPr lang="de-DE"/>
           </a:p>
@@ -25635,7 +27251,7 @@
 </p:sld>
 </file>
 
-<file path=ppt/slides/slide8.xml><?xml version="1.0" encoding="utf-8"?>
+<file path=ppt/slides/slide9.xml><?xml version="1.0" encoding="utf-8"?>
 <p:sld xmlns:a="http://schemas.openxmlformats.org/drawingml/2006/main" xmlns:r="http://schemas.openxmlformats.org/officeDocument/2006/relationships" xmlns:p="http://schemas.openxmlformats.org/presentationml/2006/main">
   <p:cSld>
     <p:spTree>
@@ -26253,7 +27869,7 @@
           <a:p>
             <a:fld id="{BA3EAA6B-85FB-CD46-8BDC-C1BC3364C8C0}" type="slidenum">
               <a:rPr lang="de-DE" smtClean="0"/>
-              <a:t>8</a:t>
+              <a:t>9</a:t>
             </a:fld>
             <a:endParaRPr lang="de-DE"/>
           </a:p>
@@ -26384,676 +28000,6 @@
     <p:extLst>
       <p:ext uri="{BB962C8B-B14F-4D97-AF65-F5344CB8AC3E}">
         <p14:creationId xmlns:p14="http://schemas.microsoft.com/office/powerpoint/2010/main" val="2333342309"/>
-      </p:ext>
-    </p:extLst>
-  </p:cSld>
-  <p:clrMapOvr>
-    <a:masterClrMapping/>
-  </p:clrMapOvr>
-</p:sld>
-</file>
-
-<file path=ppt/slides/slide9.xml><?xml version="1.0" encoding="utf-8"?>
-<p:sld xmlns:a="http://schemas.openxmlformats.org/drawingml/2006/main" xmlns:r="http://schemas.openxmlformats.org/officeDocument/2006/relationships" xmlns:p="http://schemas.openxmlformats.org/presentationml/2006/main">
-  <p:cSld>
-    <p:spTree>
-      <p:nvGrpSpPr>
-        <p:cNvPr id="1" name=""/>
-        <p:cNvGrpSpPr/>
-        <p:nvPr/>
-      </p:nvGrpSpPr>
-      <p:grpSpPr>
-        <a:xfrm>
-          <a:off x="0" y="0"/>
-          <a:ext cx="0" cy="0"/>
-          <a:chOff x="0" y="0"/>
-          <a:chExt cx="0" cy="0"/>
-        </a:xfrm>
-      </p:grpSpPr>
-      <p:sp>
-        <p:nvSpPr>
-          <p:cNvPr id="2" name="Titel 1">
-            <a:extLst>
-              <a:ext uri="{FF2B5EF4-FFF2-40B4-BE49-F238E27FC236}">
-                <a16:creationId xmlns:a16="http://schemas.microsoft.com/office/drawing/2014/main" id="{2D434D68-460B-0810-0F61-31F0C5D06B18}"/>
-              </a:ext>
-            </a:extLst>
-          </p:cNvPr>
-          <p:cNvSpPr>
-            <a:spLocks noGrp="1"/>
-          </p:cNvSpPr>
-          <p:nvPr>
-            <p:ph type="title"/>
-          </p:nvPr>
-        </p:nvSpPr>
-        <p:spPr/>
-        <p:txBody>
-          <a:bodyPr/>
-          <a:lstStyle/>
-          <a:p>
-            <a:r>
-              <a:rPr lang="de-DE" dirty="0" err="1"/>
-              <a:t>Kirchhoff‘s</a:t>
-            </a:r>
-            <a:r>
-              <a:rPr lang="de-DE" dirty="0"/>
-              <a:t> </a:t>
-            </a:r>
-            <a:r>
-              <a:rPr lang="de-DE" dirty="0" err="1"/>
-              <a:t>Current</a:t>
-            </a:r>
-            <a:r>
-              <a:rPr lang="de-DE" dirty="0"/>
-              <a:t> Law (KCL)</a:t>
-            </a:r>
-          </a:p>
-        </p:txBody>
-      </p:sp>
-      <mc:AlternateContent xmlns:mc="http://schemas.openxmlformats.org/markup-compatibility/2006" xmlns:a14="http://schemas.microsoft.com/office/drawing/2010/main">
-        <mc:Choice Requires="a14">
-          <p:sp>
-            <p:nvSpPr>
-              <p:cNvPr id="3" name="Inhaltsplatzhalter 2">
-                <a:extLst>
-                  <a:ext uri="{FF2B5EF4-FFF2-40B4-BE49-F238E27FC236}">
-                    <a16:creationId xmlns:a16="http://schemas.microsoft.com/office/drawing/2014/main" id="{146CD885-272B-E2E7-DA1D-5107CAF2EDE4}"/>
-                  </a:ext>
-                </a:extLst>
-              </p:cNvPr>
-              <p:cNvSpPr>
-                <a:spLocks noGrp="1"/>
-              </p:cNvSpPr>
-              <p:nvPr>
-                <p:ph idx="1"/>
-              </p:nvPr>
-            </p:nvSpPr>
-            <p:spPr/>
-            <p:txBody>
-              <a:bodyPr/>
-              <a:lstStyle/>
-              <a:p>
-                <a:pPr marL="0" indent="0">
-                  <a:buNone/>
-                </a:pPr>
-                <a:r>
-                  <a:rPr lang="de-DE" dirty="0"/>
-                  <a:t>sum </a:t>
-                </a:r>
-                <a:r>
-                  <a:rPr lang="de-DE" dirty="0" err="1"/>
-                  <a:t>of</a:t>
-                </a:r>
-                <a:r>
-                  <a:rPr lang="de-DE" dirty="0"/>
-                  <a:t> all </a:t>
-                </a:r>
-                <a:r>
-                  <a:rPr lang="de-DE" dirty="0" err="1"/>
-                  <a:t>currents</a:t>
-                </a:r>
-                <a:r>
-                  <a:rPr lang="de-DE" dirty="0"/>
-                  <a:t> </a:t>
-                </a:r>
-                <a:r>
-                  <a:rPr lang="de-DE" dirty="0" err="1"/>
-                  <a:t>entering</a:t>
-                </a:r>
-                <a:r>
-                  <a:rPr lang="de-DE" dirty="0"/>
-                  <a:t> a </a:t>
-                </a:r>
-                <a:r>
-                  <a:rPr lang="de-DE" dirty="0" err="1"/>
-                  <a:t>junction</a:t>
-                </a:r>
-                <a:r>
-                  <a:rPr lang="de-DE" dirty="0"/>
-                  <a:t> (</a:t>
-                </a:r>
-                <a:r>
-                  <a:rPr lang="de-DE" dirty="0" err="1"/>
-                  <a:t>node</a:t>
-                </a:r>
-                <a:r>
-                  <a:rPr lang="de-DE" dirty="0"/>
-                  <a:t>) </a:t>
-                </a:r>
-                <a:r>
-                  <a:rPr lang="de-DE" dirty="0" err="1"/>
-                  <a:t>equals</a:t>
-                </a:r>
-                <a:r>
-                  <a:rPr lang="de-DE" dirty="0"/>
-                  <a:t> </a:t>
-                </a:r>
-                <a:r>
-                  <a:rPr lang="de-DE" dirty="0" err="1"/>
-                  <a:t>sum</a:t>
-                </a:r>
-                <a:r>
-                  <a:rPr lang="de-DE" dirty="0"/>
-                  <a:t> </a:t>
-                </a:r>
-                <a:r>
-                  <a:rPr lang="de-DE" dirty="0" err="1"/>
-                  <a:t>of</a:t>
-                </a:r>
-                <a:r>
-                  <a:rPr lang="de-DE" dirty="0"/>
-                  <a:t> all </a:t>
-                </a:r>
-                <a:r>
-                  <a:rPr lang="de-DE" dirty="0" err="1"/>
-                  <a:t>currents</a:t>
-                </a:r>
-                <a:r>
-                  <a:rPr lang="de-DE" dirty="0"/>
-                  <a:t> </a:t>
-                </a:r>
-                <a:r>
-                  <a:rPr lang="de-DE" dirty="0" err="1"/>
-                  <a:t>leaving</a:t>
-                </a:r>
-                <a:r>
-                  <a:rPr lang="de-DE" dirty="0"/>
-                  <a:t> </a:t>
-                </a:r>
-                <a:r>
-                  <a:rPr lang="de-DE" dirty="0" err="1"/>
-                  <a:t>that</a:t>
-                </a:r>
-                <a:r>
-                  <a:rPr lang="de-DE" dirty="0"/>
-                  <a:t> </a:t>
-                </a:r>
-                <a:r>
-                  <a:rPr lang="de-DE" dirty="0" err="1"/>
-                  <a:t>junction</a:t>
-                </a:r>
-                <a:r>
-                  <a:rPr lang="de-DE" dirty="0"/>
-                  <a:t> (</a:t>
-                </a:r>
-                <a:r>
-                  <a:rPr lang="de-DE" dirty="0" err="1"/>
-                  <a:t>conservation</a:t>
-                </a:r>
-                <a:r>
-                  <a:rPr lang="de-DE" dirty="0"/>
-                  <a:t> </a:t>
-                </a:r>
-                <a:r>
-                  <a:rPr lang="de-DE" dirty="0" err="1"/>
-                  <a:t>of</a:t>
-                </a:r>
-                <a:r>
-                  <a:rPr lang="de-DE" dirty="0"/>
-                  <a:t> </a:t>
-                </a:r>
-                <a:r>
-                  <a:rPr lang="de-DE" dirty="0" err="1"/>
-                  <a:t>charge</a:t>
-                </a:r>
-                <a:r>
-                  <a:rPr lang="de-DE" dirty="0"/>
-                  <a:t>)</a:t>
-                </a:r>
-              </a:p>
-              <a:p>
-                <a:pPr marL="0" indent="0">
-                  <a:buNone/>
-                </a:pPr>
-                <a:endParaRPr lang="de-DE" dirty="0"/>
-              </a:p>
-              <a:p>
-                <a:pPr marL="0" indent="0">
-                  <a:buNone/>
-                </a:pPr>
-                <a:endParaRPr lang="de-DE" dirty="0"/>
-              </a:p>
-              <a:p>
-                <a:pPr marL="0" indent="0">
-                  <a:buNone/>
-                </a:pPr>
-                <a14:m>
-                  <m:oMathPara xmlns:m="http://schemas.openxmlformats.org/officeDocument/2006/math">
-                    <m:oMathParaPr>
-                      <m:jc m:val="left"/>
-                    </m:oMathParaPr>
-                    <m:oMath xmlns:m="http://schemas.openxmlformats.org/officeDocument/2006/math">
-                      <m:nary>
-                        <m:naryPr>
-                          <m:chr m:val="∑"/>
-                          <m:limLoc m:val="undOvr"/>
-                          <m:ctrlPr>
-                            <a:rPr lang="de-DE" i="1">
-                              <a:latin typeface="Cambria Math" panose="02040503050406030204" pitchFamily="18" charset="0"/>
-                            </a:rPr>
-                          </m:ctrlPr>
-                        </m:naryPr>
-                        <m:sub>
-                          <m:r>
-                            <m:rPr>
-                              <m:brk/>
-                            </m:rPr>
-                            <a:rPr lang="de-DE" b="0" i="1" smtClean="0">
-                              <a:latin typeface="Cambria Math" panose="02040503050406030204" pitchFamily="18" charset="0"/>
-                            </a:rPr>
-                            <m:t>𝑘</m:t>
-                          </m:r>
-                          <m:r>
-                            <a:rPr lang="de-DE" i="1">
-                              <a:latin typeface="Cambria Math" panose="02040503050406030204" pitchFamily="18" charset="0"/>
-                            </a:rPr>
-                            <m:t>=1</m:t>
-                          </m:r>
-                        </m:sub>
-                        <m:sup>
-                          <m:r>
-                            <a:rPr lang="de-DE" i="1">
-                              <a:latin typeface="Cambria Math" panose="02040503050406030204" pitchFamily="18" charset="0"/>
-                            </a:rPr>
-                            <m:t>𝑛</m:t>
-                          </m:r>
-                        </m:sup>
-                        <m:e>
-                          <m:sSub>
-                            <m:sSubPr>
-                              <m:ctrlPr>
-                                <a:rPr lang="de-DE" i="1">
-                                  <a:latin typeface="Cambria Math" panose="02040503050406030204" pitchFamily="18" charset="0"/>
-                                </a:rPr>
-                              </m:ctrlPr>
-                            </m:sSubPr>
-                            <m:e>
-                              <m:r>
-                                <a:rPr lang="de-DE" i="1">
-                                  <a:latin typeface="Cambria Math" panose="02040503050406030204" pitchFamily="18" charset="0"/>
-                                </a:rPr>
-                                <m:t>𝐼</m:t>
-                              </m:r>
-                            </m:e>
-                            <m:sub>
-                              <m:r>
-                                <a:rPr lang="de-DE" b="0" i="1" smtClean="0">
-                                  <a:latin typeface="Cambria Math" panose="02040503050406030204" pitchFamily="18" charset="0"/>
-                                </a:rPr>
-                                <m:t>𝑘</m:t>
-                              </m:r>
-                            </m:sub>
-                          </m:sSub>
-                        </m:e>
-                      </m:nary>
-                      <m:r>
-                        <a:rPr lang="de-DE" i="1">
-                          <a:latin typeface="Cambria Math" panose="02040503050406030204" pitchFamily="18" charset="0"/>
-                        </a:rPr>
-                        <m:t>=0</m:t>
-                      </m:r>
-                    </m:oMath>
-                  </m:oMathPara>
-                </a14:m>
-                <a:endParaRPr lang="de-DE" dirty="0"/>
-              </a:p>
-              <a:p>
-                <a:pPr marL="0" indent="0">
-                  <a:buNone/>
-                </a:pPr>
-                <a:endParaRPr lang="de-DE" dirty="0"/>
-              </a:p>
-              <a:p>
-                <a:pPr marL="0" indent="0">
-                  <a:buNone/>
-                </a:pPr>
-                <a:endParaRPr lang="de-DE" dirty="0"/>
-              </a:p>
-            </p:txBody>
-          </p:sp>
-        </mc:Choice>
-        <mc:Fallback xmlns="">
-          <p:sp>
-            <p:nvSpPr>
-              <p:cNvPr id="3" name="Inhaltsplatzhalter 2">
-                <a:extLst>
-                  <a:ext uri="{FF2B5EF4-FFF2-40B4-BE49-F238E27FC236}">
-                    <a16:creationId xmlns:a16="http://schemas.microsoft.com/office/drawing/2014/main" id="{146CD885-272B-E2E7-DA1D-5107CAF2EDE4}"/>
-                  </a:ext>
-                </a:extLst>
-              </p:cNvPr>
-              <p:cNvSpPr>
-                <a:spLocks noGrp="1" noRot="1" noChangeAspect="1" noMove="1" noResize="1" noEditPoints="1" noAdjustHandles="1" noChangeArrowheads="1" noChangeShapeType="1" noTextEdit="1"/>
-              </p:cNvSpPr>
-              <p:nvPr>
-                <p:ph idx="1"/>
-              </p:nvPr>
-            </p:nvSpPr>
-            <p:spPr>
-              <a:blipFill>
-                <a:blip r:embed="rId2"/>
-                <a:stretch>
-                  <a:fillRect l="-11821" t="-2326" b="-15988"/>
-                </a:stretch>
-              </a:blipFill>
-            </p:spPr>
-            <p:txBody>
-              <a:bodyPr/>
-              <a:lstStyle/>
-              <a:p>
-                <a:r>
-                  <a:rPr lang="de-DE">
-                    <a:noFill/>
-                  </a:rPr>
-                  <a:t> </a:t>
-                </a:r>
-              </a:p>
-            </p:txBody>
-          </p:sp>
-        </mc:Fallback>
-      </mc:AlternateContent>
-      <p:sp>
-        <p:nvSpPr>
-          <p:cNvPr id="4" name="Foliennummernplatzhalter 3">
-            <a:extLst>
-              <a:ext uri="{FF2B5EF4-FFF2-40B4-BE49-F238E27FC236}">
-                <a16:creationId xmlns:a16="http://schemas.microsoft.com/office/drawing/2014/main" id="{B0F181A0-9A1C-22EC-DFBF-DCCB5135AFC2}"/>
-              </a:ext>
-            </a:extLst>
-          </p:cNvPr>
-          <p:cNvSpPr>
-            <a:spLocks noGrp="1"/>
-          </p:cNvSpPr>
-          <p:nvPr>
-            <p:ph type="sldNum" sz="quarter" idx="12"/>
-          </p:nvPr>
-        </p:nvSpPr>
-        <p:spPr/>
-        <p:txBody>
-          <a:bodyPr/>
-          <a:lstStyle/>
-          <a:p>
-            <a:fld id="{BA3EAA6B-85FB-CD46-8BDC-C1BC3364C8C0}" type="slidenum">
-              <a:rPr lang="de-DE" smtClean="0"/>
-              <a:t>9</a:t>
-            </a:fld>
-            <a:endParaRPr lang="de-DE"/>
-          </a:p>
-        </p:txBody>
-      </p:sp>
-      <p:pic>
-        <p:nvPicPr>
-          <p:cNvPr id="5" name="Inhaltsplatzhalter 4">
-            <a:extLst>
-              <a:ext uri="{FF2B5EF4-FFF2-40B4-BE49-F238E27FC236}">
-                <a16:creationId xmlns:a16="http://schemas.microsoft.com/office/drawing/2014/main" id="{64B5AD93-B8BE-EE84-E78F-68D7EE5DA67C}"/>
-              </a:ext>
-            </a:extLst>
-          </p:cNvPr>
-          <p:cNvPicPr>
-            <a:picLocks noChangeAspect="1"/>
-          </p:cNvPicPr>
-          <p:nvPr/>
-        </p:nvPicPr>
-        <p:blipFill>
-          <a:blip r:embed="rId3"/>
-          <a:stretch>
-            <a:fillRect/>
-          </a:stretch>
-        </p:blipFill>
-        <p:spPr>
-          <a:xfrm>
-            <a:off x="5496817" y="3103181"/>
-            <a:ext cx="3113783" cy="2592932"/>
-          </a:xfrm>
-          <a:prstGeom prst="rect">
-            <a:avLst/>
-          </a:prstGeom>
-        </p:spPr>
-      </p:pic>
-      <mc:AlternateContent xmlns:mc="http://schemas.openxmlformats.org/markup-compatibility/2006" xmlns:a14="http://schemas.microsoft.com/office/drawing/2010/main">
-        <mc:Choice Requires="a14">
-          <p:sp>
-            <p:nvSpPr>
-              <p:cNvPr id="7" name="Textfeld 6">
-                <a:extLst>
-                  <a:ext uri="{FF2B5EF4-FFF2-40B4-BE49-F238E27FC236}">
-                    <a16:creationId xmlns:a16="http://schemas.microsoft.com/office/drawing/2014/main" id="{3CDA6B18-DA66-F780-B3E6-FA094A163153}"/>
-                  </a:ext>
-                </a:extLst>
-              </p:cNvPr>
-              <p:cNvSpPr txBox="1"/>
-              <p:nvPr/>
-            </p:nvSpPr>
-            <p:spPr>
-              <a:xfrm>
-                <a:off x="5620360" y="5945737"/>
-                <a:ext cx="2866696" cy="461665"/>
-              </a:xfrm>
-              <a:prstGeom prst="rect">
-                <a:avLst/>
-              </a:prstGeom>
-              <a:noFill/>
-            </p:spPr>
-            <p:txBody>
-              <a:bodyPr wrap="square">
-                <a:spAutoFit/>
-              </a:bodyPr>
-              <a:lstStyle/>
-              <a:p>
-                <a:pPr/>
-                <a14:m>
-                  <m:oMathPara xmlns:m="http://schemas.openxmlformats.org/officeDocument/2006/math">
-                    <m:oMathParaPr>
-                      <m:jc m:val="left"/>
-                    </m:oMathParaPr>
-                    <m:oMath xmlns:m="http://schemas.openxmlformats.org/officeDocument/2006/math">
-                      <m:sSub>
-                        <m:sSubPr>
-                          <m:ctrlPr>
-                            <a:rPr lang="de-DE" sz="2400" i="1" smtClean="0">
-                              <a:latin typeface="Cambria Math" panose="02040503050406030204" pitchFamily="18" charset="0"/>
-                            </a:rPr>
-                          </m:ctrlPr>
-                        </m:sSubPr>
-                        <m:e>
-                          <m:r>
-                            <a:rPr lang="de-DE" sz="2400" b="0" i="1" smtClean="0">
-                              <a:latin typeface="Cambria Math" panose="02040503050406030204" pitchFamily="18" charset="0"/>
-                            </a:rPr>
-                            <m:t>𝐼</m:t>
-                          </m:r>
-                        </m:e>
-                        <m:sub>
-                          <m:r>
-                            <a:rPr lang="de-DE" sz="2400" b="0" i="1" smtClean="0">
-                              <a:latin typeface="Cambria Math" panose="02040503050406030204" pitchFamily="18" charset="0"/>
-                            </a:rPr>
-                            <m:t>1</m:t>
-                          </m:r>
-                        </m:sub>
-                      </m:sSub>
-                      <m:r>
-                        <a:rPr lang="de-DE" sz="2400" b="0" i="1" smtClean="0">
-                          <a:latin typeface="Cambria Math" panose="02040503050406030204" pitchFamily="18" charset="0"/>
-                        </a:rPr>
-                        <m:t>+</m:t>
-                      </m:r>
-                      <m:sSub>
-                        <m:sSubPr>
-                          <m:ctrlPr>
-                            <a:rPr lang="de-DE" sz="2400" i="1">
-                              <a:latin typeface="Cambria Math" panose="02040503050406030204" pitchFamily="18" charset="0"/>
-                            </a:rPr>
-                          </m:ctrlPr>
-                        </m:sSubPr>
-                        <m:e>
-                          <m:r>
-                            <a:rPr lang="de-DE" sz="2400" i="1">
-                              <a:latin typeface="Cambria Math" panose="02040503050406030204" pitchFamily="18" charset="0"/>
-                            </a:rPr>
-                            <m:t>𝐼</m:t>
-                          </m:r>
-                        </m:e>
-                        <m:sub>
-                          <m:r>
-                            <a:rPr lang="de-DE" sz="2400" b="0" i="1" smtClean="0">
-                              <a:latin typeface="Cambria Math" panose="02040503050406030204" pitchFamily="18" charset="0"/>
-                            </a:rPr>
-                            <m:t>2</m:t>
-                          </m:r>
-                        </m:sub>
-                      </m:sSub>
-                      <m:r>
-                        <a:rPr lang="de-DE" sz="2400" b="0" i="1" smtClean="0">
-                          <a:latin typeface="Cambria Math" panose="02040503050406030204" pitchFamily="18" charset="0"/>
-                        </a:rPr>
-                        <m:t>+</m:t>
-                      </m:r>
-                      <m:sSub>
-                        <m:sSubPr>
-                          <m:ctrlPr>
-                            <a:rPr lang="de-DE" sz="2400" i="1">
-                              <a:latin typeface="Cambria Math" panose="02040503050406030204" pitchFamily="18" charset="0"/>
-                            </a:rPr>
-                          </m:ctrlPr>
-                        </m:sSubPr>
-                        <m:e>
-                          <m:r>
-                            <a:rPr lang="de-DE" sz="2400" i="1">
-                              <a:latin typeface="Cambria Math" panose="02040503050406030204" pitchFamily="18" charset="0"/>
-                            </a:rPr>
-                            <m:t>𝐼</m:t>
-                          </m:r>
-                        </m:e>
-                        <m:sub>
-                          <m:r>
-                            <a:rPr lang="de-DE" sz="2400" b="0" i="1" smtClean="0">
-                              <a:latin typeface="Cambria Math" panose="02040503050406030204" pitchFamily="18" charset="0"/>
-                            </a:rPr>
-                            <m:t>3</m:t>
-                          </m:r>
-                        </m:sub>
-                      </m:sSub>
-                      <m:r>
-                        <a:rPr lang="de-DE" sz="2400" i="1">
-                          <a:latin typeface="Cambria Math" panose="02040503050406030204" pitchFamily="18" charset="0"/>
-                        </a:rPr>
-                        <m:t>=</m:t>
-                      </m:r>
-                      <m:sSub>
-                        <m:sSubPr>
-                          <m:ctrlPr>
-                            <a:rPr lang="de-DE" sz="2400" i="1">
-                              <a:latin typeface="Cambria Math" panose="02040503050406030204" pitchFamily="18" charset="0"/>
-                            </a:rPr>
-                          </m:ctrlPr>
-                        </m:sSubPr>
-                        <m:e>
-                          <m:r>
-                            <a:rPr lang="de-DE" sz="2400" i="1">
-                              <a:latin typeface="Cambria Math" panose="02040503050406030204" pitchFamily="18" charset="0"/>
-                            </a:rPr>
-                            <m:t>𝐼</m:t>
-                          </m:r>
-                        </m:e>
-                        <m:sub>
-                          <m:r>
-                            <a:rPr lang="de-DE" sz="2400" b="0" i="1" smtClean="0">
-                              <a:latin typeface="Cambria Math" panose="02040503050406030204" pitchFamily="18" charset="0"/>
-                            </a:rPr>
-                            <m:t>4</m:t>
-                          </m:r>
-                        </m:sub>
-                      </m:sSub>
-                      <m:r>
-                        <a:rPr lang="de-DE" sz="2400" b="0" i="1" smtClean="0">
-                          <a:latin typeface="Cambria Math" panose="02040503050406030204" pitchFamily="18" charset="0"/>
-                        </a:rPr>
-                        <m:t>+</m:t>
-                      </m:r>
-                      <m:sSub>
-                        <m:sSubPr>
-                          <m:ctrlPr>
-                            <a:rPr lang="de-DE" sz="2400" i="1">
-                              <a:latin typeface="Cambria Math" panose="02040503050406030204" pitchFamily="18" charset="0"/>
-                            </a:rPr>
-                          </m:ctrlPr>
-                        </m:sSubPr>
-                        <m:e>
-                          <m:r>
-                            <a:rPr lang="de-DE" sz="2400" i="1">
-                              <a:latin typeface="Cambria Math" panose="02040503050406030204" pitchFamily="18" charset="0"/>
-                            </a:rPr>
-                            <m:t>𝐼</m:t>
-                          </m:r>
-                        </m:e>
-                        <m:sub>
-                          <m:r>
-                            <a:rPr lang="de-DE" sz="2400" b="0" i="1" smtClean="0">
-                              <a:latin typeface="Cambria Math" panose="02040503050406030204" pitchFamily="18" charset="0"/>
-                            </a:rPr>
-                            <m:t>5</m:t>
-                          </m:r>
-                        </m:sub>
-                      </m:sSub>
-                    </m:oMath>
-                  </m:oMathPara>
-                </a14:m>
-                <a:endParaRPr lang="de-DE" sz="2400" dirty="0"/>
-              </a:p>
-            </p:txBody>
-          </p:sp>
-        </mc:Choice>
-        <mc:Fallback xmlns="">
-          <p:sp>
-            <p:nvSpPr>
-              <p:cNvPr id="7" name="Textfeld 6">
-                <a:extLst>
-                  <a:ext uri="{FF2B5EF4-FFF2-40B4-BE49-F238E27FC236}">
-                    <a16:creationId xmlns:a16="http://schemas.microsoft.com/office/drawing/2014/main" id="{3CDA6B18-DA66-F780-B3E6-FA094A163153}"/>
-                  </a:ext>
-                </a:extLst>
-              </p:cNvPr>
-              <p:cNvSpPr txBox="1">
-                <a:spLocks noRot="1" noChangeAspect="1" noMove="1" noResize="1" noEditPoints="1" noAdjustHandles="1" noChangeArrowheads="1" noChangeShapeType="1" noTextEdit="1"/>
-              </p:cNvSpPr>
-              <p:nvPr/>
-            </p:nvSpPr>
-            <p:spPr>
-              <a:xfrm>
-                <a:off x="5620360" y="5945737"/>
-                <a:ext cx="2866696" cy="461665"/>
-              </a:xfrm>
-              <a:prstGeom prst="rect">
-                <a:avLst/>
-              </a:prstGeom>
-              <a:blipFill>
-                <a:blip r:embed="rId4"/>
-                <a:stretch>
-                  <a:fillRect l="-441"/>
-                </a:stretch>
-              </a:blipFill>
-            </p:spPr>
-            <p:txBody>
-              <a:bodyPr/>
-              <a:lstStyle/>
-              <a:p>
-                <a:r>
-                  <a:rPr lang="de-DE">
-                    <a:noFill/>
-                  </a:rPr>
-                  <a:t> </a:t>
-                </a:r>
-              </a:p>
-            </p:txBody>
-          </p:sp>
-        </mc:Fallback>
-      </mc:AlternateContent>
-    </p:spTree>
-    <p:extLst>
-      <p:ext uri="{BB962C8B-B14F-4D97-AF65-F5344CB8AC3E}">
-        <p14:creationId xmlns:p14="http://schemas.microsoft.com/office/powerpoint/2010/main" val="2969478246"/>
       </p:ext>
     </p:extLst>
   </p:cSld>

--- a/slides/2_DCcircuits.pptx
+++ b/slides/2_DCcircuits.pptx
@@ -227,7 +227,7 @@
           <a:p>
             <a:fld id="{50F0DBE5-119B-9546-A717-70798062973B}" type="datetimeFigureOut">
               <a:rPr lang="de-DE" smtClean="0"/>
-              <a:t>08.10.25</a:t>
+              <a:t>12.10.25</a:t>
             </a:fld>
             <a:endParaRPr lang="de-DE"/>
           </a:p>
@@ -641,7 +641,7 @@
           <a:p>
             <a:fld id="{CE5B6352-3465-4344-964A-B25153893676}" type="datetime1">
               <a:rPr lang="de-DE" smtClean="0"/>
-              <a:t>08.10.25</a:t>
+              <a:t>12.10.25</a:t>
             </a:fld>
             <a:endParaRPr lang="de-DE"/>
           </a:p>
@@ -839,7 +839,7 @@
           <a:p>
             <a:fld id="{680476C1-F079-0F40-9C5B-039EA12ABDAA}" type="datetime1">
               <a:rPr lang="de-DE" smtClean="0"/>
-              <a:t>08.10.25</a:t>
+              <a:t>12.10.25</a:t>
             </a:fld>
             <a:endParaRPr lang="de-DE"/>
           </a:p>
@@ -1047,7 +1047,7 @@
           <a:p>
             <a:fld id="{95A166F0-C736-5846-BD29-206B3FE0CE89}" type="datetime1">
               <a:rPr lang="de-DE" smtClean="0"/>
-              <a:t>08.10.25</a:t>
+              <a:t>12.10.25</a:t>
             </a:fld>
             <a:endParaRPr lang="de-DE"/>
           </a:p>
@@ -1245,7 +1245,7 @@
           <a:p>
             <a:fld id="{C501BE91-62CD-C14F-A910-7294FC82D4A0}" type="datetime1">
               <a:rPr lang="de-DE" smtClean="0"/>
-              <a:t>08.10.25</a:t>
+              <a:t>12.10.25</a:t>
             </a:fld>
             <a:endParaRPr lang="de-DE"/>
           </a:p>
@@ -1520,7 +1520,7 @@
           <a:p>
             <a:fld id="{BF974C23-8003-8246-BE47-B5ECC9F69FCF}" type="datetime1">
               <a:rPr lang="de-DE" smtClean="0"/>
-              <a:t>08.10.25</a:t>
+              <a:t>12.10.25</a:t>
             </a:fld>
             <a:endParaRPr lang="de-DE"/>
           </a:p>
@@ -1785,7 +1785,7 @@
           <a:p>
             <a:fld id="{9399C134-D3BA-F044-A1BA-5D8F00C16B33}" type="datetime1">
               <a:rPr lang="de-DE" smtClean="0"/>
-              <a:t>08.10.25</a:t>
+              <a:t>12.10.25</a:t>
             </a:fld>
             <a:endParaRPr lang="de-DE"/>
           </a:p>
@@ -2197,7 +2197,7 @@
           <a:p>
             <a:fld id="{CAA0E14A-B13F-B84D-BA0A-4382E133E05F}" type="datetime1">
               <a:rPr lang="de-DE" smtClean="0"/>
-              <a:t>08.10.25</a:t>
+              <a:t>12.10.25</a:t>
             </a:fld>
             <a:endParaRPr lang="de-DE"/>
           </a:p>
@@ -2338,7 +2338,7 @@
           <a:p>
             <a:fld id="{82499081-64A1-E641-A060-B3FE5E7414AE}" type="datetime1">
               <a:rPr lang="de-DE" smtClean="0"/>
-              <a:t>08.10.25</a:t>
+              <a:t>12.10.25</a:t>
             </a:fld>
             <a:endParaRPr lang="de-DE"/>
           </a:p>
@@ -2451,7 +2451,7 @@
           <a:p>
             <a:fld id="{72507737-E8BF-5348-A8D5-F635D39F9B4A}" type="datetime1">
               <a:rPr lang="de-DE" smtClean="0"/>
-              <a:t>08.10.25</a:t>
+              <a:t>12.10.25</a:t>
             </a:fld>
             <a:endParaRPr lang="de-DE"/>
           </a:p>
@@ -2762,7 +2762,7 @@
           <a:p>
             <a:fld id="{E5AF2D44-8DB2-1E42-B969-A879F4E80DE2}" type="datetime1">
               <a:rPr lang="de-DE" smtClean="0"/>
-              <a:t>08.10.25</a:t>
+              <a:t>12.10.25</a:t>
             </a:fld>
             <a:endParaRPr lang="de-DE"/>
           </a:p>
@@ -3050,7 +3050,7 @@
           <a:p>
             <a:fld id="{BDCC8AD7-B1B1-5742-9D45-5FF116011C65}" type="datetime1">
               <a:rPr lang="de-DE" smtClean="0"/>
-              <a:t>08.10.25</a:t>
+              <a:t>12.10.25</a:t>
             </a:fld>
             <a:endParaRPr lang="de-DE"/>
           </a:p>
@@ -3291,7 +3291,7 @@
           <a:p>
             <a:fld id="{108D9C44-3672-2C4D-8D64-277C579E81B1}" type="datetime1">
               <a:rPr lang="de-DE" smtClean="0"/>
-              <a:t>08.10.25</a:t>
+              <a:t>12.10.25</a:t>
             </a:fld>
             <a:endParaRPr lang="de-DE"/>
           </a:p>
@@ -5013,8 +5013,8 @@
           </a:prstGeom>
         </p:spPr>
       </p:pic>
-      <mc:AlternateContent xmlns:mc="http://schemas.openxmlformats.org/markup-compatibility/2006" xmlns:a14="http://schemas.microsoft.com/office/drawing/2010/main">
-        <mc:Choice Requires="a14">
+      <mc:AlternateContent xmlns:mc="http://schemas.openxmlformats.org/markup-compatibility/2006">
+        <mc:Choice xmlns:a14="http://schemas.microsoft.com/office/drawing/2010/main" Requires="a14">
           <p:sp>
             <p:nvSpPr>
               <p:cNvPr id="7" name="Textfeld 6">
@@ -5029,8 +5029,8 @@
             </p:nvSpPr>
             <p:spPr>
               <a:xfrm>
-                <a:off x="5620360" y="5945737"/>
-                <a:ext cx="2990240" cy="461665"/>
+                <a:off x="6014002" y="6014448"/>
+                <a:ext cx="2471017" cy="461665"/>
               </a:xfrm>
               <a:prstGeom prst="rect">
                 <a:avLst/>
@@ -5050,6 +5050,37 @@
                       <m:jc m:val="left"/>
                     </m:oMathParaPr>
                     <m:oMath xmlns:m="http://schemas.openxmlformats.org/officeDocument/2006/math">
+                      <m:sSub>
+                        <m:sSubPr>
+                          <m:ctrlPr>
+                            <a:rPr lang="de-DE" sz="2400" i="1" smtClean="0">
+                              <a:latin typeface="Cambria Math" panose="02040503050406030204" pitchFamily="18" charset="0"/>
+                            </a:rPr>
+                          </m:ctrlPr>
+                        </m:sSubPr>
+                        <m:e>
+                          <m:r>
+                            <a:rPr lang="de-DE" sz="2400" i="1">
+                              <a:latin typeface="Cambria Math" panose="02040503050406030204" pitchFamily="18" charset="0"/>
+                            </a:rPr>
+                            <m:t>𝑉</m:t>
+                          </m:r>
+                        </m:e>
+                        <m:sub>
+                          <m:r>
+                            <a:rPr lang="de-DE" sz="2400" i="1">
+                              <a:latin typeface="Cambria Math" panose="02040503050406030204" pitchFamily="18" charset="0"/>
+                            </a:rPr>
+                            <m:t>4</m:t>
+                          </m:r>
+                        </m:sub>
+                      </m:sSub>
+                      <m:r>
+                        <a:rPr lang="de-DE" sz="2400" b="0" i="1" smtClean="0">
+                          <a:latin typeface="Cambria Math" panose="02040503050406030204" pitchFamily="18" charset="0"/>
+                        </a:rPr>
+                        <m:t>=</m:t>
+                      </m:r>
                       <m:sSub>
                         <m:sSubPr>
                           <m:ctrlPr>
@@ -5137,43 +5168,6 @@
                           </m:r>
                         </m:sub>
                       </m:sSub>
-                      <m:r>
-                        <a:rPr lang="de-DE" sz="2400" b="0" i="1" smtClean="0">
-                          <a:latin typeface="Cambria Math" panose="02040503050406030204" pitchFamily="18" charset="0"/>
-                        </a:rPr>
-                        <m:t>+</m:t>
-                      </m:r>
-                      <m:sSub>
-                        <m:sSubPr>
-                          <m:ctrlPr>
-                            <a:rPr lang="de-DE" sz="2400" i="1">
-                              <a:latin typeface="Cambria Math" panose="02040503050406030204" pitchFamily="18" charset="0"/>
-                            </a:rPr>
-                          </m:ctrlPr>
-                        </m:sSubPr>
-                        <m:e>
-                          <m:r>
-                            <a:rPr lang="de-DE" sz="2400" b="0" i="1" smtClean="0">
-                              <a:latin typeface="Cambria Math" panose="02040503050406030204" pitchFamily="18" charset="0"/>
-                            </a:rPr>
-                            <m:t>𝑉</m:t>
-                          </m:r>
-                        </m:e>
-                        <m:sub>
-                          <m:r>
-                            <a:rPr lang="de-DE" sz="2400" b="0" i="1" smtClean="0">
-                              <a:latin typeface="Cambria Math" panose="02040503050406030204" pitchFamily="18" charset="0"/>
-                            </a:rPr>
-                            <m:t>4</m:t>
-                          </m:r>
-                        </m:sub>
-                      </m:sSub>
-                      <m:r>
-                        <a:rPr lang="de-DE" sz="2400" b="0" i="1" smtClean="0">
-                          <a:latin typeface="Cambria Math" panose="02040503050406030204" pitchFamily="18" charset="0"/>
-                        </a:rPr>
-                        <m:t>=0</m:t>
-                      </m:r>
                     </m:oMath>
                   </m:oMathPara>
                 </a14:m>
@@ -5182,7 +5176,7 @@
             </p:txBody>
           </p:sp>
         </mc:Choice>
-        <mc:Fallback xmlns="">
+        <mc:Fallback>
           <p:sp>
             <p:nvSpPr>
               <p:cNvPr id="7" name="Textfeld 6">
@@ -5199,8 +5193,8 @@
             </p:nvSpPr>
             <p:spPr>
               <a:xfrm>
-                <a:off x="5620360" y="5945737"/>
-                <a:ext cx="2990240" cy="461665"/>
+                <a:off x="6014002" y="6014448"/>
+                <a:ext cx="2471017" cy="461665"/>
               </a:xfrm>
               <a:prstGeom prst="rect">
                 <a:avLst/>
@@ -5208,7 +5202,7 @@
               <a:blipFill>
                 <a:blip r:embed="rId5"/>
                 <a:stretch>
-                  <a:fillRect l="-422"/>
+                  <a:fillRect l="-510"/>
                 </a:stretch>
               </a:blipFill>
             </p:spPr>
@@ -8791,6 +8785,85 @@
           </a:fontRef>
         </p:style>
       </p:cxnSp>
+      <p:sp>
+        <p:nvSpPr>
+          <p:cNvPr id="5" name="Textfeld 4">
+            <a:extLst>
+              <a:ext uri="{FF2B5EF4-FFF2-40B4-BE49-F238E27FC236}">
+                <a16:creationId xmlns:a16="http://schemas.microsoft.com/office/drawing/2014/main" id="{53BEA085-6D23-1510-FCCB-3D04A767CC70}"/>
+              </a:ext>
+            </a:extLst>
+          </p:cNvPr>
+          <p:cNvSpPr txBox="1"/>
+          <p:nvPr/>
+        </p:nvSpPr>
+        <p:spPr>
+          <a:xfrm>
+            <a:off x="2658141" y="5699051"/>
+            <a:ext cx="138222" cy="323165"/>
+          </a:xfrm>
+          <a:prstGeom prst="rect">
+            <a:avLst/>
+          </a:prstGeom>
+          <a:solidFill>
+            <a:schemeClr val="bg1"/>
+          </a:solidFill>
+        </p:spPr>
+        <p:txBody>
+          <a:bodyPr wrap="square" rtlCol="0">
+            <a:spAutoFit/>
+          </a:bodyPr>
+          <a:lstStyle/>
+          <a:p>
+            <a:r>
+              <a:rPr lang="de-DE" sz="1500" dirty="0"/>
+              <a:t>I</a:t>
+            </a:r>
+          </a:p>
+        </p:txBody>
+      </p:sp>
+      <p:sp>
+        <p:nvSpPr>
+          <p:cNvPr id="7" name="Textfeld 6">
+            <a:extLst>
+              <a:ext uri="{FF2B5EF4-FFF2-40B4-BE49-F238E27FC236}">
+                <a16:creationId xmlns:a16="http://schemas.microsoft.com/office/drawing/2014/main" id="{BBDE818A-F791-96CF-D1CB-8CEBDF4F4DF6}"/>
+              </a:ext>
+            </a:extLst>
+          </p:cNvPr>
+          <p:cNvSpPr txBox="1"/>
+          <p:nvPr/>
+        </p:nvSpPr>
+        <p:spPr>
+          <a:xfrm>
+            <a:off x="919853" y="5688418"/>
+            <a:ext cx="425116" cy="323165"/>
+          </a:xfrm>
+          <a:prstGeom prst="rect">
+            <a:avLst/>
+          </a:prstGeom>
+          <a:solidFill>
+            <a:schemeClr val="bg1"/>
+          </a:solidFill>
+        </p:spPr>
+        <p:txBody>
+          <a:bodyPr wrap="none" rtlCol="0">
+            <a:spAutoFit/>
+          </a:bodyPr>
+          <a:lstStyle/>
+          <a:p>
+            <a:r>
+              <a:rPr lang="de-DE" sz="1500" dirty="0"/>
+              <a:t>R</a:t>
+            </a:r>
+            <a:r>
+              <a:rPr lang="de-DE" sz="1500" baseline="-25000" dirty="0"/>
+              <a:t>IN</a:t>
+            </a:r>
+            <a:endParaRPr lang="de-DE" sz="1500" dirty="0"/>
+          </a:p>
+        </p:txBody>
+      </p:sp>
     </p:spTree>
     <p:extLst>
       <p:ext uri="{BB962C8B-B14F-4D97-AF65-F5344CB8AC3E}">
@@ -19401,8 +19474,8 @@
           <a:noFill/>
         </p:spPr>
       </p:pic>
-      <mc:AlternateContent xmlns:mc="http://schemas.openxmlformats.org/markup-compatibility/2006" xmlns:a14="http://schemas.microsoft.com/office/drawing/2010/main">
-        <mc:Choice Requires="a14">
+      <mc:AlternateContent xmlns:mc="http://schemas.openxmlformats.org/markup-compatibility/2006">
+        <mc:Choice xmlns:a14="http://schemas.microsoft.com/office/drawing/2010/main" Requires="a14">
           <p:sp>
             <p:nvSpPr>
               <p:cNvPr id="8" name="Textfeld 7">
@@ -19417,8 +19490,8 @@
             </p:nvSpPr>
             <p:spPr>
               <a:xfrm>
-                <a:off x="2317529" y="1608538"/>
-                <a:ext cx="7556939" cy="2434128"/>
+                <a:off x="2299991" y="1608033"/>
+                <a:ext cx="7592015" cy="2434128"/>
               </a:xfrm>
               <a:prstGeom prst="rect">
                 <a:avLst/>
@@ -20541,6 +20614,12 @@
                         </m:e>
                         <m:sub>
                           <m:r>
+                            <a:rPr lang="de-DE" sz="1800" b="0" i="1" smtClean="0">
+                              <a:latin typeface="Cambria Math" panose="02040503050406030204" pitchFamily="18" charset="0"/>
+                            </a:rPr>
+                            <m:t>𝑖</m:t>
+                          </m:r>
+                          <m:r>
                             <a:rPr lang="de-DE" sz="1800" i="1">
                               <a:latin typeface="Cambria Math" panose="02040503050406030204" pitchFamily="18" charset="0"/>
                             </a:rPr>
@@ -20829,7 +20908,7 @@
             </p:txBody>
           </p:sp>
         </mc:Choice>
-        <mc:Fallback xmlns="">
+        <mc:Fallback>
           <p:sp>
             <p:nvSpPr>
               <p:cNvPr id="8" name="Textfeld 7">
@@ -20846,8 +20925,8 @@
             </p:nvSpPr>
             <p:spPr>
               <a:xfrm>
-                <a:off x="2317529" y="1608538"/>
-                <a:ext cx="7556939" cy="2434128"/>
+                <a:off x="2299991" y="1608033"/>
+                <a:ext cx="7592015" cy="2434128"/>
               </a:xfrm>
               <a:prstGeom prst="rect">
                 <a:avLst/>
@@ -23938,8 +24017,8 @@
           </a:prstGeom>
         </p:spPr>
       </p:pic>
-      <mc:AlternateContent xmlns:mc="http://schemas.openxmlformats.org/markup-compatibility/2006" xmlns:a14="http://schemas.microsoft.com/office/drawing/2010/main">
-        <mc:Choice Requires="a14">
+      <mc:AlternateContent xmlns:mc="http://schemas.openxmlformats.org/markup-compatibility/2006">
+        <mc:Choice xmlns:a14="http://schemas.microsoft.com/office/drawing/2010/main" Requires="a14">
           <p:sp>
             <p:nvSpPr>
               <p:cNvPr id="8" name="Textfeld 7">
@@ -24032,7 +24111,7 @@
             </p:txBody>
           </p:sp>
         </mc:Choice>
-        <mc:Fallback xmlns="">
+        <mc:Fallback>
           <p:sp>
             <p:nvSpPr>
               <p:cNvPr id="8" name="Textfeld 7">

--- a/slides/2_DCcircuits.pptx
+++ b/slides/2_DCcircuits.pptx
@@ -227,7 +227,7 @@
           <a:p>
             <a:fld id="{50F0DBE5-119B-9546-A717-70798062973B}" type="datetimeFigureOut">
               <a:rPr lang="de-DE" smtClean="0"/>
-              <a:t>12.10.25</a:t>
+              <a:t>06.11.25</a:t>
             </a:fld>
             <a:endParaRPr lang="de-DE"/>
           </a:p>
@@ -641,7 +641,7 @@
           <a:p>
             <a:fld id="{CE5B6352-3465-4344-964A-B25153893676}" type="datetime1">
               <a:rPr lang="de-DE" smtClean="0"/>
-              <a:t>12.10.25</a:t>
+              <a:t>06.11.25</a:t>
             </a:fld>
             <a:endParaRPr lang="de-DE"/>
           </a:p>
@@ -839,7 +839,7 @@
           <a:p>
             <a:fld id="{680476C1-F079-0F40-9C5B-039EA12ABDAA}" type="datetime1">
               <a:rPr lang="de-DE" smtClean="0"/>
-              <a:t>12.10.25</a:t>
+              <a:t>06.11.25</a:t>
             </a:fld>
             <a:endParaRPr lang="de-DE"/>
           </a:p>
@@ -1047,7 +1047,7 @@
           <a:p>
             <a:fld id="{95A166F0-C736-5846-BD29-206B3FE0CE89}" type="datetime1">
               <a:rPr lang="de-DE" smtClean="0"/>
-              <a:t>12.10.25</a:t>
+              <a:t>06.11.25</a:t>
             </a:fld>
             <a:endParaRPr lang="de-DE"/>
           </a:p>
@@ -1245,7 +1245,7 @@
           <a:p>
             <a:fld id="{C501BE91-62CD-C14F-A910-7294FC82D4A0}" type="datetime1">
               <a:rPr lang="de-DE" smtClean="0"/>
-              <a:t>12.10.25</a:t>
+              <a:t>06.11.25</a:t>
             </a:fld>
             <a:endParaRPr lang="de-DE"/>
           </a:p>
@@ -1520,7 +1520,7 @@
           <a:p>
             <a:fld id="{BF974C23-8003-8246-BE47-B5ECC9F69FCF}" type="datetime1">
               <a:rPr lang="de-DE" smtClean="0"/>
-              <a:t>12.10.25</a:t>
+              <a:t>06.11.25</a:t>
             </a:fld>
             <a:endParaRPr lang="de-DE"/>
           </a:p>
@@ -1785,7 +1785,7 @@
           <a:p>
             <a:fld id="{9399C134-D3BA-F044-A1BA-5D8F00C16B33}" type="datetime1">
               <a:rPr lang="de-DE" smtClean="0"/>
-              <a:t>12.10.25</a:t>
+              <a:t>06.11.25</a:t>
             </a:fld>
             <a:endParaRPr lang="de-DE"/>
           </a:p>
@@ -2197,7 +2197,7 @@
           <a:p>
             <a:fld id="{CAA0E14A-B13F-B84D-BA0A-4382E133E05F}" type="datetime1">
               <a:rPr lang="de-DE" smtClean="0"/>
-              <a:t>12.10.25</a:t>
+              <a:t>06.11.25</a:t>
             </a:fld>
             <a:endParaRPr lang="de-DE"/>
           </a:p>
@@ -2338,7 +2338,7 @@
           <a:p>
             <a:fld id="{82499081-64A1-E641-A060-B3FE5E7414AE}" type="datetime1">
               <a:rPr lang="de-DE" smtClean="0"/>
-              <a:t>12.10.25</a:t>
+              <a:t>06.11.25</a:t>
             </a:fld>
             <a:endParaRPr lang="de-DE"/>
           </a:p>
@@ -2451,7 +2451,7 @@
           <a:p>
             <a:fld id="{72507737-E8BF-5348-A8D5-F635D39F9B4A}" type="datetime1">
               <a:rPr lang="de-DE" smtClean="0"/>
-              <a:t>12.10.25</a:t>
+              <a:t>06.11.25</a:t>
             </a:fld>
             <a:endParaRPr lang="de-DE"/>
           </a:p>
@@ -2762,7 +2762,7 @@
           <a:p>
             <a:fld id="{E5AF2D44-8DB2-1E42-B969-A879F4E80DE2}" type="datetime1">
               <a:rPr lang="de-DE" smtClean="0"/>
-              <a:t>12.10.25</a:t>
+              <a:t>06.11.25</a:t>
             </a:fld>
             <a:endParaRPr lang="de-DE"/>
           </a:p>
@@ -3050,7 +3050,7 @@
           <a:p>
             <a:fld id="{BDCC8AD7-B1B1-5742-9D45-5FF116011C65}" type="datetime1">
               <a:rPr lang="de-DE" smtClean="0"/>
-              <a:t>12.10.25</a:t>
+              <a:t>06.11.25</a:t>
             </a:fld>
             <a:endParaRPr lang="de-DE"/>
           </a:p>
@@ -3291,7 +3291,7 @@
           <a:p>
             <a:fld id="{108D9C44-3672-2C4D-8D64-277C579E81B1}" type="datetime1">
               <a:rPr lang="de-DE" smtClean="0"/>
-              <a:t>12.10.25</a:t>
+              <a:t>06.11.25</a:t>
             </a:fld>
             <a:endParaRPr lang="de-DE"/>
           </a:p>
@@ -5013,8 +5013,8 @@
           </a:prstGeom>
         </p:spPr>
       </p:pic>
-      <mc:AlternateContent xmlns:mc="http://schemas.openxmlformats.org/markup-compatibility/2006">
-        <mc:Choice xmlns:a14="http://schemas.microsoft.com/office/drawing/2010/main" Requires="a14">
+      <mc:AlternateContent xmlns:mc="http://schemas.openxmlformats.org/markup-compatibility/2006" xmlns:a14="http://schemas.microsoft.com/office/drawing/2010/main">
+        <mc:Choice Requires="a14">
           <p:sp>
             <p:nvSpPr>
               <p:cNvPr id="7" name="Textfeld 6">
@@ -5176,7 +5176,7 @@
             </p:txBody>
           </p:sp>
         </mc:Choice>
-        <mc:Fallback>
+        <mc:Fallback xmlns="">
           <p:sp>
             <p:nvSpPr>
               <p:cNvPr id="7" name="Textfeld 6">
@@ -11783,7 +11783,9 @@
         </p:nvSpPr>
         <p:spPr/>
         <p:txBody>
-          <a:bodyPr/>
+          <a:bodyPr>
+            <a:normAutofit lnSpcReduction="10000"/>
+          </a:bodyPr>
           <a:lstStyle/>
           <a:p>
             <a:pPr marL="514350" indent="-514350">
@@ -11898,6 +11900,23 @@
             <a:r>
               <a:rPr lang="de-DE" dirty="0"/>
               <a:t> Technology</a:t>
+            </a:r>
+          </a:p>
+          <a:p>
+            <a:pPr marL="514350" indent="-514350">
+              <a:buFont typeface="+mj-lt"/>
+              <a:buAutoNum type="arabicPeriod"/>
+            </a:pPr>
+            <a:endParaRPr lang="de-DE" dirty="0"/>
+          </a:p>
+          <a:p>
+            <a:pPr marL="514350" indent="-514350">
+              <a:buFont typeface="+mj-lt"/>
+              <a:buAutoNum type="arabicPeriod"/>
+            </a:pPr>
+            <a:r>
+              <a:rPr lang="de-DE" dirty="0"/>
+              <a:t>Wrap-Up and Outlook</a:t>
             </a:r>
           </a:p>
         </p:txBody>
@@ -19474,8 +19493,8 @@
           <a:noFill/>
         </p:spPr>
       </p:pic>
-      <mc:AlternateContent xmlns:mc="http://schemas.openxmlformats.org/markup-compatibility/2006">
-        <mc:Choice xmlns:a14="http://schemas.microsoft.com/office/drawing/2010/main" Requires="a14">
+      <mc:AlternateContent xmlns:mc="http://schemas.openxmlformats.org/markup-compatibility/2006" xmlns:a14="http://schemas.microsoft.com/office/drawing/2010/main">
+        <mc:Choice Requires="a14">
           <p:sp>
             <p:nvSpPr>
               <p:cNvPr id="8" name="Textfeld 7">
@@ -20908,7 +20927,7 @@
             </p:txBody>
           </p:sp>
         </mc:Choice>
-        <mc:Fallback>
+        <mc:Fallback xmlns="">
           <p:sp>
             <p:nvSpPr>
               <p:cNvPr id="8" name="Textfeld 7">
@@ -24017,8 +24036,8 @@
           </a:prstGeom>
         </p:spPr>
       </p:pic>
-      <mc:AlternateContent xmlns:mc="http://schemas.openxmlformats.org/markup-compatibility/2006">
-        <mc:Choice xmlns:a14="http://schemas.microsoft.com/office/drawing/2010/main" Requires="a14">
+      <mc:AlternateContent xmlns:mc="http://schemas.openxmlformats.org/markup-compatibility/2006" xmlns:a14="http://schemas.microsoft.com/office/drawing/2010/main">
+        <mc:Choice Requires="a14">
           <p:sp>
             <p:nvSpPr>
               <p:cNvPr id="8" name="Textfeld 7">
@@ -24111,7 +24130,7 @@
             </p:txBody>
           </p:sp>
         </mc:Choice>
-        <mc:Fallback>
+        <mc:Fallback xmlns="">
           <p:sp>
             <p:nvSpPr>
               <p:cNvPr id="8" name="Textfeld 7">

--- a/slides/2_DCcircuits.pptx
+++ b/slides/2_DCcircuits.pptx
@@ -5,7 +5,7 @@
     <p:sldMasterId id="2147483648" r:id="rId1"/>
   </p:sldMasterIdLst>
   <p:notesMasterIdLst>
-    <p:notesMasterId r:id="rId33"/>
+    <p:notesMasterId r:id="rId34"/>
   </p:notesMasterIdLst>
   <p:sldIdLst>
     <p:sldId id="257" r:id="rId2"/>
@@ -35,10 +35,11 @@
     <p:sldId id="295" r:id="rId26"/>
     <p:sldId id="294" r:id="rId27"/>
     <p:sldId id="293" r:id="rId28"/>
-    <p:sldId id="292" r:id="rId29"/>
-    <p:sldId id="290" r:id="rId30"/>
-    <p:sldId id="291" r:id="rId31"/>
-    <p:sldId id="296" r:id="rId32"/>
+    <p:sldId id="298" r:id="rId29"/>
+    <p:sldId id="292" r:id="rId30"/>
+    <p:sldId id="290" r:id="rId31"/>
+    <p:sldId id="291" r:id="rId32"/>
+    <p:sldId id="296" r:id="rId33"/>
   </p:sldIdLst>
   <p:sldSz cx="12192000" cy="6858000"/>
   <p:notesSz cx="6858000" cy="9144000"/>
@@ -227,7 +228,7 @@
           <a:p>
             <a:fld id="{50F0DBE5-119B-9546-A717-70798062973B}" type="datetimeFigureOut">
               <a:rPr lang="de-DE" smtClean="0"/>
-              <a:t>06.11.25</a:t>
+              <a:t>15.11.25</a:t>
             </a:fld>
             <a:endParaRPr lang="de-DE"/>
           </a:p>
@@ -641,7 +642,7 @@
           <a:p>
             <a:fld id="{CE5B6352-3465-4344-964A-B25153893676}" type="datetime1">
               <a:rPr lang="de-DE" smtClean="0"/>
-              <a:t>06.11.25</a:t>
+              <a:t>15.11.25</a:t>
             </a:fld>
             <a:endParaRPr lang="de-DE"/>
           </a:p>
@@ -839,7 +840,7 @@
           <a:p>
             <a:fld id="{680476C1-F079-0F40-9C5B-039EA12ABDAA}" type="datetime1">
               <a:rPr lang="de-DE" smtClean="0"/>
-              <a:t>06.11.25</a:t>
+              <a:t>15.11.25</a:t>
             </a:fld>
             <a:endParaRPr lang="de-DE"/>
           </a:p>
@@ -1047,7 +1048,7 @@
           <a:p>
             <a:fld id="{95A166F0-C736-5846-BD29-206B3FE0CE89}" type="datetime1">
               <a:rPr lang="de-DE" smtClean="0"/>
-              <a:t>06.11.25</a:t>
+              <a:t>15.11.25</a:t>
             </a:fld>
             <a:endParaRPr lang="de-DE"/>
           </a:p>
@@ -1245,7 +1246,7 @@
           <a:p>
             <a:fld id="{C501BE91-62CD-C14F-A910-7294FC82D4A0}" type="datetime1">
               <a:rPr lang="de-DE" smtClean="0"/>
-              <a:t>06.11.25</a:t>
+              <a:t>15.11.25</a:t>
             </a:fld>
             <a:endParaRPr lang="de-DE"/>
           </a:p>
@@ -1520,7 +1521,7 @@
           <a:p>
             <a:fld id="{BF974C23-8003-8246-BE47-B5ECC9F69FCF}" type="datetime1">
               <a:rPr lang="de-DE" smtClean="0"/>
-              <a:t>06.11.25</a:t>
+              <a:t>15.11.25</a:t>
             </a:fld>
             <a:endParaRPr lang="de-DE"/>
           </a:p>
@@ -1785,7 +1786,7 @@
           <a:p>
             <a:fld id="{9399C134-D3BA-F044-A1BA-5D8F00C16B33}" type="datetime1">
               <a:rPr lang="de-DE" smtClean="0"/>
-              <a:t>06.11.25</a:t>
+              <a:t>15.11.25</a:t>
             </a:fld>
             <a:endParaRPr lang="de-DE"/>
           </a:p>
@@ -2197,7 +2198,7 @@
           <a:p>
             <a:fld id="{CAA0E14A-B13F-B84D-BA0A-4382E133E05F}" type="datetime1">
               <a:rPr lang="de-DE" smtClean="0"/>
-              <a:t>06.11.25</a:t>
+              <a:t>15.11.25</a:t>
             </a:fld>
             <a:endParaRPr lang="de-DE"/>
           </a:p>
@@ -2338,7 +2339,7 @@
           <a:p>
             <a:fld id="{82499081-64A1-E641-A060-B3FE5E7414AE}" type="datetime1">
               <a:rPr lang="de-DE" smtClean="0"/>
-              <a:t>06.11.25</a:t>
+              <a:t>15.11.25</a:t>
             </a:fld>
             <a:endParaRPr lang="de-DE"/>
           </a:p>
@@ -2451,7 +2452,7 @@
           <a:p>
             <a:fld id="{72507737-E8BF-5348-A8D5-F635D39F9B4A}" type="datetime1">
               <a:rPr lang="de-DE" smtClean="0"/>
-              <a:t>06.11.25</a:t>
+              <a:t>15.11.25</a:t>
             </a:fld>
             <a:endParaRPr lang="de-DE"/>
           </a:p>
@@ -2762,7 +2763,7 @@
           <a:p>
             <a:fld id="{E5AF2D44-8DB2-1E42-B969-A879F4E80DE2}" type="datetime1">
               <a:rPr lang="de-DE" smtClean="0"/>
-              <a:t>06.11.25</a:t>
+              <a:t>15.11.25</a:t>
             </a:fld>
             <a:endParaRPr lang="de-DE"/>
           </a:p>
@@ -3050,7 +3051,7 @@
           <a:p>
             <a:fld id="{BDCC8AD7-B1B1-5742-9D45-5FF116011C65}" type="datetime1">
               <a:rPr lang="de-DE" smtClean="0"/>
-              <a:t>06.11.25</a:t>
+              <a:t>15.11.25</a:t>
             </a:fld>
             <a:endParaRPr lang="de-DE"/>
           </a:p>
@@ -3291,7 +3292,7 @@
           <a:p>
             <a:fld id="{108D9C44-3672-2C4D-8D64-277C579E81B1}" type="datetime1">
               <a:rPr lang="de-DE" smtClean="0"/>
-              <a:t>06.11.25</a:t>
+              <a:t>15.11.25</a:t>
             </a:fld>
             <a:endParaRPr lang="de-DE"/>
           </a:p>
@@ -14575,14 +14576,6 @@
           <a:p>
             <a:r>
               <a:rPr lang="de-DE" dirty="0" err="1"/>
-              <a:t>Example</a:t>
-            </a:r>
-            <a:r>
-              <a:rPr lang="de-DE" dirty="0"/>
-              <a:t>: </a:t>
-            </a:r>
-            <a:r>
-              <a:rPr lang="de-DE" dirty="0" err="1"/>
               <a:t>Representation</a:t>
             </a:r>
             <a:endParaRPr lang="de-DE" dirty="0"/>
@@ -16290,14 +16283,6 @@
           <a:bodyPr/>
           <a:lstStyle/>
           <a:p>
-            <a:r>
-              <a:rPr lang="de-DE" dirty="0" err="1"/>
-              <a:t>Example</a:t>
-            </a:r>
-            <a:r>
-              <a:rPr lang="de-DE" dirty="0"/>
-              <a:t>: </a:t>
-            </a:r>
             <a:r>
               <a:rPr lang="de-DE" dirty="0" err="1"/>
               <a:t>Formulation</a:t>
@@ -17117,13 +17102,14 @@
           <a:lstStyle/>
           <a:p>
             <a:r>
+              <a:rPr lang="de-DE" dirty="0"/>
+              <a:t>Approach 1: Use </a:t>
+            </a:r>
+            <a:r>
               <a:rPr lang="de-DE" dirty="0" err="1"/>
-              <a:t>Example</a:t>
-            </a:r>
-            <a:r>
-              <a:rPr lang="de-DE" dirty="0"/>
-              <a:t>: Mesh Analysis</a:t>
-            </a:r>
+              <a:t>Meshes</a:t>
+            </a:r>
+            <a:endParaRPr lang="de-DE" dirty="0"/>
           </a:p>
         </p:txBody>
       </p:sp>
@@ -17152,10 +17138,6 @@
               <a:buNone/>
             </a:pPr>
             <a:r>
-              <a:rPr lang="de-DE" dirty="0"/>
-              <a:t>pick </a:t>
-            </a:r>
-            <a:r>
               <a:rPr lang="de-DE" dirty="0" err="1"/>
               <a:t>meshes</a:t>
             </a:r>
@@ -17252,15 +17234,7 @@
             </a:r>
             <a:r>
               <a:rPr lang="de-DE" dirty="0"/>
-              <a:t> loop/</a:t>
-            </a:r>
-            <a:r>
-              <a:rPr lang="de-DE" dirty="0" err="1"/>
-              <a:t>mesh</a:t>
-            </a:r>
-            <a:r>
-              <a:rPr lang="de-DE" dirty="0"/>
-              <a:t> </a:t>
+              <a:t> loop </a:t>
             </a:r>
             <a:r>
               <a:rPr lang="de-DE" dirty="0" err="1"/>
@@ -18008,6 +17982,66 @@
           </a:p>
         </p:txBody>
       </p:sp>
+      <p:sp>
+        <p:nvSpPr>
+          <p:cNvPr id="5" name="Textfeld 4">
+            <a:extLst>
+              <a:ext uri="{FF2B5EF4-FFF2-40B4-BE49-F238E27FC236}">
+                <a16:creationId xmlns:a16="http://schemas.microsoft.com/office/drawing/2014/main" id="{D338373B-3F11-E2F2-EA1F-D79AC6A2E01F}"/>
+              </a:ext>
+            </a:extLst>
+          </p:cNvPr>
+          <p:cNvSpPr txBox="1"/>
+          <p:nvPr/>
+        </p:nvSpPr>
+        <p:spPr>
+          <a:xfrm>
+            <a:off x="8431355" y="38906"/>
+            <a:ext cx="3760645" cy="369332"/>
+          </a:xfrm>
+          <a:prstGeom prst="rect">
+            <a:avLst/>
+          </a:prstGeom>
+          <a:noFill/>
+        </p:spPr>
+        <p:txBody>
+          <a:bodyPr wrap="none" rtlCol="0">
+            <a:spAutoFit/>
+          </a:bodyPr>
+          <a:lstStyle/>
+          <a:p>
+            <a:r>
+              <a:rPr lang="de-DE" dirty="0" err="1"/>
+              <a:t>one</a:t>
+            </a:r>
+            <a:r>
+              <a:rPr lang="de-DE" dirty="0"/>
+              <a:t> </a:t>
+            </a:r>
+            <a:r>
+              <a:rPr lang="de-DE" dirty="0" err="1"/>
+              <a:t>more</a:t>
+            </a:r>
+            <a:r>
+              <a:rPr lang="de-DE" dirty="0"/>
+              <a:t> alternative: </a:t>
+            </a:r>
+            <a:r>
+              <a:rPr lang="de-DE" dirty="0" err="1"/>
+              <a:t>mesh</a:t>
+            </a:r>
+            <a:r>
+              <a:rPr lang="de-DE" dirty="0"/>
+              <a:t> </a:t>
+            </a:r>
+            <a:r>
+              <a:rPr lang="de-DE" dirty="0" err="1"/>
+              <a:t>analysis</a:t>
+            </a:r>
+            <a:endParaRPr lang="de-DE" dirty="0"/>
+          </a:p>
+        </p:txBody>
+      </p:sp>
     </p:spTree>
     <p:extLst>
       <p:ext uri="{BB962C8B-B14F-4D97-AF65-F5344CB8AC3E}">
@@ -18062,12 +18096,8 @@
           <a:lstStyle/>
           <a:p>
             <a:r>
-              <a:rPr lang="de-DE" dirty="0" err="1"/>
-              <a:t>Example</a:t>
-            </a:r>
-            <a:r>
               <a:rPr lang="de-DE" dirty="0"/>
-              <a:t>: Method </a:t>
+              <a:t>Approach 2: Method </a:t>
             </a:r>
             <a:r>
               <a:rPr lang="de-DE" dirty="0" err="1"/>
@@ -19403,12 +19433,8 @@
           <a:lstStyle/>
           <a:p>
             <a:r>
-              <a:rPr lang="de-DE" dirty="0" err="1"/>
-              <a:t>Example</a:t>
-            </a:r>
-            <a:r>
               <a:rPr lang="de-DE" dirty="0"/>
-              <a:t>: System </a:t>
+              <a:t>System </a:t>
             </a:r>
             <a:r>
               <a:rPr lang="de-DE" dirty="0" err="1"/>
@@ -21040,6 +21066,1570 @@
           <a:chExt cx="0" cy="0"/>
         </a:xfrm>
       </p:grpSpPr>
+      <mc:AlternateContent xmlns:mc="http://schemas.openxmlformats.org/markup-compatibility/2006">
+        <mc:Choice xmlns:a14="http://schemas.microsoft.com/office/drawing/2010/main" Requires="a14">
+          <p:sp>
+            <p:nvSpPr>
+              <p:cNvPr id="4" name="Inhaltsplatzhalter 3">
+                <a:extLst>
+                  <a:ext uri="{FF2B5EF4-FFF2-40B4-BE49-F238E27FC236}">
+                    <a16:creationId xmlns:a16="http://schemas.microsoft.com/office/drawing/2014/main" id="{6085456F-BCA5-FD69-44B0-E5D37499EC5D}"/>
+                  </a:ext>
+                </a:extLst>
+              </p:cNvPr>
+              <p:cNvSpPr>
+                <a:spLocks noGrp="1"/>
+              </p:cNvSpPr>
+              <p:nvPr>
+                <p:ph idx="1"/>
+              </p:nvPr>
+            </p:nvSpPr>
+            <p:spPr>
+              <a:xfrm>
+                <a:off x="382210" y="1690688"/>
+                <a:ext cx="8706301" cy="5030787"/>
+              </a:xfrm>
+            </p:spPr>
+            <p:txBody>
+              <a:bodyPr>
+                <a:normAutofit lnSpcReduction="10000"/>
+              </a:bodyPr>
+              <a:lstStyle/>
+              <a:p>
+                <a:pPr marL="0" indent="0">
+                  <a:buNone/>
+                </a:pPr>
+                <a:r>
+                  <a:rPr lang="de-DE" sz="2400" dirty="0" err="1"/>
+                  <a:t>sometimes</a:t>
+                </a:r>
+                <a:r>
+                  <a:rPr lang="de-DE" sz="2400" dirty="0"/>
+                  <a:t> simpler </a:t>
+                </a:r>
+                <a:r>
+                  <a:rPr lang="de-DE" sz="2400" dirty="0" err="1"/>
+                  <a:t>approach</a:t>
+                </a:r>
+                <a:r>
+                  <a:rPr lang="de-DE" sz="2400" dirty="0"/>
+                  <a:t>:</a:t>
+                </a:r>
+              </a:p>
+              <a:p>
+                <a:pPr marL="0" indent="0">
+                  <a:buNone/>
+                </a:pPr>
+                <a:endParaRPr lang="de-DE" sz="2400" dirty="0"/>
+              </a:p>
+              <a:p>
+                <a:r>
+                  <a:rPr lang="de-DE" sz="2400" dirty="0" err="1"/>
+                  <a:t>select</a:t>
+                </a:r>
+                <a:r>
+                  <a:rPr lang="de-DE" sz="2400" dirty="0"/>
+                  <a:t> </a:t>
+                </a:r>
+                <a:r>
+                  <a:rPr lang="de-DE" sz="2400" dirty="0" err="1"/>
+                  <a:t>one</a:t>
+                </a:r>
+                <a:r>
+                  <a:rPr lang="de-DE" sz="2400" dirty="0"/>
+                  <a:t> </a:t>
+                </a:r>
+                <a:r>
+                  <a:rPr lang="de-DE" sz="2400" dirty="0" err="1"/>
+                  <a:t>node</a:t>
+                </a:r>
+                <a:r>
+                  <a:rPr lang="de-DE" sz="2400" dirty="0"/>
+                  <a:t> </a:t>
+                </a:r>
+                <a:r>
+                  <a:rPr lang="de-DE" sz="2400" dirty="0" err="1"/>
+                  <a:t>as</a:t>
+                </a:r>
+                <a:r>
+                  <a:rPr lang="de-DE" sz="2400" dirty="0"/>
+                  <a:t> </a:t>
+                </a:r>
+                <a:r>
+                  <a:rPr lang="de-DE" sz="2400" dirty="0" err="1"/>
+                  <a:t>reference</a:t>
+                </a:r>
+                <a:r>
+                  <a:rPr lang="de-DE" sz="2400" dirty="0"/>
+                  <a:t> </a:t>
+                </a:r>
+                <a:r>
+                  <a:rPr lang="de-DE" sz="2400" dirty="0" err="1"/>
+                  <a:t>node</a:t>
+                </a:r>
+                <a:r>
+                  <a:rPr lang="de-DE" sz="2400" dirty="0"/>
+                  <a:t> </a:t>
+                </a:r>
+                <a:r>
+                  <a:rPr lang="de-DE" sz="2400" dirty="0" err="1"/>
+                  <a:t>with</a:t>
+                </a:r>
+                <a:r>
+                  <a:rPr lang="de-DE" sz="2400" dirty="0"/>
+                  <a:t> an </a:t>
+                </a:r>
+                <a:r>
+                  <a:rPr lang="de-DE" sz="2400" dirty="0" err="1"/>
+                  <a:t>arbitrary</a:t>
+                </a:r>
+                <a:r>
+                  <a:rPr lang="de-DE" sz="2400" dirty="0"/>
+                  <a:t> potential (</a:t>
+                </a:r>
+                <a:r>
+                  <a:rPr lang="de-DE" sz="2400" dirty="0" err="1"/>
+                  <a:t>typically</a:t>
+                </a:r>
+                <a:r>
+                  <a:rPr lang="de-DE" sz="2400" dirty="0"/>
+                  <a:t> </a:t>
+                </a:r>
+                <a:r>
+                  <a:rPr lang="de-DE" sz="2400" dirty="0" err="1"/>
+                  <a:t>ground</a:t>
+                </a:r>
+                <a:r>
+                  <a:rPr lang="de-DE" sz="2400" dirty="0"/>
+                  <a:t>, i.e., </a:t>
+                </a:r>
+                <a14:m>
+                  <m:oMath xmlns:m="http://schemas.openxmlformats.org/officeDocument/2006/math">
+                    <m:r>
+                      <a:rPr lang="de-DE" sz="2400" b="0" i="1" smtClean="0">
+                        <a:latin typeface="Cambria Math" panose="02040503050406030204" pitchFamily="18" charset="0"/>
+                      </a:rPr>
+                      <m:t>𝑉</m:t>
+                    </m:r>
+                    <m:r>
+                      <a:rPr lang="de-DE" sz="2400" b="0" i="1" smtClean="0">
+                        <a:latin typeface="Cambria Math" panose="02040503050406030204" pitchFamily="18" charset="0"/>
+                      </a:rPr>
+                      <m:t>=0</m:t>
+                    </m:r>
+                  </m:oMath>
+                </a14:m>
+                <a:r>
+                  <a:rPr lang="de-DE" sz="2400" dirty="0"/>
+                  <a:t>)</a:t>
+                </a:r>
+              </a:p>
+              <a:p>
+                <a:pPr marL="0" indent="0">
+                  <a:buNone/>
+                </a:pPr>
+                <a:endParaRPr lang="de-DE" sz="2400" dirty="0"/>
+              </a:p>
+              <a:p>
+                <a:r>
+                  <a:rPr lang="de-DE" sz="2400" dirty="0" err="1"/>
+                  <a:t>apply</a:t>
+                </a:r>
+                <a:r>
+                  <a:rPr lang="de-DE" sz="2400" dirty="0"/>
+                  <a:t> KCL </a:t>
+                </a:r>
+                <a:r>
+                  <a:rPr lang="de-DE" sz="2400" dirty="0" err="1"/>
+                  <a:t>to</a:t>
+                </a:r>
+                <a:r>
+                  <a:rPr lang="de-DE" sz="2400" dirty="0"/>
+                  <a:t> </a:t>
+                </a:r>
+                <a14:m>
+                  <m:oMath xmlns:m="http://schemas.openxmlformats.org/officeDocument/2006/math">
+                    <m:r>
+                      <a:rPr lang="de-DE" sz="2400" i="1">
+                        <a:latin typeface="Cambria Math" panose="02040503050406030204" pitchFamily="18" charset="0"/>
+                      </a:rPr>
+                      <m:t>𝑛</m:t>
+                    </m:r>
+                    <m:r>
+                      <a:rPr lang="de-DE" sz="2400" i="1">
+                        <a:latin typeface="Cambria Math" panose="02040503050406030204" pitchFamily="18" charset="0"/>
+                      </a:rPr>
+                      <m:t>−1</m:t>
+                    </m:r>
+                  </m:oMath>
+                </a14:m>
+                <a:r>
+                  <a:rPr lang="de-DE" sz="2400" dirty="0"/>
+                  <a:t> non-</a:t>
+                </a:r>
+                <a:r>
+                  <a:rPr lang="de-DE" sz="2400" dirty="0" err="1"/>
+                  <a:t>reference</a:t>
+                </a:r>
+                <a:r>
+                  <a:rPr lang="de-DE" sz="2400" dirty="0"/>
+                  <a:t> </a:t>
+                </a:r>
+                <a:r>
+                  <a:rPr lang="de-DE" sz="2400" dirty="0" err="1"/>
+                  <a:t>nodes</a:t>
+                </a:r>
+                <a:endParaRPr lang="de-DE" sz="2400" dirty="0"/>
+              </a:p>
+              <a:p>
+                <a:pPr marL="0" indent="0">
+                  <a:buNone/>
+                </a:pPr>
+                <a:endParaRPr lang="de-DE" sz="2400" dirty="0"/>
+              </a:p>
+              <a:p>
+                <a:pPr marL="0" indent="0">
+                  <a:buNone/>
+                </a:pPr>
+                <a:endParaRPr lang="de-DE" sz="2400" dirty="0"/>
+              </a:p>
+              <a:p>
+                <a:r>
+                  <a:rPr lang="de-DE" sz="2400" dirty="0" err="1"/>
+                  <a:t>apply</a:t>
+                </a:r>
+                <a:r>
+                  <a:rPr lang="de-DE" sz="2400" dirty="0"/>
+                  <a:t> </a:t>
+                </a:r>
+                <a:r>
+                  <a:rPr lang="de-DE" sz="2400" dirty="0" err="1"/>
+                  <a:t>Ohm‘s</a:t>
+                </a:r>
+                <a:r>
+                  <a:rPr lang="de-DE" sz="2400" dirty="0"/>
+                  <a:t> </a:t>
+                </a:r>
+                <a:r>
+                  <a:rPr lang="de-DE" sz="2400" dirty="0" err="1"/>
+                  <a:t>law</a:t>
+                </a:r>
+                <a:r>
+                  <a:rPr lang="de-DE" sz="2400" dirty="0"/>
+                  <a:t> </a:t>
+                </a:r>
+                <a:r>
+                  <a:rPr lang="de-DE" sz="2400" dirty="0" err="1"/>
+                  <a:t>to</a:t>
+                </a:r>
+                <a:r>
+                  <a:rPr lang="de-DE" sz="2400" dirty="0"/>
+                  <a:t> express </a:t>
+                </a:r>
+                <a:r>
+                  <a:rPr lang="de-DE" sz="2400" dirty="0" err="1"/>
+                  <a:t>currents</a:t>
+                </a:r>
+                <a:r>
+                  <a:rPr lang="de-DE" sz="2400" dirty="0"/>
+                  <a:t> in </a:t>
+                </a:r>
+                <a:r>
+                  <a:rPr lang="de-DE" sz="2400" dirty="0" err="1"/>
+                  <a:t>terms</a:t>
+                </a:r>
+                <a:r>
+                  <a:rPr lang="de-DE" sz="2400" dirty="0"/>
+                  <a:t> </a:t>
+                </a:r>
+                <a:r>
+                  <a:rPr lang="de-DE" sz="2400" dirty="0" err="1"/>
+                  <a:t>of</a:t>
+                </a:r>
+                <a:r>
+                  <a:rPr lang="de-DE" sz="2400" dirty="0"/>
+                  <a:t> </a:t>
+                </a:r>
+                <a:r>
+                  <a:rPr lang="de-DE" sz="2400" dirty="0" err="1"/>
+                  <a:t>node</a:t>
+                </a:r>
+                <a:r>
+                  <a:rPr lang="de-DE" sz="2400" dirty="0"/>
+                  <a:t> </a:t>
+                </a:r>
+                <a:r>
+                  <a:rPr lang="de-DE" sz="2400" dirty="0" err="1"/>
+                  <a:t>voltages</a:t>
+                </a:r>
+                <a:r>
+                  <a:rPr lang="de-DE" sz="2400" dirty="0"/>
+                  <a:t>:</a:t>
+                </a:r>
+              </a:p>
+              <a:p>
+                <a:pPr marL="0" indent="0">
+                  <a:buNone/>
+                </a:pPr>
+                <a:endParaRPr lang="de-DE" sz="2400" dirty="0"/>
+              </a:p>
+              <a:p>
+                <a:pPr marL="0" indent="0">
+                  <a:buNone/>
+                </a:pPr>
+                <a:endParaRPr lang="de-DE" sz="2400" dirty="0"/>
+              </a:p>
+              <a:p>
+                <a:r>
+                  <a:rPr lang="de-DE" sz="2400" dirty="0" err="1"/>
+                  <a:t>substitute</a:t>
+                </a:r>
+                <a:r>
+                  <a:rPr lang="de-DE" sz="2400" dirty="0"/>
+                  <a:t> and </a:t>
+                </a:r>
+                <a:r>
+                  <a:rPr lang="de-DE" sz="2400" dirty="0" err="1"/>
+                  <a:t>solve</a:t>
+                </a:r>
+                <a:endParaRPr lang="de-DE" sz="2400" dirty="0"/>
+              </a:p>
+            </p:txBody>
+          </p:sp>
+        </mc:Choice>
+        <mc:Fallback>
+          <p:sp>
+            <p:nvSpPr>
+              <p:cNvPr id="4" name="Inhaltsplatzhalter 3">
+                <a:extLst>
+                  <a:ext uri="{FF2B5EF4-FFF2-40B4-BE49-F238E27FC236}">
+                    <a16:creationId xmlns:a16="http://schemas.microsoft.com/office/drawing/2014/main" id="{6085456F-BCA5-FD69-44B0-E5D37499EC5D}"/>
+                  </a:ext>
+                </a:extLst>
+              </p:cNvPr>
+              <p:cNvSpPr>
+                <a:spLocks noGrp="1" noRot="1" noChangeAspect="1" noMove="1" noResize="1" noEditPoints="1" noAdjustHandles="1" noChangeArrowheads="1" noChangeShapeType="1" noTextEdit="1"/>
+              </p:cNvSpPr>
+              <p:nvPr>
+                <p:ph idx="1"/>
+              </p:nvPr>
+            </p:nvSpPr>
+            <p:spPr>
+              <a:xfrm>
+                <a:off x="382210" y="1690688"/>
+                <a:ext cx="8706301" cy="5030787"/>
+              </a:xfrm>
+              <a:blipFill>
+                <a:blip r:embed="rId2"/>
+                <a:stretch>
+                  <a:fillRect l="-1166" t="-2010"/>
+                </a:stretch>
+              </a:blipFill>
+            </p:spPr>
+            <p:txBody>
+              <a:bodyPr/>
+              <a:lstStyle/>
+              <a:p>
+                <a:r>
+                  <a:rPr lang="de-DE">
+                    <a:noFill/>
+                  </a:rPr>
+                  <a:t> </a:t>
+                </a:r>
+              </a:p>
+            </p:txBody>
+          </p:sp>
+        </mc:Fallback>
+      </mc:AlternateContent>
+      <mc:AlternateContent xmlns:mc="http://schemas.openxmlformats.org/markup-compatibility/2006">
+        <mc:Choice xmlns:a14="http://schemas.microsoft.com/office/drawing/2010/main" Requires="a14">
+          <p:sp>
+            <p:nvSpPr>
+              <p:cNvPr id="27" name="Textfeld 26">
+                <a:extLst>
+                  <a:ext uri="{FF2B5EF4-FFF2-40B4-BE49-F238E27FC236}">
+                    <a16:creationId xmlns:a16="http://schemas.microsoft.com/office/drawing/2014/main" id="{F84AF832-11DD-714E-68B6-F1EE3DCAFE47}"/>
+                  </a:ext>
+                </a:extLst>
+              </p:cNvPr>
+              <p:cNvSpPr txBox="1"/>
+              <p:nvPr/>
+            </p:nvSpPr>
+            <p:spPr>
+              <a:xfrm>
+                <a:off x="838200" y="4176001"/>
+                <a:ext cx="5935343" cy="369332"/>
+              </a:xfrm>
+              <a:prstGeom prst="rect">
+                <a:avLst/>
+              </a:prstGeom>
+              <a:noFill/>
+              <a:ln>
+                <a:solidFill>
+                  <a:schemeClr val="tx1"/>
+                </a:solidFill>
+              </a:ln>
+            </p:spPr>
+            <p:txBody>
+              <a:bodyPr wrap="none" rtlCol="0">
+                <a:spAutoFit/>
+              </a:bodyPr>
+              <a:lstStyle/>
+              <a:p>
+                <a:r>
+                  <a:rPr lang="de-DE" dirty="0"/>
+                  <a:t>here:	node1: </a:t>
+                </a:r>
+                <a14:m>
+                  <m:oMath xmlns:m="http://schemas.openxmlformats.org/officeDocument/2006/math">
+                    <m:sSub>
+                      <m:sSubPr>
+                        <m:ctrlPr>
+                          <a:rPr lang="de-DE" i="1" smtClean="0">
+                            <a:latin typeface="Cambria Math" panose="02040503050406030204" pitchFamily="18" charset="0"/>
+                          </a:rPr>
+                        </m:ctrlPr>
+                      </m:sSubPr>
+                      <m:e>
+                        <m:r>
+                          <a:rPr lang="de-DE" b="0" i="1" smtClean="0">
+                            <a:latin typeface="Cambria Math" panose="02040503050406030204" pitchFamily="18" charset="0"/>
+                          </a:rPr>
+                          <m:t>𝐼</m:t>
+                        </m:r>
+                      </m:e>
+                      <m:sub>
+                        <m:r>
+                          <a:rPr lang="de-DE" b="0" i="1" smtClean="0">
+                            <a:latin typeface="Cambria Math" panose="02040503050406030204" pitchFamily="18" charset="0"/>
+                          </a:rPr>
+                          <m:t>1</m:t>
+                        </m:r>
+                      </m:sub>
+                    </m:sSub>
+                    <m:r>
+                      <a:rPr lang="de-DE" b="0" i="1" smtClean="0">
+                        <a:latin typeface="Cambria Math" panose="02040503050406030204" pitchFamily="18" charset="0"/>
+                      </a:rPr>
+                      <m:t>=</m:t>
+                    </m:r>
+                    <m:sSub>
+                      <m:sSubPr>
+                        <m:ctrlPr>
+                          <a:rPr lang="de-DE" b="0" i="1" smtClean="0">
+                            <a:latin typeface="Cambria Math" panose="02040503050406030204" pitchFamily="18" charset="0"/>
+                          </a:rPr>
+                        </m:ctrlPr>
+                      </m:sSubPr>
+                      <m:e>
+                        <m:r>
+                          <a:rPr lang="de-DE" b="0" i="1" smtClean="0">
+                            <a:latin typeface="Cambria Math" panose="02040503050406030204" pitchFamily="18" charset="0"/>
+                          </a:rPr>
+                          <m:t>𝐼</m:t>
+                        </m:r>
+                      </m:e>
+                      <m:sub>
+                        <m:r>
+                          <a:rPr lang="de-DE" b="0" i="1" smtClean="0">
+                            <a:latin typeface="Cambria Math" panose="02040503050406030204" pitchFamily="18" charset="0"/>
+                          </a:rPr>
+                          <m:t>2</m:t>
+                        </m:r>
+                      </m:sub>
+                    </m:sSub>
+                    <m:r>
+                      <a:rPr lang="de-DE" b="0" i="1" smtClean="0">
+                        <a:latin typeface="Cambria Math" panose="02040503050406030204" pitchFamily="18" charset="0"/>
+                      </a:rPr>
+                      <m:t>+</m:t>
+                    </m:r>
+                    <m:sSub>
+                      <m:sSubPr>
+                        <m:ctrlPr>
+                          <a:rPr lang="de-DE" b="0" i="1" smtClean="0">
+                            <a:latin typeface="Cambria Math" panose="02040503050406030204" pitchFamily="18" charset="0"/>
+                          </a:rPr>
+                        </m:ctrlPr>
+                      </m:sSubPr>
+                      <m:e>
+                        <m:r>
+                          <a:rPr lang="de-DE" b="0" i="1" smtClean="0">
+                            <a:latin typeface="Cambria Math" panose="02040503050406030204" pitchFamily="18" charset="0"/>
+                          </a:rPr>
+                          <m:t>𝑖</m:t>
+                        </m:r>
+                      </m:e>
+                      <m:sub>
+                        <m:r>
+                          <a:rPr lang="de-DE" b="0" i="1" smtClean="0">
+                            <a:latin typeface="Cambria Math" panose="02040503050406030204" pitchFamily="18" charset="0"/>
+                          </a:rPr>
+                          <m:t>1</m:t>
+                        </m:r>
+                      </m:sub>
+                    </m:sSub>
+                    <m:r>
+                      <a:rPr lang="de-DE" b="0" i="1" smtClean="0">
+                        <a:latin typeface="Cambria Math" panose="02040503050406030204" pitchFamily="18" charset="0"/>
+                      </a:rPr>
+                      <m:t>+</m:t>
+                    </m:r>
+                    <m:sSub>
+                      <m:sSubPr>
+                        <m:ctrlPr>
+                          <a:rPr lang="de-DE" b="0" i="1" smtClean="0">
+                            <a:latin typeface="Cambria Math" panose="02040503050406030204" pitchFamily="18" charset="0"/>
+                          </a:rPr>
+                        </m:ctrlPr>
+                      </m:sSubPr>
+                      <m:e>
+                        <m:r>
+                          <a:rPr lang="de-DE" b="0" i="1" smtClean="0">
+                            <a:latin typeface="Cambria Math" panose="02040503050406030204" pitchFamily="18" charset="0"/>
+                          </a:rPr>
+                          <m:t>𝑖</m:t>
+                        </m:r>
+                      </m:e>
+                      <m:sub>
+                        <m:r>
+                          <a:rPr lang="de-DE" b="0" i="1" smtClean="0">
+                            <a:latin typeface="Cambria Math" panose="02040503050406030204" pitchFamily="18" charset="0"/>
+                          </a:rPr>
+                          <m:t>2</m:t>
+                        </m:r>
+                      </m:sub>
+                    </m:sSub>
+                  </m:oMath>
+                </a14:m>
+                <a:r>
+                  <a:rPr lang="de-DE" dirty="0"/>
+                  <a:t>	node2: </a:t>
+                </a:r>
+                <a14:m>
+                  <m:oMath xmlns:m="http://schemas.openxmlformats.org/officeDocument/2006/math">
+                    <m:sSub>
+                      <m:sSubPr>
+                        <m:ctrlPr>
+                          <a:rPr lang="de-DE" i="1" smtClean="0">
+                            <a:latin typeface="Cambria Math" panose="02040503050406030204" pitchFamily="18" charset="0"/>
+                          </a:rPr>
+                        </m:ctrlPr>
+                      </m:sSubPr>
+                      <m:e>
+                        <m:r>
+                          <a:rPr lang="de-DE" b="0" i="1" smtClean="0">
+                            <a:latin typeface="Cambria Math" panose="02040503050406030204" pitchFamily="18" charset="0"/>
+                          </a:rPr>
+                          <m:t>𝐼</m:t>
+                        </m:r>
+                      </m:e>
+                      <m:sub>
+                        <m:r>
+                          <a:rPr lang="de-DE" b="0" i="1" smtClean="0">
+                            <a:latin typeface="Cambria Math" panose="02040503050406030204" pitchFamily="18" charset="0"/>
+                          </a:rPr>
+                          <m:t>2</m:t>
+                        </m:r>
+                      </m:sub>
+                    </m:sSub>
+                    <m:r>
+                      <a:rPr lang="de-DE" b="0" i="1" smtClean="0">
+                        <a:latin typeface="Cambria Math" panose="02040503050406030204" pitchFamily="18" charset="0"/>
+                      </a:rPr>
+                      <m:t>+</m:t>
+                    </m:r>
+                    <m:sSub>
+                      <m:sSubPr>
+                        <m:ctrlPr>
+                          <a:rPr lang="de-DE" b="0" i="1" smtClean="0">
+                            <a:latin typeface="Cambria Math" panose="02040503050406030204" pitchFamily="18" charset="0"/>
+                          </a:rPr>
+                        </m:ctrlPr>
+                      </m:sSubPr>
+                      <m:e>
+                        <m:r>
+                          <a:rPr lang="de-DE" b="0" i="1" smtClean="0">
+                            <a:latin typeface="Cambria Math" panose="02040503050406030204" pitchFamily="18" charset="0"/>
+                          </a:rPr>
+                          <m:t>𝑖</m:t>
+                        </m:r>
+                      </m:e>
+                      <m:sub>
+                        <m:r>
+                          <a:rPr lang="de-DE" b="0" i="1" smtClean="0">
+                            <a:latin typeface="Cambria Math" panose="02040503050406030204" pitchFamily="18" charset="0"/>
+                          </a:rPr>
+                          <m:t>2</m:t>
+                        </m:r>
+                      </m:sub>
+                    </m:sSub>
+                    <m:r>
+                      <a:rPr lang="de-DE" b="0" i="1" smtClean="0">
+                        <a:latin typeface="Cambria Math" panose="02040503050406030204" pitchFamily="18" charset="0"/>
+                      </a:rPr>
+                      <m:t>=</m:t>
+                    </m:r>
+                    <m:sSub>
+                      <m:sSubPr>
+                        <m:ctrlPr>
+                          <a:rPr lang="de-DE" b="0" i="1" smtClean="0">
+                            <a:latin typeface="Cambria Math" panose="02040503050406030204" pitchFamily="18" charset="0"/>
+                          </a:rPr>
+                        </m:ctrlPr>
+                      </m:sSubPr>
+                      <m:e>
+                        <m:r>
+                          <a:rPr lang="de-DE" b="0" i="1" smtClean="0">
+                            <a:latin typeface="Cambria Math" panose="02040503050406030204" pitchFamily="18" charset="0"/>
+                          </a:rPr>
+                          <m:t>𝑖</m:t>
+                        </m:r>
+                      </m:e>
+                      <m:sub>
+                        <m:r>
+                          <a:rPr lang="de-DE" b="0" i="1" smtClean="0">
+                            <a:latin typeface="Cambria Math" panose="02040503050406030204" pitchFamily="18" charset="0"/>
+                          </a:rPr>
+                          <m:t>3</m:t>
+                        </m:r>
+                      </m:sub>
+                    </m:sSub>
+                  </m:oMath>
+                </a14:m>
+                <a:endParaRPr lang="de-DE" dirty="0"/>
+              </a:p>
+            </p:txBody>
+          </p:sp>
+        </mc:Choice>
+        <mc:Fallback>
+          <p:sp>
+            <p:nvSpPr>
+              <p:cNvPr id="27" name="Textfeld 26">
+                <a:extLst>
+                  <a:ext uri="{FF2B5EF4-FFF2-40B4-BE49-F238E27FC236}">
+                    <a16:creationId xmlns:a16="http://schemas.microsoft.com/office/drawing/2014/main" id="{F84AF832-11DD-714E-68B6-F1EE3DCAFE47}"/>
+                  </a:ext>
+                </a:extLst>
+              </p:cNvPr>
+              <p:cNvSpPr txBox="1">
+                <a:spLocks noRot="1" noChangeAspect="1" noMove="1" noResize="1" noEditPoints="1" noAdjustHandles="1" noChangeArrowheads="1" noChangeShapeType="1" noTextEdit="1"/>
+              </p:cNvSpPr>
+              <p:nvPr/>
+            </p:nvSpPr>
+            <p:spPr>
+              <a:xfrm>
+                <a:off x="838200" y="4176001"/>
+                <a:ext cx="5935343" cy="369332"/>
+              </a:xfrm>
+              <a:prstGeom prst="rect">
+                <a:avLst/>
+              </a:prstGeom>
+              <a:blipFill>
+                <a:blip r:embed="rId3"/>
+                <a:stretch>
+                  <a:fillRect l="-853" t="-6452" b="-22581"/>
+                </a:stretch>
+              </a:blipFill>
+              <a:ln>
+                <a:solidFill>
+                  <a:schemeClr val="tx1"/>
+                </a:solidFill>
+              </a:ln>
+            </p:spPr>
+            <p:txBody>
+              <a:bodyPr/>
+              <a:lstStyle/>
+              <a:p>
+                <a:r>
+                  <a:rPr lang="de-DE">
+                    <a:noFill/>
+                  </a:rPr>
+                  <a:t> </a:t>
+                </a:r>
+              </a:p>
+            </p:txBody>
+          </p:sp>
+        </mc:Fallback>
+      </mc:AlternateContent>
+      <p:sp>
+        <p:nvSpPr>
+          <p:cNvPr id="2" name="Titel 1">
+            <a:extLst>
+              <a:ext uri="{FF2B5EF4-FFF2-40B4-BE49-F238E27FC236}">
+                <a16:creationId xmlns:a16="http://schemas.microsoft.com/office/drawing/2014/main" id="{CAB5C406-365F-B1B1-05B8-69E02AA624CF}"/>
+              </a:ext>
+            </a:extLst>
+          </p:cNvPr>
+          <p:cNvSpPr>
+            <a:spLocks noGrp="1"/>
+          </p:cNvSpPr>
+          <p:nvPr>
+            <p:ph type="title"/>
+          </p:nvPr>
+        </p:nvSpPr>
+        <p:spPr/>
+        <p:txBody>
+          <a:bodyPr/>
+          <a:lstStyle/>
+          <a:p>
+            <a:r>
+              <a:rPr lang="de-DE" dirty="0"/>
+              <a:t>Alternative: </a:t>
+            </a:r>
+            <a:r>
+              <a:rPr lang="de-DE" dirty="0" err="1"/>
+              <a:t>Nodal</a:t>
+            </a:r>
+            <a:r>
+              <a:rPr lang="de-DE" dirty="0"/>
+              <a:t> Analysis</a:t>
+            </a:r>
+          </a:p>
+        </p:txBody>
+      </p:sp>
+      <p:sp>
+        <p:nvSpPr>
+          <p:cNvPr id="3" name="Foliennummernplatzhalter 2">
+            <a:extLst>
+              <a:ext uri="{FF2B5EF4-FFF2-40B4-BE49-F238E27FC236}">
+                <a16:creationId xmlns:a16="http://schemas.microsoft.com/office/drawing/2014/main" id="{445A0059-57CB-21C4-7894-37E7247EA417}"/>
+              </a:ext>
+            </a:extLst>
+          </p:cNvPr>
+          <p:cNvSpPr>
+            <a:spLocks noGrp="1"/>
+          </p:cNvSpPr>
+          <p:nvPr>
+            <p:ph type="sldNum" sz="quarter" idx="12"/>
+          </p:nvPr>
+        </p:nvSpPr>
+        <p:spPr/>
+        <p:txBody>
+          <a:bodyPr/>
+          <a:lstStyle/>
+          <a:p>
+            <a:fld id="{BA3EAA6B-85FB-CD46-8BDC-C1BC3364C8C0}" type="slidenum">
+              <a:rPr lang="de-DE" smtClean="0"/>
+              <a:t>28</a:t>
+            </a:fld>
+            <a:endParaRPr lang="de-DE"/>
+          </a:p>
+        </p:txBody>
+      </p:sp>
+      <p:pic>
+        <p:nvPicPr>
+          <p:cNvPr id="6" name="Grafik 5" descr="Ein Bild, das Diagramm, Reihe enthält.&#10;&#10;KI-generierte Inhalte können fehlerhaft sein.">
+            <a:extLst>
+              <a:ext uri="{FF2B5EF4-FFF2-40B4-BE49-F238E27FC236}">
+                <a16:creationId xmlns:a16="http://schemas.microsoft.com/office/drawing/2014/main" id="{E0AA889E-3275-DD0C-5F8B-9E6E60623D04}"/>
+              </a:ext>
+            </a:extLst>
+          </p:cNvPr>
+          <p:cNvPicPr>
+            <a:picLocks noChangeAspect="1"/>
+          </p:cNvPicPr>
+          <p:nvPr/>
+        </p:nvPicPr>
+        <p:blipFill>
+          <a:blip r:embed="rId4"/>
+          <a:stretch>
+            <a:fillRect/>
+          </a:stretch>
+        </p:blipFill>
+        <p:spPr>
+          <a:xfrm>
+            <a:off x="9088511" y="721782"/>
+            <a:ext cx="2560144" cy="2508393"/>
+          </a:xfrm>
+          <a:prstGeom prst="rect">
+            <a:avLst/>
+          </a:prstGeom>
+        </p:spPr>
+      </p:pic>
+      <p:pic>
+        <p:nvPicPr>
+          <p:cNvPr id="8" name="Grafik 7" descr="Ein Bild, das Diagramm, Text enthält.&#10;&#10;KI-generierte Inhalte können fehlerhaft sein.">
+            <a:extLst>
+              <a:ext uri="{FF2B5EF4-FFF2-40B4-BE49-F238E27FC236}">
+                <a16:creationId xmlns:a16="http://schemas.microsoft.com/office/drawing/2014/main" id="{B4A7DFB5-7DB8-79BE-8FBE-07856800B2E3}"/>
+              </a:ext>
+            </a:extLst>
+          </p:cNvPr>
+          <p:cNvPicPr>
+            <a:picLocks noChangeAspect="1"/>
+          </p:cNvPicPr>
+          <p:nvPr/>
+        </p:nvPicPr>
+        <p:blipFill>
+          <a:blip r:embed="rId5"/>
+          <a:stretch>
+            <a:fillRect/>
+          </a:stretch>
+        </p:blipFill>
+        <p:spPr>
+          <a:xfrm>
+            <a:off x="9088511" y="3997157"/>
+            <a:ext cx="2560144" cy="2179806"/>
+          </a:xfrm>
+          <a:prstGeom prst="rect">
+            <a:avLst/>
+          </a:prstGeom>
+        </p:spPr>
+      </p:pic>
+      <p:sp>
+        <p:nvSpPr>
+          <p:cNvPr id="9" name="Textfeld 8">
+            <a:extLst>
+              <a:ext uri="{FF2B5EF4-FFF2-40B4-BE49-F238E27FC236}">
+                <a16:creationId xmlns:a16="http://schemas.microsoft.com/office/drawing/2014/main" id="{F6ACD28B-5E4E-4F42-72B2-BCC8C82B7505}"/>
+              </a:ext>
+            </a:extLst>
+          </p:cNvPr>
+          <p:cNvSpPr txBox="1"/>
+          <p:nvPr/>
+        </p:nvSpPr>
+        <p:spPr>
+          <a:xfrm>
+            <a:off x="9395218" y="3627825"/>
+            <a:ext cx="2414572" cy="369332"/>
+          </a:xfrm>
+          <a:prstGeom prst="rect">
+            <a:avLst/>
+          </a:prstGeom>
+          <a:noFill/>
+        </p:spPr>
+        <p:txBody>
+          <a:bodyPr wrap="none" rtlCol="0">
+            <a:spAutoFit/>
+          </a:bodyPr>
+          <a:lstStyle/>
+          <a:p>
+            <a:r>
+              <a:rPr lang="de-DE" dirty="0" err="1"/>
+              <a:t>redrawn</a:t>
+            </a:r>
+            <a:r>
+              <a:rPr lang="de-DE" dirty="0"/>
+              <a:t> </a:t>
+            </a:r>
+            <a:r>
+              <a:rPr lang="de-DE" dirty="0" err="1"/>
+              <a:t>with</a:t>
+            </a:r>
+            <a:r>
+              <a:rPr lang="de-DE" dirty="0"/>
+              <a:t> </a:t>
+            </a:r>
+            <a:r>
+              <a:rPr lang="de-DE" dirty="0" err="1"/>
+              <a:t>currents</a:t>
+            </a:r>
+            <a:r>
+              <a:rPr lang="de-DE" dirty="0"/>
+              <a:t>:</a:t>
+            </a:r>
+          </a:p>
+        </p:txBody>
+      </p:sp>
+      <p:cxnSp>
+        <p:nvCxnSpPr>
+          <p:cNvPr id="11" name="Gerade Verbindung mit Pfeil 10">
+            <a:extLst>
+              <a:ext uri="{FF2B5EF4-FFF2-40B4-BE49-F238E27FC236}">
+                <a16:creationId xmlns:a16="http://schemas.microsoft.com/office/drawing/2014/main" id="{909F1F47-E6B0-E2A4-C4FF-1A7E8B57A5DC}"/>
+              </a:ext>
+            </a:extLst>
+          </p:cNvPr>
+          <p:cNvCxnSpPr>
+            <a:cxnSpLocks/>
+          </p:cNvCxnSpPr>
+          <p:nvPr/>
+        </p:nvCxnSpPr>
+        <p:spPr>
+          <a:xfrm>
+            <a:off x="4433777" y="2998381"/>
+            <a:ext cx="5571460" cy="105268"/>
+          </a:xfrm>
+          <a:prstGeom prst="straightConnector1">
+            <a:avLst/>
+          </a:prstGeom>
+          <a:ln>
+            <a:tailEnd type="triangle"/>
+          </a:ln>
+        </p:spPr>
+        <p:style>
+          <a:lnRef idx="2">
+            <a:schemeClr val="accent1"/>
+          </a:lnRef>
+          <a:fillRef idx="0">
+            <a:schemeClr val="accent1"/>
+          </a:fillRef>
+          <a:effectRef idx="1">
+            <a:schemeClr val="accent1"/>
+          </a:effectRef>
+          <a:fontRef idx="minor">
+            <a:schemeClr val="tx1"/>
+          </a:fontRef>
+        </p:style>
+      </p:cxnSp>
+      <mc:AlternateContent xmlns:mc="http://schemas.openxmlformats.org/markup-compatibility/2006">
+        <mc:Choice xmlns:a14="http://schemas.microsoft.com/office/drawing/2010/main" Requires="a14">
+          <p:sp>
+            <p:nvSpPr>
+              <p:cNvPr id="28" name="Textfeld 27">
+                <a:extLst>
+                  <a:ext uri="{FF2B5EF4-FFF2-40B4-BE49-F238E27FC236}">
+                    <a16:creationId xmlns:a16="http://schemas.microsoft.com/office/drawing/2014/main" id="{F50CCCB4-A6CD-5F4C-D303-4E63626C671B}"/>
+                  </a:ext>
+                </a:extLst>
+              </p:cNvPr>
+              <p:cNvSpPr txBox="1"/>
+              <p:nvPr/>
+            </p:nvSpPr>
+            <p:spPr>
+              <a:xfrm>
+                <a:off x="4085954" y="5438675"/>
+                <a:ext cx="4336700" cy="529440"/>
+              </a:xfrm>
+              <a:prstGeom prst="rect">
+                <a:avLst/>
+              </a:prstGeom>
+              <a:noFill/>
+              <a:ln>
+                <a:solidFill>
+                  <a:schemeClr val="tx1"/>
+                </a:solidFill>
+              </a:ln>
+            </p:spPr>
+            <p:txBody>
+              <a:bodyPr wrap="none" rtlCol="0">
+                <a:spAutoFit/>
+              </a:bodyPr>
+              <a:lstStyle/>
+              <a:p>
+                <a:r>
+                  <a:rPr lang="de-DE" dirty="0"/>
+                  <a:t>here:	</a:t>
+                </a:r>
+                <a14:m>
+                  <m:oMath xmlns:m="http://schemas.openxmlformats.org/officeDocument/2006/math">
+                    <m:sSub>
+                      <m:sSubPr>
+                        <m:ctrlPr>
+                          <a:rPr lang="de-DE" i="1" smtClean="0">
+                            <a:latin typeface="Cambria Math" panose="02040503050406030204" pitchFamily="18" charset="0"/>
+                          </a:rPr>
+                        </m:ctrlPr>
+                      </m:sSubPr>
+                      <m:e>
+                        <m:r>
+                          <a:rPr lang="de-DE" b="0" i="1" smtClean="0">
+                            <a:latin typeface="Cambria Math" panose="02040503050406030204" pitchFamily="18" charset="0"/>
+                          </a:rPr>
+                          <m:t>𝑖</m:t>
+                        </m:r>
+                      </m:e>
+                      <m:sub>
+                        <m:r>
+                          <a:rPr lang="de-DE" b="0" i="1" smtClean="0">
+                            <a:latin typeface="Cambria Math" panose="02040503050406030204" pitchFamily="18" charset="0"/>
+                          </a:rPr>
+                          <m:t>1</m:t>
+                        </m:r>
+                      </m:sub>
+                    </m:sSub>
+                    <m:r>
+                      <a:rPr lang="de-DE" b="0" i="1" smtClean="0">
+                        <a:latin typeface="Cambria Math" panose="02040503050406030204" pitchFamily="18" charset="0"/>
+                      </a:rPr>
+                      <m:t>=</m:t>
+                    </m:r>
+                    <m:f>
+                      <m:fPr>
+                        <m:ctrlPr>
+                          <a:rPr lang="de-DE" b="0" i="1" smtClean="0">
+                            <a:latin typeface="Cambria Math" panose="02040503050406030204" pitchFamily="18" charset="0"/>
+                          </a:rPr>
+                        </m:ctrlPr>
+                      </m:fPr>
+                      <m:num>
+                        <m:sSub>
+                          <m:sSubPr>
+                            <m:ctrlPr>
+                              <a:rPr lang="de-DE" b="0" i="1" smtClean="0">
+                                <a:latin typeface="Cambria Math" panose="02040503050406030204" pitchFamily="18" charset="0"/>
+                              </a:rPr>
+                            </m:ctrlPr>
+                          </m:sSubPr>
+                          <m:e>
+                            <m:r>
+                              <a:rPr lang="de-DE" b="0" i="1" smtClean="0">
+                                <a:latin typeface="Cambria Math" panose="02040503050406030204" pitchFamily="18" charset="0"/>
+                              </a:rPr>
+                              <m:t>𝑣</m:t>
+                            </m:r>
+                          </m:e>
+                          <m:sub>
+                            <m:r>
+                              <a:rPr lang="de-DE" b="0" i="1" smtClean="0">
+                                <a:latin typeface="Cambria Math" panose="02040503050406030204" pitchFamily="18" charset="0"/>
+                              </a:rPr>
+                              <m:t>1</m:t>
+                            </m:r>
+                          </m:sub>
+                        </m:sSub>
+                        <m:r>
+                          <a:rPr lang="de-DE" b="0" i="1" smtClean="0">
+                            <a:latin typeface="Cambria Math" panose="02040503050406030204" pitchFamily="18" charset="0"/>
+                          </a:rPr>
+                          <m:t>−0</m:t>
+                        </m:r>
+                      </m:num>
+                      <m:den>
+                        <m:sSub>
+                          <m:sSubPr>
+                            <m:ctrlPr>
+                              <a:rPr lang="de-DE" b="0" i="1" smtClean="0">
+                                <a:latin typeface="Cambria Math" panose="02040503050406030204" pitchFamily="18" charset="0"/>
+                              </a:rPr>
+                            </m:ctrlPr>
+                          </m:sSubPr>
+                          <m:e>
+                            <m:r>
+                              <a:rPr lang="de-DE" b="0" i="1" smtClean="0">
+                                <a:latin typeface="Cambria Math" panose="02040503050406030204" pitchFamily="18" charset="0"/>
+                              </a:rPr>
+                              <m:t>𝑅</m:t>
+                            </m:r>
+                          </m:e>
+                          <m:sub>
+                            <m:r>
+                              <a:rPr lang="de-DE" b="0" i="1" smtClean="0">
+                                <a:latin typeface="Cambria Math" panose="02040503050406030204" pitchFamily="18" charset="0"/>
+                              </a:rPr>
+                              <m:t>1</m:t>
+                            </m:r>
+                          </m:sub>
+                        </m:sSub>
+                      </m:den>
+                    </m:f>
+                  </m:oMath>
+                </a14:m>
+                <a:r>
+                  <a:rPr lang="de-DE" dirty="0"/>
+                  <a:t>	    </a:t>
+                </a:r>
+                <a14:m>
+                  <m:oMath xmlns:m="http://schemas.openxmlformats.org/officeDocument/2006/math">
+                    <m:sSub>
+                      <m:sSubPr>
+                        <m:ctrlPr>
+                          <a:rPr lang="de-DE" i="1">
+                            <a:latin typeface="Cambria Math" panose="02040503050406030204" pitchFamily="18" charset="0"/>
+                          </a:rPr>
+                        </m:ctrlPr>
+                      </m:sSubPr>
+                      <m:e>
+                        <m:r>
+                          <a:rPr lang="de-DE" i="1">
+                            <a:latin typeface="Cambria Math" panose="02040503050406030204" pitchFamily="18" charset="0"/>
+                          </a:rPr>
+                          <m:t>𝑖</m:t>
+                        </m:r>
+                      </m:e>
+                      <m:sub>
+                        <m:r>
+                          <a:rPr lang="de-DE" b="0" i="1" smtClean="0">
+                            <a:latin typeface="Cambria Math" panose="02040503050406030204" pitchFamily="18" charset="0"/>
+                          </a:rPr>
+                          <m:t>2</m:t>
+                        </m:r>
+                      </m:sub>
+                    </m:sSub>
+                    <m:r>
+                      <a:rPr lang="de-DE" i="1">
+                        <a:latin typeface="Cambria Math" panose="02040503050406030204" pitchFamily="18" charset="0"/>
+                      </a:rPr>
+                      <m:t>=</m:t>
+                    </m:r>
+                    <m:f>
+                      <m:fPr>
+                        <m:ctrlPr>
+                          <a:rPr lang="de-DE" i="1">
+                            <a:latin typeface="Cambria Math" panose="02040503050406030204" pitchFamily="18" charset="0"/>
+                          </a:rPr>
+                        </m:ctrlPr>
+                      </m:fPr>
+                      <m:num>
+                        <m:sSub>
+                          <m:sSubPr>
+                            <m:ctrlPr>
+                              <a:rPr lang="de-DE" i="1">
+                                <a:latin typeface="Cambria Math" panose="02040503050406030204" pitchFamily="18" charset="0"/>
+                              </a:rPr>
+                            </m:ctrlPr>
+                          </m:sSubPr>
+                          <m:e>
+                            <m:r>
+                              <a:rPr lang="de-DE" i="1">
+                                <a:latin typeface="Cambria Math" panose="02040503050406030204" pitchFamily="18" charset="0"/>
+                              </a:rPr>
+                              <m:t>𝑣</m:t>
+                            </m:r>
+                          </m:e>
+                          <m:sub>
+                            <m:r>
+                              <a:rPr lang="de-DE" i="1">
+                                <a:latin typeface="Cambria Math" panose="02040503050406030204" pitchFamily="18" charset="0"/>
+                              </a:rPr>
+                              <m:t>1</m:t>
+                            </m:r>
+                          </m:sub>
+                        </m:sSub>
+                        <m:r>
+                          <a:rPr lang="de-DE" i="1">
+                            <a:latin typeface="Cambria Math" panose="02040503050406030204" pitchFamily="18" charset="0"/>
+                          </a:rPr>
+                          <m:t>−</m:t>
+                        </m:r>
+                        <m:sSub>
+                          <m:sSubPr>
+                            <m:ctrlPr>
+                              <a:rPr lang="de-DE" i="1" smtClean="0">
+                                <a:latin typeface="Cambria Math" panose="02040503050406030204" pitchFamily="18" charset="0"/>
+                              </a:rPr>
+                            </m:ctrlPr>
+                          </m:sSubPr>
+                          <m:e>
+                            <m:r>
+                              <a:rPr lang="de-DE" b="0" i="1" smtClean="0">
+                                <a:latin typeface="Cambria Math" panose="02040503050406030204" pitchFamily="18" charset="0"/>
+                              </a:rPr>
+                              <m:t>𝑣</m:t>
+                            </m:r>
+                          </m:e>
+                          <m:sub>
+                            <m:r>
+                              <a:rPr lang="de-DE" b="0" i="1" smtClean="0">
+                                <a:latin typeface="Cambria Math" panose="02040503050406030204" pitchFamily="18" charset="0"/>
+                              </a:rPr>
+                              <m:t>2</m:t>
+                            </m:r>
+                          </m:sub>
+                        </m:sSub>
+                      </m:num>
+                      <m:den>
+                        <m:sSub>
+                          <m:sSubPr>
+                            <m:ctrlPr>
+                              <a:rPr lang="de-DE" i="1">
+                                <a:latin typeface="Cambria Math" panose="02040503050406030204" pitchFamily="18" charset="0"/>
+                              </a:rPr>
+                            </m:ctrlPr>
+                          </m:sSubPr>
+                          <m:e>
+                            <m:r>
+                              <a:rPr lang="de-DE" i="1">
+                                <a:latin typeface="Cambria Math" panose="02040503050406030204" pitchFamily="18" charset="0"/>
+                              </a:rPr>
+                              <m:t>𝑅</m:t>
+                            </m:r>
+                          </m:e>
+                          <m:sub>
+                            <m:r>
+                              <a:rPr lang="de-DE" b="0" i="1" smtClean="0">
+                                <a:latin typeface="Cambria Math" panose="02040503050406030204" pitchFamily="18" charset="0"/>
+                              </a:rPr>
+                              <m:t>2</m:t>
+                            </m:r>
+                          </m:sub>
+                        </m:sSub>
+                      </m:den>
+                    </m:f>
+                  </m:oMath>
+                </a14:m>
+                <a:r>
+                  <a:rPr lang="de-DE" dirty="0"/>
+                  <a:t>      </a:t>
+                </a:r>
+                <a14:m>
+                  <m:oMath xmlns:m="http://schemas.openxmlformats.org/officeDocument/2006/math">
+                    <m:sSub>
+                      <m:sSubPr>
+                        <m:ctrlPr>
+                          <a:rPr lang="de-DE" i="1">
+                            <a:latin typeface="Cambria Math" panose="02040503050406030204" pitchFamily="18" charset="0"/>
+                          </a:rPr>
+                        </m:ctrlPr>
+                      </m:sSubPr>
+                      <m:e>
+                        <m:r>
+                          <a:rPr lang="de-DE" i="1">
+                            <a:latin typeface="Cambria Math" panose="02040503050406030204" pitchFamily="18" charset="0"/>
+                          </a:rPr>
+                          <m:t>𝑖</m:t>
+                        </m:r>
+                      </m:e>
+                      <m:sub>
+                        <m:r>
+                          <a:rPr lang="de-DE" b="0" i="1" smtClean="0">
+                            <a:latin typeface="Cambria Math" panose="02040503050406030204" pitchFamily="18" charset="0"/>
+                          </a:rPr>
+                          <m:t>3</m:t>
+                        </m:r>
+                      </m:sub>
+                    </m:sSub>
+                    <m:r>
+                      <a:rPr lang="de-DE" i="1">
+                        <a:latin typeface="Cambria Math" panose="02040503050406030204" pitchFamily="18" charset="0"/>
+                      </a:rPr>
+                      <m:t>=</m:t>
+                    </m:r>
+                    <m:f>
+                      <m:fPr>
+                        <m:ctrlPr>
+                          <a:rPr lang="de-DE" i="1">
+                            <a:latin typeface="Cambria Math" panose="02040503050406030204" pitchFamily="18" charset="0"/>
+                          </a:rPr>
+                        </m:ctrlPr>
+                      </m:fPr>
+                      <m:num>
+                        <m:sSub>
+                          <m:sSubPr>
+                            <m:ctrlPr>
+                              <a:rPr lang="de-DE" i="1">
+                                <a:latin typeface="Cambria Math" panose="02040503050406030204" pitchFamily="18" charset="0"/>
+                              </a:rPr>
+                            </m:ctrlPr>
+                          </m:sSubPr>
+                          <m:e>
+                            <m:r>
+                              <a:rPr lang="de-DE" i="1">
+                                <a:latin typeface="Cambria Math" panose="02040503050406030204" pitchFamily="18" charset="0"/>
+                              </a:rPr>
+                              <m:t>𝑣</m:t>
+                            </m:r>
+                          </m:e>
+                          <m:sub>
+                            <m:r>
+                              <a:rPr lang="de-DE" b="0" i="1" smtClean="0">
+                                <a:latin typeface="Cambria Math" panose="02040503050406030204" pitchFamily="18" charset="0"/>
+                              </a:rPr>
+                              <m:t>2</m:t>
+                            </m:r>
+                          </m:sub>
+                        </m:sSub>
+                        <m:r>
+                          <a:rPr lang="de-DE" i="1">
+                            <a:latin typeface="Cambria Math" panose="02040503050406030204" pitchFamily="18" charset="0"/>
+                          </a:rPr>
+                          <m:t>−0</m:t>
+                        </m:r>
+                      </m:num>
+                      <m:den>
+                        <m:sSub>
+                          <m:sSubPr>
+                            <m:ctrlPr>
+                              <a:rPr lang="de-DE" i="1">
+                                <a:latin typeface="Cambria Math" panose="02040503050406030204" pitchFamily="18" charset="0"/>
+                              </a:rPr>
+                            </m:ctrlPr>
+                          </m:sSubPr>
+                          <m:e>
+                            <m:r>
+                              <a:rPr lang="de-DE" i="1">
+                                <a:latin typeface="Cambria Math" panose="02040503050406030204" pitchFamily="18" charset="0"/>
+                              </a:rPr>
+                              <m:t>𝑅</m:t>
+                            </m:r>
+                          </m:e>
+                          <m:sub>
+                            <m:r>
+                              <a:rPr lang="de-DE" b="0" i="1" smtClean="0">
+                                <a:latin typeface="Cambria Math" panose="02040503050406030204" pitchFamily="18" charset="0"/>
+                              </a:rPr>
+                              <m:t>3</m:t>
+                            </m:r>
+                          </m:sub>
+                        </m:sSub>
+                      </m:den>
+                    </m:f>
+                  </m:oMath>
+                </a14:m>
+                <a:endParaRPr lang="de-DE" dirty="0"/>
+              </a:p>
+            </p:txBody>
+          </p:sp>
+        </mc:Choice>
+        <mc:Fallback>
+          <p:sp>
+            <p:nvSpPr>
+              <p:cNvPr id="28" name="Textfeld 27">
+                <a:extLst>
+                  <a:ext uri="{FF2B5EF4-FFF2-40B4-BE49-F238E27FC236}">
+                    <a16:creationId xmlns:a16="http://schemas.microsoft.com/office/drawing/2014/main" id="{F50CCCB4-A6CD-5F4C-D303-4E63626C671B}"/>
+                  </a:ext>
+                </a:extLst>
+              </p:cNvPr>
+              <p:cNvSpPr txBox="1">
+                <a:spLocks noRot="1" noChangeAspect="1" noMove="1" noResize="1" noEditPoints="1" noAdjustHandles="1" noChangeArrowheads="1" noChangeShapeType="1" noTextEdit="1"/>
+              </p:cNvSpPr>
+              <p:nvPr/>
+            </p:nvSpPr>
+            <p:spPr>
+              <a:xfrm>
+                <a:off x="4085954" y="5438675"/>
+                <a:ext cx="4336700" cy="529440"/>
+              </a:xfrm>
+              <a:prstGeom prst="rect">
+                <a:avLst/>
+              </a:prstGeom>
+              <a:blipFill>
+                <a:blip r:embed="rId6"/>
+                <a:stretch>
+                  <a:fillRect l="-1166"/>
+                </a:stretch>
+              </a:blipFill>
+              <a:ln>
+                <a:solidFill>
+                  <a:schemeClr val="tx1"/>
+                </a:solidFill>
+              </a:ln>
+            </p:spPr>
+            <p:txBody>
+              <a:bodyPr/>
+              <a:lstStyle/>
+              <a:p>
+                <a:r>
+                  <a:rPr lang="de-DE">
+                    <a:noFill/>
+                  </a:rPr>
+                  <a:t> </a:t>
+                </a:r>
+              </a:p>
+            </p:txBody>
+          </p:sp>
+        </mc:Fallback>
+      </mc:AlternateContent>
+      <mc:AlternateContent xmlns:mc="http://schemas.openxmlformats.org/markup-compatibility/2006">
+        <mc:Choice xmlns:a14="http://schemas.microsoft.com/office/drawing/2010/main" Requires="a14">
+          <p:sp>
+            <p:nvSpPr>
+              <p:cNvPr id="5" name="Textfeld 4">
+                <a:extLst>
+                  <a:ext uri="{FF2B5EF4-FFF2-40B4-BE49-F238E27FC236}">
+                    <a16:creationId xmlns:a16="http://schemas.microsoft.com/office/drawing/2014/main" id="{5A072E3D-0314-772B-BB71-18E9441C8815}"/>
+                  </a:ext>
+                </a:extLst>
+              </p:cNvPr>
+              <p:cNvSpPr txBox="1"/>
+              <p:nvPr/>
+            </p:nvSpPr>
+            <p:spPr>
+              <a:xfrm>
+                <a:off x="789569" y="5323154"/>
+                <a:ext cx="2630528" cy="646524"/>
+              </a:xfrm>
+              <a:prstGeom prst="rect">
+                <a:avLst/>
+              </a:prstGeom>
+              <a:noFill/>
+              <a:ln>
+                <a:noFill/>
+              </a:ln>
+            </p:spPr>
+            <p:txBody>
+              <a:bodyPr wrap="none" lIns="0" tIns="0" rIns="0" bIns="0" rtlCol="0">
+                <a:spAutoFit/>
+              </a:bodyPr>
+              <a:lstStyle/>
+              <a:p>
+                <a14:m>
+                  <m:oMathPara xmlns:m="http://schemas.openxmlformats.org/officeDocument/2006/math">
+                    <m:oMathParaPr>
+                      <m:jc m:val="centerGroup"/>
+                    </m:oMathParaPr>
+                    <m:oMath xmlns:m="http://schemas.openxmlformats.org/officeDocument/2006/math">
+                      <m:r>
+                        <a:rPr lang="de-DE" sz="2400" b="0" i="1" smtClean="0">
+                          <a:latin typeface="Cambria Math" panose="02040503050406030204" pitchFamily="18" charset="0"/>
+                        </a:rPr>
+                        <m:t>𝑖</m:t>
+                      </m:r>
+                      <m:r>
+                        <a:rPr lang="de-DE" sz="2400" b="0" i="1" smtClean="0">
+                          <a:latin typeface="Cambria Math" panose="02040503050406030204" pitchFamily="18" charset="0"/>
+                        </a:rPr>
+                        <m:t>=</m:t>
+                      </m:r>
+                      <m:f>
+                        <m:fPr>
+                          <m:ctrlPr>
+                            <a:rPr lang="de-DE" sz="2400" b="0" i="1" smtClean="0">
+                              <a:latin typeface="Cambria Math" panose="02040503050406030204" pitchFamily="18" charset="0"/>
+                            </a:rPr>
+                          </m:ctrlPr>
+                        </m:fPr>
+                        <m:num>
+                          <m:sSub>
+                            <m:sSubPr>
+                              <m:ctrlPr>
+                                <a:rPr lang="de-DE" sz="2400" b="0" i="1" smtClean="0">
+                                  <a:latin typeface="Cambria Math" panose="02040503050406030204" pitchFamily="18" charset="0"/>
+                                </a:rPr>
+                              </m:ctrlPr>
+                            </m:sSubPr>
+                            <m:e>
+                              <m:r>
+                                <a:rPr lang="de-DE" sz="2400" b="0" i="1" smtClean="0">
+                                  <a:latin typeface="Cambria Math" panose="02040503050406030204" pitchFamily="18" charset="0"/>
+                                </a:rPr>
+                                <m:t>𝑣</m:t>
+                              </m:r>
+                            </m:e>
+                            <m:sub>
+                              <m:r>
+                                <m:rPr>
+                                  <m:sty m:val="p"/>
+                                </m:rPr>
+                                <a:rPr lang="de-DE" sz="2400" b="0" i="0" smtClean="0">
+                                  <a:latin typeface="Cambria Math" panose="02040503050406030204" pitchFamily="18" charset="0"/>
+                                </a:rPr>
+                                <m:t>higher</m:t>
+                              </m:r>
+                            </m:sub>
+                          </m:sSub>
+                          <m:r>
+                            <a:rPr lang="de-DE" sz="2400" b="0" i="1" smtClean="0">
+                              <a:latin typeface="Cambria Math" panose="02040503050406030204" pitchFamily="18" charset="0"/>
+                            </a:rPr>
+                            <m:t>−</m:t>
+                          </m:r>
+                          <m:sSub>
+                            <m:sSubPr>
+                              <m:ctrlPr>
+                                <a:rPr lang="de-DE" sz="2400" b="0" i="1" smtClean="0">
+                                  <a:latin typeface="Cambria Math" panose="02040503050406030204" pitchFamily="18" charset="0"/>
+                                </a:rPr>
+                              </m:ctrlPr>
+                            </m:sSubPr>
+                            <m:e>
+                              <m:r>
+                                <a:rPr lang="de-DE" sz="2400" b="0" i="1" smtClean="0">
+                                  <a:latin typeface="Cambria Math" panose="02040503050406030204" pitchFamily="18" charset="0"/>
+                                </a:rPr>
+                                <m:t>𝑣</m:t>
+                              </m:r>
+                            </m:e>
+                            <m:sub>
+                              <m:r>
+                                <m:rPr>
+                                  <m:sty m:val="p"/>
+                                </m:rPr>
+                                <a:rPr lang="de-DE" sz="2400" b="0" i="0" smtClean="0">
+                                  <a:latin typeface="Cambria Math" panose="02040503050406030204" pitchFamily="18" charset="0"/>
+                                </a:rPr>
+                                <m:t>lower</m:t>
+                              </m:r>
+                            </m:sub>
+                          </m:sSub>
+                        </m:num>
+                        <m:den>
+                          <m:r>
+                            <a:rPr lang="de-DE" sz="2400" b="0" i="1" smtClean="0">
+                              <a:latin typeface="Cambria Math" panose="02040503050406030204" pitchFamily="18" charset="0"/>
+                            </a:rPr>
+                            <m:t>𝑅</m:t>
+                          </m:r>
+                        </m:den>
+                      </m:f>
+                    </m:oMath>
+                  </m:oMathPara>
+                </a14:m>
+                <a:endParaRPr lang="de-DE" sz="2400" dirty="0"/>
+              </a:p>
+            </p:txBody>
+          </p:sp>
+        </mc:Choice>
+        <mc:Fallback>
+          <p:sp>
+            <p:nvSpPr>
+              <p:cNvPr id="5" name="Textfeld 4">
+                <a:extLst>
+                  <a:ext uri="{FF2B5EF4-FFF2-40B4-BE49-F238E27FC236}">
+                    <a16:creationId xmlns:a16="http://schemas.microsoft.com/office/drawing/2014/main" id="{5A072E3D-0314-772B-BB71-18E9441C8815}"/>
+                  </a:ext>
+                </a:extLst>
+              </p:cNvPr>
+              <p:cNvSpPr txBox="1">
+                <a:spLocks noRot="1" noChangeAspect="1" noMove="1" noResize="1" noEditPoints="1" noAdjustHandles="1" noChangeArrowheads="1" noChangeShapeType="1" noTextEdit="1"/>
+              </p:cNvSpPr>
+              <p:nvPr/>
+            </p:nvSpPr>
+            <p:spPr>
+              <a:xfrm>
+                <a:off x="789569" y="5323154"/>
+                <a:ext cx="2630528" cy="646524"/>
+              </a:xfrm>
+              <a:prstGeom prst="rect">
+                <a:avLst/>
+              </a:prstGeom>
+              <a:blipFill>
+                <a:blip r:embed="rId7"/>
+                <a:stretch>
+                  <a:fillRect l="-2404" r="-962" b="-15686"/>
+                </a:stretch>
+              </a:blipFill>
+              <a:ln>
+                <a:noFill/>
+              </a:ln>
+            </p:spPr>
+            <p:txBody>
+              <a:bodyPr/>
+              <a:lstStyle/>
+              <a:p>
+                <a:r>
+                  <a:rPr lang="de-DE">
+                    <a:noFill/>
+                  </a:rPr>
+                  <a:t> </a:t>
+                </a:r>
+              </a:p>
+            </p:txBody>
+          </p:sp>
+        </mc:Fallback>
+      </mc:AlternateContent>
+    </p:spTree>
+    <p:extLst>
+      <p:ext uri="{BB962C8B-B14F-4D97-AF65-F5344CB8AC3E}">
+        <p14:creationId xmlns:p14="http://schemas.microsoft.com/office/powerpoint/2010/main" val="14924310"/>
+      </p:ext>
+    </p:extLst>
+  </p:cSld>
+  <p:clrMapOvr>
+    <a:masterClrMapping/>
+  </p:clrMapOvr>
+</p:sld>
+</file>
+
+<file path=ppt/slides/slide29.xml><?xml version="1.0" encoding="utf-8"?>
+<p:sld xmlns:a="http://schemas.openxmlformats.org/drawingml/2006/main" xmlns:r="http://schemas.openxmlformats.org/officeDocument/2006/relationships" xmlns:p="http://schemas.openxmlformats.org/presentationml/2006/main">
+  <p:cSld>
+    <p:spTree>
+      <p:nvGrpSpPr>
+        <p:cNvPr id="1" name=""/>
+        <p:cNvGrpSpPr/>
+        <p:nvPr/>
+      </p:nvGrpSpPr>
+      <p:grpSpPr>
+        <a:xfrm>
+          <a:off x="0" y="0"/>
+          <a:ext cx="0" cy="0"/>
+          <a:chOff x="0" y="0"/>
+          <a:chExt cx="0" cy="0"/>
+        </a:xfrm>
+      </p:grpSpPr>
       <p:sp>
         <p:nvSpPr>
           <p:cNvPr id="2" name="Titel 1">
@@ -21473,7 +23063,7 @@
           <a:p>
             <a:fld id="{BA3EAA6B-85FB-CD46-8BDC-C1BC3364C8C0}" type="slidenum">
               <a:rPr lang="de-DE" smtClean="0"/>
-              <a:t>28</a:t>
+              <a:t>29</a:t>
             </a:fld>
             <a:endParaRPr lang="de-DE"/>
           </a:p>
@@ -21624,7 +23214,263 @@
 </p:sld>
 </file>
 
-<file path=ppt/slides/slide29.xml><?xml version="1.0" encoding="utf-8"?>
+<file path=ppt/slides/slide3.xml><?xml version="1.0" encoding="utf-8"?>
+<p:sld xmlns:a="http://schemas.openxmlformats.org/drawingml/2006/main" xmlns:r="http://schemas.openxmlformats.org/officeDocument/2006/relationships" xmlns:p="http://schemas.openxmlformats.org/presentationml/2006/main">
+  <p:cSld>
+    <p:spTree>
+      <p:nvGrpSpPr>
+        <p:cNvPr id="1" name=""/>
+        <p:cNvGrpSpPr/>
+        <p:nvPr/>
+      </p:nvGrpSpPr>
+      <p:grpSpPr>
+        <a:xfrm>
+          <a:off x="0" y="0"/>
+          <a:ext cx="0" cy="0"/>
+          <a:chOff x="0" y="0"/>
+          <a:chExt cx="0" cy="0"/>
+        </a:xfrm>
+      </p:grpSpPr>
+      <p:sp>
+        <p:nvSpPr>
+          <p:cNvPr id="2" name="Titel 1">
+            <a:extLst>
+              <a:ext uri="{FF2B5EF4-FFF2-40B4-BE49-F238E27FC236}">
+                <a16:creationId xmlns:a16="http://schemas.microsoft.com/office/drawing/2014/main" id="{DB74D2FB-12C7-57AA-FADD-8E8C969423A8}"/>
+              </a:ext>
+            </a:extLst>
+          </p:cNvPr>
+          <p:cNvSpPr>
+            <a:spLocks noGrp="1"/>
+          </p:cNvSpPr>
+          <p:nvPr>
+            <p:ph type="title"/>
+          </p:nvPr>
+        </p:nvSpPr>
+        <p:spPr/>
+        <p:txBody>
+          <a:bodyPr/>
+          <a:lstStyle/>
+          <a:p>
+            <a:r>
+              <a:rPr lang="de-DE" dirty="0" err="1"/>
+              <a:t>Direct</a:t>
+            </a:r>
+            <a:r>
+              <a:rPr lang="de-DE" dirty="0"/>
+              <a:t> </a:t>
+            </a:r>
+            <a:r>
+              <a:rPr lang="de-DE" dirty="0" err="1"/>
+              <a:t>Current</a:t>
+            </a:r>
+            <a:r>
+              <a:rPr lang="de-DE" dirty="0"/>
+              <a:t> </a:t>
+            </a:r>
+            <a:r>
+              <a:rPr lang="de-DE" dirty="0" err="1"/>
+              <a:t>Circuits</a:t>
+            </a:r>
+            <a:endParaRPr lang="de-DE" dirty="0"/>
+          </a:p>
+        </p:txBody>
+      </p:sp>
+      <p:sp>
+        <p:nvSpPr>
+          <p:cNvPr id="3" name="Inhaltsplatzhalter 2">
+            <a:extLst>
+              <a:ext uri="{FF2B5EF4-FFF2-40B4-BE49-F238E27FC236}">
+                <a16:creationId xmlns:a16="http://schemas.microsoft.com/office/drawing/2014/main" id="{96CB17E7-EF89-1307-64B3-BBA6BC800C6E}"/>
+              </a:ext>
+            </a:extLst>
+          </p:cNvPr>
+          <p:cNvSpPr>
+            <a:spLocks noGrp="1"/>
+          </p:cNvSpPr>
+          <p:nvPr>
+            <p:ph idx="1"/>
+          </p:nvPr>
+        </p:nvSpPr>
+        <p:spPr/>
+        <p:txBody>
+          <a:bodyPr>
+            <a:normAutofit lnSpcReduction="10000"/>
+          </a:bodyPr>
+          <a:lstStyle/>
+          <a:p>
+            <a:r>
+              <a:rPr lang="de-DE" dirty="0"/>
+              <a:t>Reference </a:t>
+            </a:r>
+            <a:r>
+              <a:rPr lang="de-DE" dirty="0" err="1"/>
+              <a:t>Directions</a:t>
+            </a:r>
+            <a:endParaRPr lang="de-DE" dirty="0"/>
+          </a:p>
+          <a:p>
+            <a:r>
+              <a:rPr lang="de-DE" dirty="0" err="1"/>
+              <a:t>Kirchhoff‘s</a:t>
+            </a:r>
+            <a:r>
+              <a:rPr lang="de-DE" dirty="0"/>
+              <a:t> </a:t>
+            </a:r>
+            <a:r>
+              <a:rPr lang="de-DE" dirty="0" err="1"/>
+              <a:t>Current</a:t>
+            </a:r>
+            <a:r>
+              <a:rPr lang="de-DE" dirty="0"/>
+              <a:t> Law</a:t>
+            </a:r>
+          </a:p>
+          <a:p>
+            <a:r>
+              <a:rPr lang="de-DE" dirty="0" err="1"/>
+              <a:t>Kirchhoff‘s</a:t>
+            </a:r>
+            <a:r>
+              <a:rPr lang="de-DE" dirty="0"/>
+              <a:t> </a:t>
+            </a:r>
+            <a:r>
+              <a:rPr lang="de-DE" dirty="0" err="1"/>
+              <a:t>Voltage</a:t>
+            </a:r>
+            <a:r>
+              <a:rPr lang="de-DE" dirty="0"/>
+              <a:t> Law</a:t>
+            </a:r>
+          </a:p>
+          <a:p>
+            <a:r>
+              <a:rPr lang="de-DE" dirty="0"/>
+              <a:t>Series Circuit</a:t>
+            </a:r>
+          </a:p>
+          <a:p>
+            <a:r>
+              <a:rPr lang="de-DE" dirty="0"/>
+              <a:t>Parallel Circuit</a:t>
+            </a:r>
+          </a:p>
+          <a:p>
+            <a:r>
+              <a:rPr lang="de-DE" dirty="0" err="1"/>
+              <a:t>Practical</a:t>
+            </a:r>
+            <a:r>
+              <a:rPr lang="de-DE" dirty="0"/>
+              <a:t> </a:t>
+            </a:r>
+            <a:r>
+              <a:rPr lang="de-DE" dirty="0" err="1"/>
+              <a:t>Voltage</a:t>
+            </a:r>
+            <a:r>
+              <a:rPr lang="de-DE" dirty="0"/>
+              <a:t> &amp; </a:t>
+            </a:r>
+            <a:r>
+              <a:rPr lang="de-DE" dirty="0" err="1"/>
+              <a:t>Current</a:t>
+            </a:r>
+            <a:r>
+              <a:rPr lang="de-DE" dirty="0"/>
+              <a:t> Sources</a:t>
+            </a:r>
+          </a:p>
+          <a:p>
+            <a:r>
+              <a:rPr lang="de-DE" dirty="0"/>
+              <a:t>Network Analysis</a:t>
+            </a:r>
+          </a:p>
+          <a:p>
+            <a:r>
+              <a:rPr lang="de-DE" dirty="0"/>
+              <a:t>Efficiency &amp; Power/</a:t>
+            </a:r>
+            <a:r>
+              <a:rPr lang="de-DE" dirty="0" err="1"/>
+              <a:t>Impedance</a:t>
+            </a:r>
+            <a:r>
+              <a:rPr lang="de-DE" dirty="0"/>
+              <a:t> </a:t>
+            </a:r>
+            <a:r>
+              <a:rPr lang="de-DE" dirty="0" err="1"/>
+              <a:t>Matching</a:t>
+            </a:r>
+            <a:endParaRPr lang="de-DE" dirty="0"/>
+          </a:p>
+          <a:p>
+            <a:r>
+              <a:rPr lang="de-DE" dirty="0" err="1"/>
+              <a:t>Voltage</a:t>
+            </a:r>
+            <a:r>
+              <a:rPr lang="de-DE" dirty="0"/>
+              <a:t> &amp; </a:t>
+            </a:r>
+            <a:r>
+              <a:rPr lang="de-DE" dirty="0" err="1"/>
+              <a:t>Current</a:t>
+            </a:r>
+            <a:r>
+              <a:rPr lang="de-DE" dirty="0"/>
+              <a:t> Measurement</a:t>
+            </a:r>
+          </a:p>
+        </p:txBody>
+      </p:sp>
+      <p:sp>
+        <p:nvSpPr>
+          <p:cNvPr id="4" name="Foliennummernplatzhalter 3">
+            <a:extLst>
+              <a:ext uri="{FF2B5EF4-FFF2-40B4-BE49-F238E27FC236}">
+                <a16:creationId xmlns:a16="http://schemas.microsoft.com/office/drawing/2014/main" id="{7F88B751-5AB7-71F9-9B7D-4A3F44B12F73}"/>
+              </a:ext>
+            </a:extLst>
+          </p:cNvPr>
+          <p:cNvSpPr>
+            <a:spLocks noGrp="1"/>
+          </p:cNvSpPr>
+          <p:nvPr>
+            <p:ph type="sldNum" sz="quarter" idx="12"/>
+          </p:nvPr>
+        </p:nvSpPr>
+        <p:spPr/>
+        <p:txBody>
+          <a:bodyPr/>
+          <a:lstStyle/>
+          <a:p>
+            <a:fld id="{BA3EAA6B-85FB-CD46-8BDC-C1BC3364C8C0}" type="slidenum">
+              <a:rPr lang="de-DE" smtClean="0"/>
+              <a:t>3</a:t>
+            </a:fld>
+            <a:endParaRPr lang="de-DE"/>
+          </a:p>
+        </p:txBody>
+      </p:sp>
+    </p:spTree>
+    <p:extLst>
+      <p:ext uri="{BB962C8B-B14F-4D97-AF65-F5344CB8AC3E}">
+        <p14:creationId xmlns:p14="http://schemas.microsoft.com/office/powerpoint/2010/main" val="4147866485"/>
+      </p:ext>
+    </p:extLst>
+  </p:cSld>
+  <p:clrMapOvr>
+    <a:masterClrMapping/>
+  </p:clrMapOvr>
+</p:sld>
+</file>
+
+<file path=ppt/slides/slide30.xml><?xml version="1.0" encoding="utf-8"?>
 <p:sld xmlns:a="http://schemas.openxmlformats.org/drawingml/2006/main" xmlns:r="http://schemas.openxmlformats.org/officeDocument/2006/relationships" xmlns:p="http://schemas.openxmlformats.org/presentationml/2006/main">
   <p:cSld>
     <p:spTree>
@@ -23087,7 +24933,7 @@
           <a:p>
             <a:fld id="{BA3EAA6B-85FB-CD46-8BDC-C1BC3364C8C0}" type="slidenum">
               <a:rPr lang="de-DE" smtClean="0"/>
-              <a:t>29</a:t>
+              <a:t>30</a:t>
             </a:fld>
             <a:endParaRPr lang="de-DE"/>
           </a:p>
@@ -23598,263 +25444,7 @@
 </p:sld>
 </file>
 
-<file path=ppt/slides/slide3.xml><?xml version="1.0" encoding="utf-8"?>
-<p:sld xmlns:a="http://schemas.openxmlformats.org/drawingml/2006/main" xmlns:r="http://schemas.openxmlformats.org/officeDocument/2006/relationships" xmlns:p="http://schemas.openxmlformats.org/presentationml/2006/main">
-  <p:cSld>
-    <p:spTree>
-      <p:nvGrpSpPr>
-        <p:cNvPr id="1" name=""/>
-        <p:cNvGrpSpPr/>
-        <p:nvPr/>
-      </p:nvGrpSpPr>
-      <p:grpSpPr>
-        <a:xfrm>
-          <a:off x="0" y="0"/>
-          <a:ext cx="0" cy="0"/>
-          <a:chOff x="0" y="0"/>
-          <a:chExt cx="0" cy="0"/>
-        </a:xfrm>
-      </p:grpSpPr>
-      <p:sp>
-        <p:nvSpPr>
-          <p:cNvPr id="2" name="Titel 1">
-            <a:extLst>
-              <a:ext uri="{FF2B5EF4-FFF2-40B4-BE49-F238E27FC236}">
-                <a16:creationId xmlns:a16="http://schemas.microsoft.com/office/drawing/2014/main" id="{DB74D2FB-12C7-57AA-FADD-8E8C969423A8}"/>
-              </a:ext>
-            </a:extLst>
-          </p:cNvPr>
-          <p:cNvSpPr>
-            <a:spLocks noGrp="1"/>
-          </p:cNvSpPr>
-          <p:nvPr>
-            <p:ph type="title"/>
-          </p:nvPr>
-        </p:nvSpPr>
-        <p:spPr/>
-        <p:txBody>
-          <a:bodyPr/>
-          <a:lstStyle/>
-          <a:p>
-            <a:r>
-              <a:rPr lang="de-DE" dirty="0" err="1"/>
-              <a:t>Direct</a:t>
-            </a:r>
-            <a:r>
-              <a:rPr lang="de-DE" dirty="0"/>
-              <a:t> </a:t>
-            </a:r>
-            <a:r>
-              <a:rPr lang="de-DE" dirty="0" err="1"/>
-              <a:t>Current</a:t>
-            </a:r>
-            <a:r>
-              <a:rPr lang="de-DE" dirty="0"/>
-              <a:t> </a:t>
-            </a:r>
-            <a:r>
-              <a:rPr lang="de-DE" dirty="0" err="1"/>
-              <a:t>Circuits</a:t>
-            </a:r>
-            <a:endParaRPr lang="de-DE" dirty="0"/>
-          </a:p>
-        </p:txBody>
-      </p:sp>
-      <p:sp>
-        <p:nvSpPr>
-          <p:cNvPr id="3" name="Inhaltsplatzhalter 2">
-            <a:extLst>
-              <a:ext uri="{FF2B5EF4-FFF2-40B4-BE49-F238E27FC236}">
-                <a16:creationId xmlns:a16="http://schemas.microsoft.com/office/drawing/2014/main" id="{96CB17E7-EF89-1307-64B3-BBA6BC800C6E}"/>
-              </a:ext>
-            </a:extLst>
-          </p:cNvPr>
-          <p:cNvSpPr>
-            <a:spLocks noGrp="1"/>
-          </p:cNvSpPr>
-          <p:nvPr>
-            <p:ph idx="1"/>
-          </p:nvPr>
-        </p:nvSpPr>
-        <p:spPr/>
-        <p:txBody>
-          <a:bodyPr>
-            <a:normAutofit lnSpcReduction="10000"/>
-          </a:bodyPr>
-          <a:lstStyle/>
-          <a:p>
-            <a:r>
-              <a:rPr lang="de-DE" dirty="0"/>
-              <a:t>Reference </a:t>
-            </a:r>
-            <a:r>
-              <a:rPr lang="de-DE" dirty="0" err="1"/>
-              <a:t>Directions</a:t>
-            </a:r>
-            <a:endParaRPr lang="de-DE" dirty="0"/>
-          </a:p>
-          <a:p>
-            <a:r>
-              <a:rPr lang="de-DE" dirty="0" err="1"/>
-              <a:t>Kirchhoff‘s</a:t>
-            </a:r>
-            <a:r>
-              <a:rPr lang="de-DE" dirty="0"/>
-              <a:t> </a:t>
-            </a:r>
-            <a:r>
-              <a:rPr lang="de-DE" dirty="0" err="1"/>
-              <a:t>Current</a:t>
-            </a:r>
-            <a:r>
-              <a:rPr lang="de-DE" dirty="0"/>
-              <a:t> Law</a:t>
-            </a:r>
-          </a:p>
-          <a:p>
-            <a:r>
-              <a:rPr lang="de-DE" dirty="0" err="1"/>
-              <a:t>Kirchhoff‘s</a:t>
-            </a:r>
-            <a:r>
-              <a:rPr lang="de-DE" dirty="0"/>
-              <a:t> </a:t>
-            </a:r>
-            <a:r>
-              <a:rPr lang="de-DE" dirty="0" err="1"/>
-              <a:t>Voltage</a:t>
-            </a:r>
-            <a:r>
-              <a:rPr lang="de-DE" dirty="0"/>
-              <a:t> Law</a:t>
-            </a:r>
-          </a:p>
-          <a:p>
-            <a:r>
-              <a:rPr lang="de-DE" dirty="0"/>
-              <a:t>Series Circuit</a:t>
-            </a:r>
-          </a:p>
-          <a:p>
-            <a:r>
-              <a:rPr lang="de-DE" dirty="0"/>
-              <a:t>Parallel Circuit</a:t>
-            </a:r>
-          </a:p>
-          <a:p>
-            <a:r>
-              <a:rPr lang="de-DE" dirty="0" err="1"/>
-              <a:t>Practical</a:t>
-            </a:r>
-            <a:r>
-              <a:rPr lang="de-DE" dirty="0"/>
-              <a:t> </a:t>
-            </a:r>
-            <a:r>
-              <a:rPr lang="de-DE" dirty="0" err="1"/>
-              <a:t>Voltage</a:t>
-            </a:r>
-            <a:r>
-              <a:rPr lang="de-DE" dirty="0"/>
-              <a:t> &amp; </a:t>
-            </a:r>
-            <a:r>
-              <a:rPr lang="de-DE" dirty="0" err="1"/>
-              <a:t>Current</a:t>
-            </a:r>
-            <a:r>
-              <a:rPr lang="de-DE" dirty="0"/>
-              <a:t> Sources</a:t>
-            </a:r>
-          </a:p>
-          <a:p>
-            <a:r>
-              <a:rPr lang="de-DE" dirty="0"/>
-              <a:t>Network Analysis</a:t>
-            </a:r>
-          </a:p>
-          <a:p>
-            <a:r>
-              <a:rPr lang="de-DE" dirty="0"/>
-              <a:t>Efficiency &amp; Power/</a:t>
-            </a:r>
-            <a:r>
-              <a:rPr lang="de-DE" dirty="0" err="1"/>
-              <a:t>Impedance</a:t>
-            </a:r>
-            <a:r>
-              <a:rPr lang="de-DE" dirty="0"/>
-              <a:t> </a:t>
-            </a:r>
-            <a:r>
-              <a:rPr lang="de-DE" dirty="0" err="1"/>
-              <a:t>Matching</a:t>
-            </a:r>
-            <a:endParaRPr lang="de-DE" dirty="0"/>
-          </a:p>
-          <a:p>
-            <a:r>
-              <a:rPr lang="de-DE" dirty="0" err="1"/>
-              <a:t>Voltage</a:t>
-            </a:r>
-            <a:r>
-              <a:rPr lang="de-DE" dirty="0"/>
-              <a:t> &amp; </a:t>
-            </a:r>
-            <a:r>
-              <a:rPr lang="de-DE" dirty="0" err="1"/>
-              <a:t>Current</a:t>
-            </a:r>
-            <a:r>
-              <a:rPr lang="de-DE" dirty="0"/>
-              <a:t> Measurement</a:t>
-            </a:r>
-          </a:p>
-        </p:txBody>
-      </p:sp>
-      <p:sp>
-        <p:nvSpPr>
-          <p:cNvPr id="4" name="Foliennummernplatzhalter 3">
-            <a:extLst>
-              <a:ext uri="{FF2B5EF4-FFF2-40B4-BE49-F238E27FC236}">
-                <a16:creationId xmlns:a16="http://schemas.microsoft.com/office/drawing/2014/main" id="{7F88B751-5AB7-71F9-9B7D-4A3F44B12F73}"/>
-              </a:ext>
-            </a:extLst>
-          </p:cNvPr>
-          <p:cNvSpPr>
-            <a:spLocks noGrp="1"/>
-          </p:cNvSpPr>
-          <p:nvPr>
-            <p:ph type="sldNum" sz="quarter" idx="12"/>
-          </p:nvPr>
-        </p:nvSpPr>
-        <p:spPr/>
-        <p:txBody>
-          <a:bodyPr/>
-          <a:lstStyle/>
-          <a:p>
-            <a:fld id="{BA3EAA6B-85FB-CD46-8BDC-C1BC3364C8C0}" type="slidenum">
-              <a:rPr lang="de-DE" smtClean="0"/>
-              <a:t>3</a:t>
-            </a:fld>
-            <a:endParaRPr lang="de-DE"/>
-          </a:p>
-        </p:txBody>
-      </p:sp>
-    </p:spTree>
-    <p:extLst>
-      <p:ext uri="{BB962C8B-B14F-4D97-AF65-F5344CB8AC3E}">
-        <p14:creationId xmlns:p14="http://schemas.microsoft.com/office/powerpoint/2010/main" val="4147866485"/>
-      </p:ext>
-    </p:extLst>
-  </p:cSld>
-  <p:clrMapOvr>
-    <a:masterClrMapping/>
-  </p:clrMapOvr>
-</p:sld>
-</file>
-
-<file path=ppt/slides/slide30.xml><?xml version="1.0" encoding="utf-8"?>
+<file path=ppt/slides/slide31.xml><?xml version="1.0" encoding="utf-8"?>
 <p:sld xmlns:a="http://schemas.openxmlformats.org/drawingml/2006/main" xmlns:r="http://schemas.openxmlformats.org/officeDocument/2006/relationships" xmlns:p="http://schemas.openxmlformats.org/presentationml/2006/main">
   <p:cSld>
     <p:spTree>
@@ -23934,7 +25524,7 @@
           <a:p>
             <a:fld id="{BA3EAA6B-85FB-CD46-8BDC-C1BC3364C8C0}" type="slidenum">
               <a:rPr lang="de-DE" smtClean="0"/>
-              <a:t>30</a:t>
+              <a:t>31</a:t>
             </a:fld>
             <a:endParaRPr lang="de-DE"/>
           </a:p>
@@ -24467,7 +26057,7 @@
 </p:sld>
 </file>
 
-<file path=ppt/slides/slide31.xml><?xml version="1.0" encoding="utf-8"?>
+<file path=ppt/slides/slide32.xml><?xml version="1.0" encoding="utf-8"?>
 <p:sld xmlns:a="http://schemas.openxmlformats.org/drawingml/2006/main" xmlns:r="http://schemas.openxmlformats.org/officeDocument/2006/relationships" xmlns:p="http://schemas.openxmlformats.org/presentationml/2006/main">
   <p:cSld>
     <p:spTree>
@@ -24635,7 +26225,7 @@
           <a:p>
             <a:fld id="{BA3EAA6B-85FB-CD46-8BDC-C1BC3364C8C0}" type="slidenum">
               <a:rPr lang="de-DE" smtClean="0"/>
-              <a:t>31</a:t>
+              <a:t>32</a:t>
             </a:fld>
             <a:endParaRPr lang="de-DE"/>
           </a:p>
